--- a/slaydlar/M3.pptx
+++ b/slaydlar/M3.pptx
@@ -26,6 +26,7 @@
     <p:sldId id="274" r:id="rId26"/>
     <p:sldId id="275" r:id="rId27"/>
     <p:sldId id="276" r:id="rId28"/>
+    <p:sldId id="277" r:id="rId29"/>
   </p:sldIdLst>
   <p:sldSz cx="12192000" cy="6858000" type="screen4x3"/>
   <p:notesSz cx="6858000" cy="9144000"/>
@@ -610,6 +611,88 @@
           <a:lstStyle/>
           <a:p>
             <a:r>
+              <a:t>Tensor parallelligi (tensor parallelism, TP) bitta qatlamni, ya'ni bitta matritsa ko'paytirishni GPU lar o'rtasida bo'ladi. Megatron-LM (Shoeybi va hammualliflar, 2019, NVIDIA) transformer uchun samarali sxemani taklif qildi: MLP blokidagi birinchi chiziqli qatlam Y = GeLU(X·A) da matritsa A ustunlar bo'yicha bo'linadi (har GPU X·Aᵢ ni mustaqil hisoblaydi, GeLU elementma-element bo'lgani uchun aloqa kerak emas), ikkinchi qatlam Z = Y·B da B satrlar bo'yicha bo'linadi va qisman natijalar bitta all-reduce bilan yig'iladi. Diqqat mexanizmida boshlar (heads) GPU lar o'rtasida taqsimlanadi. Natijada har transformer qatlamida oldinga o'tishda 2 ta, orqaga o'tishda 2 ta all-reduce — har mikro-paket uchun aktivatsiya hajmida. Bu aloqa tez-tez va ketma-ket bo'lgani uchun TP faqat eng tez interkonnekt — NVLink — ichida, ya'ni bitta server doirasida (TP = 8) ishlatiladi.</a:t>
+            </a:r>
+          </a:p>
+          <a:p/>
+          <a:p>
+            <a:r>
+              <a:t>Quvur parallelligi (pipeline parallelism, PP) modelni qatlamlar bo'yicha ketma-ket bosqichlarga (stage) bo'ladi: 1–8-qatlamlar GPU 0 da, 9–16-qatlamlar GPU 1 da va hokazo. Bosqichlar o'rtasida faqat chegara aktivatsiyalari (nuqta-nuqta) uzatiladi — bu TP dan ancha kam aloqa, shuning uchun PP serverlar o'rtasida ham ishlaydi. Muammo — pufak (bubble): sodda bajarishda GPU 1 GPU 0 tugatguncha bo'sh turadi. GPipe (Huang va hammualliflar, 2019) paketni m mikro-paketga bo'lib, ularni quvur bo'ylab ketma-ket yuboradi; pufak ulushi (s − 1) / (m + s − 1) ga tushadi, bu yerda s — bosqichlar soni. Masalan, s = 4, m = 16 da pufak 16 % (3/19); m = 64 da 4,5 %. PipeDream (Narayanan va hammualliflar, 2019) va Megatron ning 1F1B jadvali (bir oldinga, bir orqaga) aktivatsiya xotirasini kamaytiradi — mikro-paketning orqaga o'tishi imkon qadar erta bajarilib, aktivatsiyalari bo'shatiladi.</a:t>
+            </a:r>
+          </a:p>
+          <a:p/>
+          <a:p>
+            <a:r>
+              <a:t>Amalda uchala o'q birlashtiriladi — 3D parallellik: TP server ichida (NVLink, 8 GPU), PP serverlar guruhi bo'ylab, DP (yoki ZeRO) eng tashqi darajada. Megatron-Turing NLG 530B (2021) 560 ta DGX A100 da TP = 8, PP = 35, DP = 12 konfiguratsiyasida o'qitilgan. Quyidagi jadval strategiyalarni taqqoslaydi:</a:t>
+            </a:r>
+          </a:p>
+        </p:txBody>
+      </p:sp>
+      <p:sp>
+        <p:nvSpPr>
+          <p:cNvPr id="4" name="Slide Number Placeholder 3"/>
+          <p:cNvSpPr>
+            <a:spLocks noGrp="1"/>
+          </p:cNvSpPr>
+          <p:nvPr>
+            <p:ph type="sldNum" idx="5" sz="quarter"/>
+          </p:nvPr>
+        </p:nvSpPr>
+        <p:spPr/>
+      </p:sp>
+    </p:spTree>
+  </p:cSld>
+  <p:clrMapOvr>
+    <a:masterClrMapping/>
+  </p:clrMapOvr>
+</p:notes>
+</file>
+
+<file path=ppt/notesSlides/notesSlide11.xml><?xml version="1.0" encoding="utf-8"?>
+<p:notes xmlns:a="http://schemas.openxmlformats.org/drawingml/2006/main" xmlns:p="http://schemas.openxmlformats.org/presentationml/2006/main" xmlns:r="http://schemas.openxmlformats.org/officeDocument/2006/relationships">
+  <p:cSld>
+    <p:spTree>
+      <p:nvGrpSpPr>
+        <p:cNvPr id="1" name=""/>
+        <p:cNvGrpSpPr/>
+        <p:nvPr/>
+      </p:nvGrpSpPr>
+      <p:grpSpPr>
+        <a:xfrm>
+          <a:off x="0" y="0"/>
+          <a:ext cx="0" cy="0"/>
+          <a:chOff x="0" y="0"/>
+          <a:chExt cx="0" cy="0"/>
+        </a:xfrm>
+      </p:grpSpPr>
+      <p:sp>
+        <p:nvSpPr>
+          <p:cNvPr id="2" name="Slide Image Placeholder 1"/>
+          <p:cNvSpPr>
+            <a:spLocks noGrp="1"/>
+          </p:cNvSpPr>
+          <p:nvPr>
+            <p:ph type="sldImg" idx="2"/>
+          </p:nvPr>
+        </p:nvSpPr>
+        <p:spPr/>
+      </p:sp>
+      <p:sp>
+        <p:nvSpPr>
+          <p:cNvPr id="3" name="Notes Placeholder 2"/>
+          <p:cNvSpPr>
+            <a:spLocks noGrp="1"/>
+          </p:cNvSpPr>
+          <p:nvPr>
+            <p:ph type="body" idx="3" sz="quarter"/>
+          </p:nvPr>
+        </p:nvSpPr>
+        <p:spPr/>
+        <p:txBody>
+          <a:bodyPr/>
+          <a:lstStyle/>
+          <a:p>
+            <a:r>
               <a:t>Taqsimlangan SI muhiti bir necha qatlamdan iborat. Kollektiv aloqa qatlami: NCCL (NVIDIA), RCCL (AMD), oneCCL (Intel), Gloo (CPU) — topologiyani aniqlab, optimal algoritmni tanlaydi. Ramka qatlami: PyTorch Distributed (torch.distributed, DDP, FSDP, torchrun ishga tushiruvchi), TensorFlow tf.distribute, JAX pjit/sharding. Optimallashtirilgan o'qitish kutubxonalari: DeepSpeed (ZeRO, 3D parallellik, offload), Megatron-LM (TP/PP transformerlar uchun), Horovod (ring all-reduce, ko'p ramkali). Orkestratsiya qatlami: Slurm (HPC klasterlarida ish navbati va GPU ajratish), Kubernetes (bulutda; M7), Ray (Python da taqsimlangan vazifalar, Ray Train, giperparametrlarni qidirish; M7). Inferens qatlami: vLLM, TensorRT-LLM, Triton Inference Server — LLM ni TP bilan bir nechta GPU ga bo'lib xizmat ko'rsatish.</a:t>
             </a:r>
           </a:p>
@@ -692,13 +775,25 @@
           <a:lstStyle/>
           <a:p>
             <a:r>
-              <a:t>CUDA (Compute Unified Device Architecture) — NVIDIA GPU larini umumiy maqsadli hisoblash uchun dasturlash platformasi. Kirk va Hwu [5] bayon qilgan modelda dasturchi yadro (kernel) — minglab oqim parallel bajaradigan funksiya — yozadi. Oqimlar uch darajali iyerarxiyaga uyushtiriladi: oqim (thread) → blok (block, 1024 tagacha oqim, bitta SM da bajariladi, umumiy xotira orqali almashadi) → to'r (grid, bloklar to'plami). Apparat blokni 32 oqimli warp larga bo'lib, warp ni bitta buyruq bilan bajaradi. Quyidagi yadro ikki vektorni qo'shadi:</a:t>
+              <a:t>Flinn tasnifi (Flynn's taxonomy) hisoblash tizimlarini buyruq va ma'lumot oqimlari soniga ko'ra to'rt sinfga ajratadi: SISD (bitta buyruq, bitta ma'lumot — klassik skalyar protsessor), SIMD (bitta buyruq, ko'p ma'lumot — vektor bloklar, GPU warp), MISD (amalda kam uchraydi) va MIMD (ko'p buyruq, ko'p ma'lumot — ko'p yadroli CPU, klaster). Zamonaviy SI tizimi barcha darajalarni birlashtiradi: klaster MIMD, har tugundagi GPU SIMT (SIMD ning oqimli varianti), har SM ichidagi Tensor Core esa matritsa darajasidagi SIMD.</a:t>
             </a:r>
           </a:p>
           <a:p/>
           <a:p>
             <a:r>
-              <a:t>CUDA dasturining samaradorligi to'rt omilga bog'liq: bandlik (occupancy — SM da bir vaqtda faol warp lar soni, xotira kechikishini yashirish uchun ko'p bo'lishi kerak), birlashgan xotira murojaati (coalescing — warp dagi 32 oqim qo'shni manzillarga murojaat qilsa, bitta tranzaksiya), umumiy xotiradan foydalanish (ma'lumotni global xotiradan bir marta yuklab, blok ichida ko'p marta ishlatish — matritsa ko'paytirishda «plitkalash», tiling) va warp divergensiyasi (warp ichidagi oqimlar turli tarmoqqa ketsa, ikkala tarmoq ketma-ket bajariladi). SI muhandisi odatda o'z yadrosini yozmaydi — cuBLAS, cuDNN, TensorRT va PyTorch tayyor yadrolar beradi — lekin bu omillarni bilish profillash natijasini tushunish va Triton yoki CUDA da maxsus operatsiya (masalan, FlashAttention uslubidagi diqqat yadrosi) yozish uchun zarur. CUDA ning bir nechta GPU bilan ishlash uchun asosiy vositalari — oqimlar (streams, asinxron buyruqlar navbati), hodisalar (events, sinxronizatsiya) va NCCL (NVIDIA Collective Communications Library) — GPU lar orasida all-reduce, broadcast, all-gather kabi kollektiv amallarni NVLink/InfiniBand topologiyasiga moslab bajaruvchi kutubxona.</a:t>
+              <a:t>Parallel dasturning sifatini ikki ko'rsatkich belgilaydi: tezlashuv S(p) = T(1) / T(p) — p protsessorda bajarish vaqtining bitta protsessordagi vaqtga nisbati, va samaradorlik E(p) = S(p) / p — ideal chiziqli tezlashuvga nisbatan ulush. Amdal qonuni tezlashuvning yuqori chegarasini beradi: agar ishning f ulushi ketma-ket bo'lsa, S(p) ≤ 1 / (f + (1 − f)/p), va p → ∞ da S ≤ 1/f. Ketma-ket ulush 5 % bo'lsa, hatto ming protsessor ham 20 baravardan ortiq tezlashuv bermaydi. Bu pessimistik qonun kuchli masshtablash (strong scaling) — masala hajmi o'zgarmas, protsessorlar soni o'sadi — uchun to'g'ri.</a:t>
+            </a:r>
+          </a:p>
+          <a:p/>
+          <a:p>
+            <a:r>
+              <a:t>Gustafson qonuni boshqa nuqtai nazarni beradi: amalda protsessorlar ko'paysa, muhandis masalani kattalashtiradi (ko'proq ma'lumot, kattaroq model). Agar ketma-ket qism vaqti o'zgarmas va parallel qism protsessorlar soniga proporsional o'ssa, masshtablangan tezlashuv S(p) = f + (1 − f) × p — deyarli chiziqli. Bu kuchsiz masshtablash (weak scaling) deb ataladi va neyron tarmoq o'qitishga aynan mos keladi: 8 GPU ga o'tganda har GPU ga bir xil mikro-paket beriladi, global paket 8 baravar o'sadi, bir iteratsiya vaqti deyarli o'zgarmaydi. Shu sababli taqsimlangan o'qitish hisobotlarida odatda «so'ngra tasvir/soniya» yoki «token/soniya» o'tkazuvchanligi keltiriladi.</a:t>
+            </a:r>
+          </a:p>
+          <a:p/>
+          <a:p>
+            <a:r>
+              <a:t>Aloqa narxini baholash uchun oddiy model foydali: M baytli xabarni uzatish vaqti t = α + M / β, bu yerda α — kechikish (latency, InfiniBand da 1–2 mks, PCIe da 5–10 mks, Ethernet TCP da 20–50 mks), β — o'tkazuvchanlik. Kichik xabarlar α bilan, katta xabarlar β bilan cheklanadi; shuning uchun ko'plab kichik gradientlarni bitta katta buferga birlashtirish (bucketing) — DDP ning asosiy optimallashtirishi.</a:t>
             </a:r>
           </a:p>
         </p:txBody>
@@ -768,7 +863,13 @@
           <a:lstStyle/>
           <a:p>
             <a:r>
-              <a:t>Kod to‘liq holda mavzu matnida va laboratoriya repozitoriysida keltirilgan.</a:t>
+              <a:t>CUDA (Compute Unified Device Architecture) — NVIDIA GPU larini umumiy maqsadli hisoblash uchun dasturlash platformasi. Kirk va Hwu [5] bayon qilgan modelda dasturchi yadro (kernel) — minglab oqim parallel bajaradigan funksiya — yozadi. Oqimlar uch darajali iyerarxiyaga uyushtiriladi: oqim (thread) → blok (block, 1024 tagacha oqim, bitta SM da bajariladi, umumiy xotira orqali almashadi) → to'r (grid, bloklar to'plami). Apparat blokni 32 oqimli warp larga bo'lib, warp ni bitta buyruq bilan bajaradi. Quyidagi yadro ikki vektorni qo'shadi:</a:t>
+            </a:r>
+          </a:p>
+          <a:p/>
+          <a:p>
+            <a:r>
+              <a:t>CUDA dasturining samaradorligi to'rt omilga bog'liq: bandlik (occupancy — SM da bir vaqtda faol warp lar soni, xotira kechikishini yashirish uchun ko'p bo'lishi kerak), birlashgan xotira murojaati (coalescing — warp dagi 32 oqim qo'shni manzillarga murojaat qilsa, bitta tranzaksiya), umumiy xotiradan foydalanish (ma'lumotni global xotiradan bir marta yuklab, blok ichida ko'p marta ishlatish — matritsa ko'paytirishda «plitkalash», tiling) va warp divergensiyasi (warp ichidagi oqimlar turli tarmoqqa ketsa, ikkala tarmoq ketma-ket bajariladi). SI muhandisi odatda o'z yadrosini yozmaydi — cuBLAS, cuDNN, TensorRT va PyTorch tayyor yadrolar beradi — lekin bu omillarni bilish profillash natijasini tushunish va Triton yoki CUDA da maxsus operatsiya (masalan, FlashAttention uslubidagi diqqat yadrosi) yozish uchun zarur. CUDA ning bir nechta GPU bilan ishlash uchun asosiy vositalari — oqimlar (streams, asinxron buyruqlar navbati), hodisalar (events, sinxronizatsiya) va NCCL (NVIDIA Collective Communications Library) — GPU lar orasida all-reduce, broadcast, all-gather kabi kollektiv amallarni NVLink/InfiniBand topologiyasiga moslab bajaruvchi kutubxona.</a:t>
             </a:r>
           </a:p>
         </p:txBody>
@@ -838,13 +939,7 @@
           <a:lstStyle/>
           <a:p>
             <a:r>
-              <a:t>OpenMP — C, C++ va Fortran uchun kompilyator direktivalari to'plami bo'lib, umumiy xotirali ko'p yadroli tizimda (bitta server) oqimlar darajasidagi parallellikni beradi. Dasturchi ketma-ket kodga #pragma omp parallel for kabi direktiva qo'shadi, kompilyator siklni oqimlar o'rtasida taqsimlaydi:</a:t>
-            </a:r>
-          </a:p>
-          <a:p/>
-          <a:p>
-            <a:r>
-              <a:t>OpenMP ning asosiy tushunchalari: parallel hudud (fork-join modeli), ish taqsimoti (for, sections, task), ma'lumot muhiti (shared, private, reduction) va sinxronizatsiya (critical, atomic, barrier). OpenMP 4.0 dan boshlab target direktivalari orqali GPU ga yuklash ham mumkin, biroq SI sohasida bu kam ishlatiladi. SI tizimida OpenMP ning real o'rni — CPU tomonidagi kutubxonalar: PyTorch ning CPU backend i (ATen), oneDNN, OpenBLAS va MKL ichki parallellik uchun OpenMP ishlatadi; OMP_NUM_THREADS o'zgaruvchisi va torch.set_num_threads aynan shu oqimlar sonini boshqaradi. Ma'lumot yuklash va oldindan ishlov (augmentatsiya, tokenizatsiya) ham ko'pincha OpenMP yoki Python ko'p jarayonlilik bilan parallellashtiriladi.</a:t>
+              <a:t>Kod to‘liq holda mavzu matnida va laboratoriya repozitoriysida keltirilgan.</a:t>
             </a:r>
           </a:p>
         </p:txBody>
@@ -914,7 +1009,13 @@
           <a:lstStyle/>
           <a:p>
             <a:r>
-              <a:t>Kod to‘liq holda mavzu matnida va laboratoriya repozitoriysida keltirilgan.</a:t>
+              <a:t>OpenMP — C, C++ va Fortran uchun kompilyator direktivalari to'plami bo'lib, umumiy xotirali ko'p yadroli tizimda (bitta server) oqimlar darajasidagi parallellikni beradi. Dasturchi ketma-ket kodga #pragma omp parallel for kabi direktiva qo'shadi, kompilyator siklni oqimlar o'rtasida taqsimlaydi:</a:t>
+            </a:r>
+          </a:p>
+          <a:p/>
+          <a:p>
+            <a:r>
+              <a:t>OpenMP ning asosiy tushunchalari: parallel hudud (fork-join modeli), ish taqsimoti (for, sections, task), ma'lumot muhiti (shared, private, reduction) va sinxronizatsiya (critical, atomic, barrier). OpenMP 4.0 dan boshlab target direktivalari orqali GPU ga yuklash ham mumkin, biroq SI sohasida bu kam ishlatiladi. SI tizimida OpenMP ning real o'rni — CPU tomonidagi kutubxonalar: PyTorch ning CPU backend i (ATen), oneDNN, OpenBLAS va MKL ichki parallellik uchun OpenMP ishlatadi; OMP_NUM_THREADS o'zgaruvchisi va torch.set_num_threads aynan shu oqimlar sonini boshqaradi. Ma'lumot yuklash va oldindan ishlov (augmentatsiya, tokenizatsiya) ham ko'pincha OpenMP yoki Python ko'p jarayonlilik bilan parallellashtiriladi.</a:t>
             </a:r>
           </a:p>
         </p:txBody>
@@ -984,19 +1085,7 @@
           <a:lstStyle/>
           <a:p>
             <a:r>
-              <a:t>MPI (Message Passing Interface) — alohida xotirali jarayonlar o'rtasida xabar almashish standarti, 1994-yildan beri HPC ning asosiy vositasi. Har jarayon o'z rank iga ega, umumiy xotira yo'q, barcha almashinuv aniq chaqiruvlar orqali: nuqta-nuqta (MPI_Send/MPI_Recv) va kollektiv (MPI_Bcast, MPI_Reduce, MPI_Allreduce, MPI_Allgather, MPI_Alltoall). SI uchun eng muhimi — MPI_Allreduce: har jarayondagi vektor elementlari yig'indisi hisoblanib, natija hammaga tarqatiladi — aynan gradientlarni o'rtachalash uchun kerak bo'lgan amal.</a:t>
-            </a:r>
-          </a:p>
-          <a:p/>
-          <a:p>
-            <a:r>
-              <a:t>All-reduce ni samarali bajarish alohida fan. Sodda usul — hamma rank 0 ga yuboradi, u yig'ib qaytaradi — rank 0 da (p−1) × M bayt trafik hosil qiladi va masshtablanmaydi. Halqa all-reduce (ring all-reduce; 2017-yilda Baidu tomonidan chuqur o'qitishga tatbiq etilgan, keyin Uber ning Horovod kutubxonasida ommalashgan) vektorni p bo'lakka bo'lib, ikki bosqichda (reduce-scatter, so'ng all-gather) halqa bo'ylab uzatadi; har rank jami 2 × (p−1)/p × M bayt yuboradi — p dan deyarli mustaqil, ya'ni optimal o'tkazuvchanlik. Katta p da kechikish 2(p−1) × α o'sadi, shuning uchun NCCL daraxt (tree) va ierarxik algoritmlarni ham ishlatadi: avval tugun ichida NVLink orqali, keyin tugunlar orasida InfiniBand orqali. NVIDIA SHARP texnologiyasi esa qisqartirishni (reduction) InfiniBand kommutatorining o'zida bajarib, trafikni yana ikki baravar kamaytiradi.</a:t>
-            </a:r>
-          </a:p>
-          <a:p/>
-          <a:p>
-            <a:r>
-              <a:t>SI amaliyotida MPI ko'pincha bevosita ko'rinmaydi, lekin uning modeli saqlanadi: PyTorch Distributed rank, world_size, all_reduce atamalarini aynan MPI dan olgan; Horovod MPI ustida qurilgan; Slurm klasterlarida jarayonlarni ishga tushirish srun/mpirun orqali bajariladi; NCCL esa GPU lar uchun «MPI kollektivlari» ning ixtisoslashgan amalga oshirilishidir.</a:t>
+              <a:t>Kod to‘liq holda mavzu matnida va laboratoriya repozitoriysida keltirilgan.</a:t>
             </a:r>
           </a:p>
         </p:txBody>
@@ -1066,7 +1155,19 @@
           <a:lstStyle/>
           <a:p>
             <a:r>
-              <a:t>Kod to‘liq holda mavzu matnida va laboratoriya repozitoriysida keltirilgan.</a:t>
+              <a:t>MPI (Message Passing Interface) — alohida xotirali jarayonlar o'rtasida xabar almashish standarti, 1994-yildan beri HPC ning asosiy vositasi. Har jarayon o'z rank iga ega, umumiy xotira yo'q, barcha almashinuv aniq chaqiruvlar orqali: nuqta-nuqta (MPI_Send/MPI_Recv) va kollektiv (MPI_Bcast, MPI_Reduce, MPI_Allreduce, MPI_Allgather, MPI_Alltoall). SI uchun eng muhimi — MPI_Allreduce: har jarayondagi vektor elementlari yig'indisi hisoblanib, natija hammaga tarqatiladi — aynan gradientlarni o'rtachalash uchun kerak bo'lgan amal.</a:t>
+            </a:r>
+          </a:p>
+          <a:p/>
+          <a:p>
+            <a:r>
+              <a:t>All-reduce ni samarali bajarish alohida fan. Sodda usul — hamma rank 0 ga yuboradi, u yig'ib qaytaradi — rank 0 da (p−1) × M bayt trafik hosil qiladi va masshtablanmaydi. Halqa all-reduce (ring all-reduce; 2017-yilda Baidu tomonidan chuqur o'qitishga tatbiq etilgan, keyin Uber ning Horovod kutubxonasida ommalashgan) vektorni p bo'lakka bo'lib, ikki bosqichda (reduce-scatter, so'ng all-gather) halqa bo'ylab uzatadi; har rank jami 2 × (p−1)/p × M bayt yuboradi — p dan deyarli mustaqil, ya'ni optimal o'tkazuvchanlik. Katta p da kechikish 2(p−1) × α o'sadi, shuning uchun NCCL daraxt (tree) va ierarxik algoritmlarni ham ishlatadi: avval tugun ichida NVLink orqali, keyin tugunlar orasida InfiniBand orqali. NVIDIA SHARP texnologiyasi esa qisqartirishni (reduction) InfiniBand kommutatorining o'zida bajarib, trafikni yana ikki baravar kamaytiradi.</a:t>
+            </a:r>
+          </a:p>
+          <a:p/>
+          <a:p>
+            <a:r>
+              <a:t>SI amaliyotida MPI ko'pincha bevosita ko'rinmaydi, lekin uning modeli saqlanadi: PyTorch Distributed rank, world_size, all_reduce atamalarini aynan MPI dan olgan; Horovod MPI ustida qurilgan; Slurm klasterlarida jarayonlarni ishga tushirish srun/mpirun orqali bajariladi; NCCL esa GPU lar uchun «MPI kollektivlari» ning ixtisoslashgan amalga oshirilishidir.</a:t>
             </a:r>
           </a:p>
         </p:txBody>
@@ -1136,25 +1237,7 @@
           <a:lstStyle/>
           <a:p>
             <a:r>
-              <a:t>Neyron tarmoqni taqsimlashning ikki asosiy o'qi bor: ma'lumotni bo'lish yoki modelni bo'lish.</a:t>
-            </a:r>
-          </a:p>
-          <a:p/>
-          <a:p>
-            <a:r>
-              <a:t>Ma'lumotlar parallelligi (data parallelism, DP) — eng sodda va eng keng tarqalgan usul. Modelning to'liq nusxasi har GPU da saqlanadi; global paket p ta mikro-paketga bo'linadi; har GPU o'z mikro-paketida oldinga va orqaga o'tishni mustaqil bajaradi; so'ng gradientlar all-reduce bilan o'rtachalanadi va har GPU bir xil yangilanishni qo'llaydi — natijada nusxalar sinxron qoladi. Bir iteratsiyadagi aloqa hajmi model hajmiga teng (FP16 da parametr boshiga 2 bayt): ResNet-50 (25,6 mln) uchun 51 MB, GPT-2 1,5B uchun 3 GB. PyTorch DistributedDataParallel (DDP) buni orqaga o'tish bilan ustma-ust qo'yadi: gradientlar 25 MB li «chelaklarga» (bucket) to'planadi va keyingi qatlam gradienti hisoblanayotganda oldingi chelak uzatiladi. DP ning cheklovi — model (parametrlar + gradientlar + optimizator holati + aktivatsiyalar) bitta GPU xotirasiga sig'ishi kerak. Adam optimizatori bilan aralash aniqlikda parametr boshiga taxminan 16 bayt (FP16 og'irlik va gradient 4 bayt, FP32 asosiy nusxa, momentum va dispersiya 12 bayt) ketadi — 80 GB li GPU da taxminan 4–5 milliard parametr, aktivatsiyalarni hisobga olsak kamroq.</a:t>
-            </a:r>
-          </a:p>
-          <a:p/>
-          <a:p>
-            <a:r>
-              <a:t>Bu cheklovni ZeRO (Zero Redundancy Optimizer; Rajbhandari va hammualliflar, SC 2020, Microsoft DeepSpeed) yumshatadi: optimizator holati (ZeRO-1), gradientlar (ZeRO-2) va parametrlar (ZeRO-3) GPU lar o'rtasida bo'lib saqlanadi, har GPU faqat o'z bo'lagini yangilaydi, oldinga o'tishda esa kerakli parametrlar all-gather bilan vaqtincha yig'iladi. Xotira p baravar tejaladi, aloqa esa DP ga nisbatan taxminan 1,5 baravar oshadi. PyTorch da bu yondashuv FSDP (Fully Sharded Data Parallel) nomi bilan amalga oshirilgan.</a:t>
-            </a:r>
-          </a:p>
-          <a:p/>
-          <a:p>
-            <a:r>
-              <a:t>Model parallelligi (model parallelism) — model qismlari turli GPU larga joylashtiriladi; har GPU faqat o'z qismini saqlaydi va hisoblaydi. Uning ikki asosiy ko'rinishi — tensor va quvur parallelligi.</a:t>
+              <a:t>Kod to‘liq holda mavzu matnida va laboratoriya repozitoriysida keltirilgan.</a:t>
             </a:r>
           </a:p>
         </p:txBody>
@@ -1224,19 +1307,25 @@
           <a:lstStyle/>
           <a:p>
             <a:r>
-              <a:t>Tensor parallelligi (tensor parallelism, TP) bitta qatlamni, ya'ni bitta matritsa ko'paytirishni GPU lar o'rtasida bo'ladi. Megatron-LM (Shoeybi va hammualliflar, 2019, NVIDIA) transformer uchun samarali sxemani taklif qildi: MLP blokidagi birinchi chiziqli qatlam Y = GeLU(X·A) da matritsa A ustunlar bo'yicha bo'linadi (har GPU X·Aᵢ ni mustaqil hisoblaydi, GeLU elementma-element bo'lgani uchun aloqa kerak emas), ikkinchi qatlam Z = Y·B da B satrlar bo'yicha bo'linadi va qisman natijalar bitta all-reduce bilan yig'iladi. Diqqat mexanizmida boshlar (heads) GPU lar o'rtasida taqsimlanadi. Natijada har transformer qatlamida oldinga o'tishda 2 ta, orqaga o'tishda 2 ta all-reduce — har mikro-paket uchun aktivatsiya hajmida. Bu aloqa tez-tez va ketma-ket bo'lgani uchun TP faqat eng tez interkonnekt — NVLink — ichida, ya'ni bitta server doirasida (TP = 8) ishlatiladi.</a:t>
+              <a:t>Neyron tarmoqni taqsimlashning ikki asosiy o'qi bor: ma'lumotni bo'lish yoki modelni bo'lish.</a:t>
             </a:r>
           </a:p>
           <a:p/>
           <a:p>
             <a:r>
-              <a:t>Quvur parallelligi (pipeline parallelism, PP) modelni qatlamlar bo'yicha ketma-ket bosqichlarga (stage) bo'ladi: 1–8-qatlamlar GPU 0 da, 9–16-qatlamlar GPU 1 da va hokazo. Bosqichlar o'rtasida faqat chegara aktivatsiyalari (nuqta-nuqta) uzatiladi — bu TP dan ancha kam aloqa, shuning uchun PP serverlar o'rtasida ham ishlaydi. Muammo — pufak (bubble): sodda bajarishda GPU 1 GPU 0 tugatguncha bo'sh turadi. GPipe (Huang va hammualliflar, 2019) paketni m mikro-paketga bo'lib, ularni quvur bo'ylab ketma-ket yuboradi; pufak ulushi (s − 1) / (m + s − 1) ga tushadi, bu yerda s — bosqichlar soni. Masalan, s = 4, m = 16 da pufak 16 % (3/19); m = 64 da 4,5 %. PipeDream (Narayanan va hammualliflar, 2019) va Megatron ning 1F1B jadvali (bir oldinga, bir orqaga) aktivatsiya xotirasini kamaytiradi — mikro-paketning orqaga o'tishi imkon qadar erta bajarilib, aktivatsiyalari bo'shatiladi.</a:t>
+              <a:t>Ma'lumotlar parallelligi (data parallelism, DP) — eng sodda va eng keng tarqalgan usul. Modelning to'liq nusxasi har GPU da saqlanadi; global paket p ta mikro-paketga bo'linadi; har GPU o'z mikro-paketida oldinga va orqaga o'tishni mustaqil bajaradi; so'ng gradientlar all-reduce bilan o'rtachalanadi va har GPU bir xil yangilanishni qo'llaydi — natijada nusxalar sinxron qoladi. Bir iteratsiyadagi aloqa hajmi model hajmiga teng (FP16 da parametr boshiga 2 bayt): ResNet-50 (25,6 mln) uchun 51 MB, GPT-2 1,5B uchun 3 GB. PyTorch DistributedDataParallel (DDP) buni orqaga o'tish bilan ustma-ust qo'yadi: gradientlar 25 MB li «chelaklarga» (bucket) to'planadi va keyingi qatlam gradienti hisoblanayotganda oldingi chelak uzatiladi. DP ning cheklovi — model (parametrlar + gradientlar + optimizator holati + aktivatsiyalar) bitta GPU xotirasiga sig'ishi kerak. Adam optimizatori bilan aralash aniqlikda parametr boshiga taxminan 16 bayt (FP16 og'irlik va gradient 4 bayt, FP32 asosiy nusxa, momentum va dispersiya 12 bayt) ketadi — 80 GB li GPU da taxminan 4–5 milliard parametr, aktivatsiyalarni hisobga olsak kamroq.</a:t>
             </a:r>
           </a:p>
           <a:p/>
           <a:p>
             <a:r>
-              <a:t>Amalda uchala o'q birlashtiriladi — 3D parallellik: TP server ichida (NVLink, 8 GPU), PP serverlar guruhi bo'ylab, DP (yoki ZeRO) eng tashqi darajada. Megatron-Turing NLG 530B (2021) 560 ta DGX A100 da TP = 8, PP = 35, DP = 12 konfiguratsiyasida o'qitilgan. Quyidagi jadval strategiyalarni taqqoslaydi:</a:t>
+              <a:t>Bu cheklovni ZeRO (Zero Redundancy Optimizer; Rajbhandari va hammualliflar, SC 2020, Microsoft DeepSpeed) yumshatadi: optimizator holati (ZeRO-1), gradientlar (ZeRO-2) va parametrlar (ZeRO-3) GPU lar o'rtasida bo'lib saqlanadi, har GPU faqat o'z bo'lagini yangilaydi, oldinga o'tishda esa kerakli parametrlar all-gather bilan vaqtincha yig'iladi. Xotira p baravar tejaladi, aloqa esa DP ga nisbatan taxminan 1,5 baravar oshadi. PyTorch da bu yondashuv FSDP (Fully Sharded Data Parallel) nomi bilan amalga oshirilgan.</a:t>
+            </a:r>
+          </a:p>
+          <a:p/>
+          <a:p>
+            <a:r>
+              <a:t>Model parallelligi (model parallelism) — model qismlari turli GPU larga joylashtiriladi; har GPU faqat o'z qismini saqlaydi va hisoblaydi. Uning ikki asosiy ko'rinishi — tensor va quvur parallelligi.</a:t>
             </a:r>
           </a:p>
         </p:txBody>
@@ -5905,7 +5994,7 @@
                 </a:solidFill>
                 <a:latin typeface="Calibri"/>
               </a:rPr>
-              <a:t>OpenMP: umumiy xotirali parallellik — kod</a:t>
+              <a:t>OpenMP: umumiy xotirali parallellik</a:t>
             </a:r>
           </a:p>
         </p:txBody>
@@ -6020,6 +6109,1554 @@
                 <a:latin typeface="Calibri"/>
               </a:rPr>
               <a:t>10</a:t>
+            </a:r>
+          </a:p>
+        </p:txBody>
+      </p:sp>
+      <p:sp>
+        <p:nvSpPr>
+          <p:cNvPr id="10" name="Rounded Rectangle 9"/>
+          <p:cNvSpPr/>
+          <p:nvPr/>
+        </p:nvSpPr>
+        <p:spPr>
+          <a:xfrm>
+            <a:off x="550000" y="2384160"/>
+            <a:ext cx="11100000" cy="1335840"/>
+          </a:xfrm>
+          <a:prstGeom prst="roundRect">
+            <a:avLst>
+              <a:gd name="adj" fmla="val 8000"/>
+            </a:avLst>
+          </a:prstGeom>
+          <a:solidFill>
+            <a:srgbClr val="F5F8FC"/>
+          </a:solidFill>
+          <a:ln>
+            <a:noFill/>
+          </a:ln>
+          <a:effectLst/>
+        </p:spPr>
+        <p:style>
+          <a:lnRef idx="1">
+            <a:schemeClr val="accent1"/>
+          </a:lnRef>
+          <a:fillRef idx="3">
+            <a:schemeClr val="accent1"/>
+          </a:fillRef>
+          <a:effectRef idx="2">
+            <a:schemeClr val="accent1"/>
+          </a:effectRef>
+          <a:fontRef idx="minor">
+            <a:schemeClr val="lt1"/>
+          </a:fontRef>
+        </p:style>
+        <p:txBody>
+          <a:bodyPr rtlCol="0" anchor="ctr"/>
+          <a:lstStyle/>
+          <a:p>
+            <a:pPr algn="ctr"/>
+          </a:p>
+        </p:txBody>
+      </p:sp>
+      <p:sp>
+        <p:nvSpPr>
+          <p:cNvPr id="11" name="Rectangle 10"/>
+          <p:cNvSpPr/>
+          <p:nvPr/>
+        </p:nvSpPr>
+        <p:spPr>
+          <a:xfrm>
+            <a:off x="550000" y="2384160"/>
+            <a:ext cx="70000" cy="1335840"/>
+          </a:xfrm>
+          <a:prstGeom prst="rect">
+            <a:avLst/>
+          </a:prstGeom>
+          <a:solidFill>
+            <a:srgbClr val="2D5C8F"/>
+          </a:solidFill>
+          <a:ln>
+            <a:noFill/>
+          </a:ln>
+          <a:effectLst/>
+        </p:spPr>
+        <p:style>
+          <a:lnRef idx="1">
+            <a:schemeClr val="accent1"/>
+          </a:lnRef>
+          <a:fillRef idx="3">
+            <a:schemeClr val="accent1"/>
+          </a:fillRef>
+          <a:effectRef idx="2">
+            <a:schemeClr val="accent1"/>
+          </a:effectRef>
+          <a:fontRef idx="minor">
+            <a:schemeClr val="lt1"/>
+          </a:fontRef>
+        </p:style>
+        <p:txBody>
+          <a:bodyPr rtlCol="0" anchor="ctr"/>
+          <a:lstStyle/>
+          <a:p>
+            <a:pPr algn="ctr"/>
+          </a:p>
+        </p:txBody>
+      </p:sp>
+      <p:sp>
+        <p:nvSpPr>
+          <p:cNvPr id="12" name="Oval 11"/>
+          <p:cNvSpPr/>
+          <p:nvPr/>
+        </p:nvSpPr>
+        <p:spPr>
+          <a:xfrm>
+            <a:off x="780000" y="2842080"/>
+            <a:ext cx="420000" cy="420000"/>
+          </a:xfrm>
+          <a:prstGeom prst="ellipse">
+            <a:avLst/>
+          </a:prstGeom>
+          <a:solidFill>
+            <a:srgbClr val="2D5C8F"/>
+          </a:solidFill>
+          <a:ln>
+            <a:noFill/>
+          </a:ln>
+          <a:effectLst/>
+        </p:spPr>
+        <p:style>
+          <a:lnRef idx="1">
+            <a:schemeClr val="accent1"/>
+          </a:lnRef>
+          <a:fillRef idx="3">
+            <a:schemeClr val="accent1"/>
+          </a:fillRef>
+          <a:effectRef idx="2">
+            <a:schemeClr val="accent1"/>
+          </a:effectRef>
+          <a:fontRef idx="minor">
+            <a:schemeClr val="lt1"/>
+          </a:fontRef>
+        </p:style>
+        <p:txBody>
+          <a:bodyPr rtlCol="0" anchor="ctr" lIns="0" rIns="0"/>
+          <a:lstStyle/>
+          <a:p>
+            <a:pPr algn="ctr"/>
+            <a:r>
+              <a:rPr sz="1400" b="1">
+                <a:solidFill>
+                  <a:srgbClr val="FFFFFF"/>
+                </a:solidFill>
+                <a:latin typeface="Calibri"/>
+              </a:rPr>
+              <a:t>1</a:t>
+            </a:r>
+          </a:p>
+        </p:txBody>
+      </p:sp>
+      <p:sp>
+        <p:nvSpPr>
+          <p:cNvPr id="13" name="TextBox 12"/>
+          <p:cNvSpPr txBox="1"/>
+          <p:nvPr/>
+        </p:nvSpPr>
+        <p:spPr>
+          <a:xfrm>
+            <a:off x="1380000" y="2424160"/>
+            <a:ext cx="10150000" cy="1255840"/>
+          </a:xfrm>
+          <a:prstGeom prst="rect">
+            <a:avLst/>
+          </a:prstGeom>
+          <a:noFill/>
+        </p:spPr>
+        <p:txBody>
+          <a:bodyPr wrap="square" anchor="ctr">
+            <a:spAutoFit/>
+          </a:bodyPr>
+          <a:lstStyle/>
+          <a:p>
+            <a:r>
+              <a:rPr sz="1600" b="1">
+                <a:solidFill>
+                  <a:srgbClr val="1F3A5F"/>
+                </a:solidFill>
+                <a:latin typeface="Calibri"/>
+              </a:rPr>
+              <a:t>OpenMP — C, C++ va Fortran uchun kompilyator direktivalari to'plami bo'lib, umumiy xotirali ko'p yadroli tizimda (bitta server) oqimlar darajasidagi parallellikni beradi.</a:t>
+            </a:r>
+          </a:p>
+          <a:p>
+            <a:pPr>
+              <a:spcBef>
+                <a:spcPts val="400"/>
+              </a:spcBef>
+            </a:pPr>
+            <a:r>
+              <a:rPr sz="1500">
+                <a:solidFill>
+                  <a:srgbClr val="334055"/>
+                </a:solidFill>
+                <a:latin typeface="Calibri"/>
+              </a:rPr>
+              <a:t>Dasturchi ketma-ket kodga #pragma omp parallel for kabi direktiva qo'shadi, kompilyator siklni oqimlar o'rtasida taqsimlaydi:</a:t>
+            </a:r>
+          </a:p>
+        </p:txBody>
+      </p:sp>
+      <p:sp>
+        <p:nvSpPr>
+          <p:cNvPr id="14" name="Rounded Rectangle 13"/>
+          <p:cNvSpPr/>
+          <p:nvPr/>
+        </p:nvSpPr>
+        <p:spPr>
+          <a:xfrm>
+            <a:off x="550000" y="3830000"/>
+            <a:ext cx="11100000" cy="1335840"/>
+          </a:xfrm>
+          <a:prstGeom prst="roundRect">
+            <a:avLst>
+              <a:gd name="adj" fmla="val 8000"/>
+            </a:avLst>
+          </a:prstGeom>
+          <a:solidFill>
+            <a:srgbClr val="F5F8FC"/>
+          </a:solidFill>
+          <a:ln>
+            <a:noFill/>
+          </a:ln>
+          <a:effectLst/>
+        </p:spPr>
+        <p:style>
+          <a:lnRef idx="1">
+            <a:schemeClr val="accent1"/>
+          </a:lnRef>
+          <a:fillRef idx="3">
+            <a:schemeClr val="accent1"/>
+          </a:fillRef>
+          <a:effectRef idx="2">
+            <a:schemeClr val="accent1"/>
+          </a:effectRef>
+          <a:fontRef idx="minor">
+            <a:schemeClr val="lt1"/>
+          </a:fontRef>
+        </p:style>
+        <p:txBody>
+          <a:bodyPr rtlCol="0" anchor="ctr"/>
+          <a:lstStyle/>
+          <a:p>
+            <a:pPr algn="ctr"/>
+          </a:p>
+        </p:txBody>
+      </p:sp>
+      <p:sp>
+        <p:nvSpPr>
+          <p:cNvPr id="15" name="Rectangle 14"/>
+          <p:cNvSpPr/>
+          <p:nvPr/>
+        </p:nvSpPr>
+        <p:spPr>
+          <a:xfrm>
+            <a:off x="550000" y="3830000"/>
+            <a:ext cx="70000" cy="1335840"/>
+          </a:xfrm>
+          <a:prstGeom prst="rect">
+            <a:avLst/>
+          </a:prstGeom>
+          <a:solidFill>
+            <a:srgbClr val="0F8B8D"/>
+          </a:solidFill>
+          <a:ln>
+            <a:noFill/>
+          </a:ln>
+          <a:effectLst/>
+        </p:spPr>
+        <p:style>
+          <a:lnRef idx="1">
+            <a:schemeClr val="accent1"/>
+          </a:lnRef>
+          <a:fillRef idx="3">
+            <a:schemeClr val="accent1"/>
+          </a:fillRef>
+          <a:effectRef idx="2">
+            <a:schemeClr val="accent1"/>
+          </a:effectRef>
+          <a:fontRef idx="minor">
+            <a:schemeClr val="lt1"/>
+          </a:fontRef>
+        </p:style>
+        <p:txBody>
+          <a:bodyPr rtlCol="0" anchor="ctr"/>
+          <a:lstStyle/>
+          <a:p>
+            <a:pPr algn="ctr"/>
+          </a:p>
+        </p:txBody>
+      </p:sp>
+      <p:sp>
+        <p:nvSpPr>
+          <p:cNvPr id="16" name="Oval 15"/>
+          <p:cNvSpPr/>
+          <p:nvPr/>
+        </p:nvSpPr>
+        <p:spPr>
+          <a:xfrm>
+            <a:off x="780000" y="4287920"/>
+            <a:ext cx="420000" cy="420000"/>
+          </a:xfrm>
+          <a:prstGeom prst="ellipse">
+            <a:avLst/>
+          </a:prstGeom>
+          <a:solidFill>
+            <a:srgbClr val="0F8B8D"/>
+          </a:solidFill>
+          <a:ln>
+            <a:noFill/>
+          </a:ln>
+          <a:effectLst/>
+        </p:spPr>
+        <p:style>
+          <a:lnRef idx="1">
+            <a:schemeClr val="accent1"/>
+          </a:lnRef>
+          <a:fillRef idx="3">
+            <a:schemeClr val="accent1"/>
+          </a:fillRef>
+          <a:effectRef idx="2">
+            <a:schemeClr val="accent1"/>
+          </a:effectRef>
+          <a:fontRef idx="minor">
+            <a:schemeClr val="lt1"/>
+          </a:fontRef>
+        </p:style>
+        <p:txBody>
+          <a:bodyPr rtlCol="0" anchor="ctr" lIns="0" rIns="0"/>
+          <a:lstStyle/>
+          <a:p>
+            <a:pPr algn="ctr"/>
+            <a:r>
+              <a:rPr sz="1400" b="1">
+                <a:solidFill>
+                  <a:srgbClr val="FFFFFF"/>
+                </a:solidFill>
+                <a:latin typeface="Calibri"/>
+              </a:rPr>
+              <a:t>2</a:t>
+            </a:r>
+          </a:p>
+        </p:txBody>
+      </p:sp>
+      <p:sp>
+        <p:nvSpPr>
+          <p:cNvPr id="17" name="TextBox 16"/>
+          <p:cNvSpPr txBox="1"/>
+          <p:nvPr/>
+        </p:nvSpPr>
+        <p:spPr>
+          <a:xfrm>
+            <a:off x="1380000" y="3870000"/>
+            <a:ext cx="10150000" cy="1255840"/>
+          </a:xfrm>
+          <a:prstGeom prst="rect">
+            <a:avLst/>
+          </a:prstGeom>
+          <a:noFill/>
+        </p:spPr>
+        <p:txBody>
+          <a:bodyPr wrap="square" anchor="ctr">
+            <a:spAutoFit/>
+          </a:bodyPr>
+          <a:lstStyle/>
+          <a:p>
+            <a:r>
+              <a:rPr sz="1600" b="1">
+                <a:solidFill>
+                  <a:srgbClr val="1F3A5F"/>
+                </a:solidFill>
+                <a:latin typeface="Calibri"/>
+              </a:rPr>
+              <a:t>OpenMP ning asosiy tushunchalari: parallel hudud (fork-join modeli), ish taqsimoti (for, sections, task), ma'lumot muhiti (shared, private, reduction) va sinxronizatsiya (critical, atomic, barrier).</a:t>
+            </a:r>
+          </a:p>
+          <a:p>
+            <a:pPr>
+              <a:spcBef>
+                <a:spcPts val="400"/>
+              </a:spcBef>
+            </a:pPr>
+            <a:r>
+              <a:rPr sz="1500">
+                <a:solidFill>
+                  <a:srgbClr val="334055"/>
+                </a:solidFill>
+                <a:latin typeface="Calibri"/>
+              </a:rPr>
+              <a:t>OpenMP 4.0 dan boshlab target direktivalari orqali GPU ga yuklash ham mumkin, biroq SI sohasida bu kam ishlatiladi.</a:t>
+            </a:r>
+          </a:p>
+        </p:txBody>
+      </p:sp>
+    </p:spTree>
+  </p:cSld>
+  <p:clrMapOvr>
+    <a:masterClrMapping/>
+  </p:clrMapOvr>
+  <p:transition spd="med">
+    <p:fade/>
+  </p:transition>
+  <p:timing>
+    <p:tnLst>
+      <p:par>
+        <p:cTn id="1" dur="indefinite" restart="never" nodeType="tmRoot">
+          <p:childTnLst>
+            <p:seq concurrent="1" nextAc="seek">
+              <p:cTn id="2" dur="indefinite" nodeType="mainSeq">
+                <p:childTnLst>
+                  <p:par>
+                    <p:cTn id="55" fill="hold">
+                      <p:stCondLst>
+                        <p:cond delay="indefinite"/>
+                        <p:cond evt="onBegin" delay="0">
+                          <p:tn val="2"/>
+                        </p:cond>
+                      </p:stCondLst>
+                      <p:childTnLst>
+                        <p:par>
+                          <p:cTn id="3" fill="hold">
+                            <p:stCondLst>
+                              <p:cond delay="0"/>
+                            </p:stCondLst>
+                            <p:childTnLst>
+                              <p:par>
+                                <p:cTn id="4" presetID="10" presetClass="entr" presetSubtype="0" fill="hold" grpId="0" nodeType="withEffect">
+                                  <p:stCondLst>
+                                    <p:cond delay="0"/>
+                                  </p:stCondLst>
+                                  <p:childTnLst>
+                                    <p:set>
+                                      <p:cBhvr>
+                                        <p:cTn id="5" dur="1" fill="hold">
+                                          <p:stCondLst>
+                                            <p:cond delay="0"/>
+                                          </p:stCondLst>
+                                        </p:cTn>
+                                        <p:tgtEl>
+                                          <p:spTgt spid="6"/>
+                                        </p:tgtEl>
+                                        <p:attrNameLst>
+                                          <p:attrName>style.visibility</p:attrName>
+                                        </p:attrNameLst>
+                                      </p:cBhvr>
+                                      <p:to>
+                                        <p:strVal val="visible"/>
+                                      </p:to>
+                                    </p:set>
+                                    <p:animEffect transition="in" filter="fade">
+                                      <p:cBhvr>
+                                        <p:cTn id="6" dur="550"/>
+                                        <p:tgtEl>
+                                          <p:spTgt spid="6"/>
+                                        </p:tgtEl>
+                                      </p:cBhvr>
+                                    </p:animEffect>
+                                  </p:childTnLst>
+                                </p:cTn>
+                              </p:par>
+                            </p:childTnLst>
+                          </p:cTn>
+                        </p:par>
+                        <p:par>
+                          <p:cTn id="7" fill="hold">
+                            <p:stCondLst>
+                              <p:cond delay="220"/>
+                            </p:stCondLst>
+                            <p:childTnLst>
+                              <p:par>
+                                <p:cTn id="8" presetID="42" presetClass="entr" presetSubtype="0" fill="hold" grpId="0" nodeType="afterEffect">
+                                  <p:stCondLst>
+                                    <p:cond delay="0"/>
+                                  </p:stCondLst>
+                                  <p:childTnLst>
+                                    <p:set>
+                                      <p:cBhvr>
+                                        <p:cTn id="9" dur="1" fill="hold">
+                                          <p:stCondLst>
+                                            <p:cond delay="0"/>
+                                          </p:stCondLst>
+                                        </p:cTn>
+                                        <p:tgtEl>
+                                          <p:spTgt spid="10"/>
+                                        </p:tgtEl>
+                                        <p:attrNameLst>
+                                          <p:attrName>style.visibility</p:attrName>
+                                        </p:attrNameLst>
+                                      </p:cBhvr>
+                                      <p:to>
+                                        <p:strVal val="visible"/>
+                                      </p:to>
+                                    </p:set>
+                                    <p:animEffect transition="in" filter="fade">
+                                      <p:cBhvr>
+                                        <p:cTn id="10" dur="550"/>
+                                        <p:tgtEl>
+                                          <p:spTgt spid="10"/>
+                                        </p:tgtEl>
+                                      </p:cBhvr>
+                                    </p:animEffect>
+                                    <p:anim calcmode="lin" valueType="num">
+                                      <p:cBhvr additive="base">
+                                        <p:cTn id="11" dur="550" fill="hold"/>
+                                        <p:tgtEl>
+                                          <p:spTgt spid="10"/>
+                                        </p:tgtEl>
+                                        <p:attrNameLst>
+                                          <p:attrName>ppt_x</p:attrName>
+                                        </p:attrNameLst>
+                                      </p:cBhvr>
+                                      <p:tavLst>
+                                        <p:tav tm="0">
+                                          <p:val>
+                                            <p:strVal val="#ppt_x"/>
+                                          </p:val>
+                                        </p:tav>
+                                        <p:tav tm="100000">
+                                          <p:val>
+                                            <p:strVal val="#ppt_x"/>
+                                          </p:val>
+                                        </p:tav>
+                                      </p:tavLst>
+                                    </p:anim>
+                                    <p:anim calcmode="lin" valueType="num">
+                                      <p:cBhvr additive="base">
+                                        <p:cTn id="12" dur="550" fill="hold"/>
+                                        <p:tgtEl>
+                                          <p:spTgt spid="10"/>
+                                        </p:tgtEl>
+                                        <p:attrNameLst>
+                                          <p:attrName>ppt_y</p:attrName>
+                                        </p:attrNameLst>
+                                      </p:cBhvr>
+                                      <p:tavLst>
+                                        <p:tav tm="0">
+                                          <p:val>
+                                            <p:strVal val="#ppt_y+.08"/>
+                                          </p:val>
+                                        </p:tav>
+                                        <p:tav tm="100000">
+                                          <p:val>
+                                            <p:strVal val="#ppt_y"/>
+                                          </p:val>
+                                        </p:tav>
+                                      </p:tavLst>
+                                    </p:anim>
+                                  </p:childTnLst>
+                                </p:cTn>
+                              </p:par>
+                            </p:childTnLst>
+                          </p:cTn>
+                        </p:par>
+                        <p:par>
+                          <p:cTn id="13" fill="hold">
+                            <p:stCondLst>
+                              <p:cond delay="220"/>
+                            </p:stCondLst>
+                            <p:childTnLst>
+                              <p:par>
+                                <p:cTn id="14" presetID="42" presetClass="entr" presetSubtype="0" fill="hold" grpId="0" nodeType="afterEffect">
+                                  <p:stCondLst>
+                                    <p:cond delay="0"/>
+                                  </p:stCondLst>
+                                  <p:childTnLst>
+                                    <p:set>
+                                      <p:cBhvr>
+                                        <p:cTn id="15" dur="1" fill="hold">
+                                          <p:stCondLst>
+                                            <p:cond delay="0"/>
+                                          </p:stCondLst>
+                                        </p:cTn>
+                                        <p:tgtEl>
+                                          <p:spTgt spid="11"/>
+                                        </p:tgtEl>
+                                        <p:attrNameLst>
+                                          <p:attrName>style.visibility</p:attrName>
+                                        </p:attrNameLst>
+                                      </p:cBhvr>
+                                      <p:to>
+                                        <p:strVal val="visible"/>
+                                      </p:to>
+                                    </p:set>
+                                    <p:animEffect transition="in" filter="fade">
+                                      <p:cBhvr>
+                                        <p:cTn id="16" dur="550"/>
+                                        <p:tgtEl>
+                                          <p:spTgt spid="11"/>
+                                        </p:tgtEl>
+                                      </p:cBhvr>
+                                    </p:animEffect>
+                                    <p:anim calcmode="lin" valueType="num">
+                                      <p:cBhvr additive="base">
+                                        <p:cTn id="17" dur="550" fill="hold"/>
+                                        <p:tgtEl>
+                                          <p:spTgt spid="11"/>
+                                        </p:tgtEl>
+                                        <p:attrNameLst>
+                                          <p:attrName>ppt_x</p:attrName>
+                                        </p:attrNameLst>
+                                      </p:cBhvr>
+                                      <p:tavLst>
+                                        <p:tav tm="0">
+                                          <p:val>
+                                            <p:strVal val="#ppt_x"/>
+                                          </p:val>
+                                        </p:tav>
+                                        <p:tav tm="100000">
+                                          <p:val>
+                                            <p:strVal val="#ppt_x"/>
+                                          </p:val>
+                                        </p:tav>
+                                      </p:tavLst>
+                                    </p:anim>
+                                    <p:anim calcmode="lin" valueType="num">
+                                      <p:cBhvr additive="base">
+                                        <p:cTn id="18" dur="550" fill="hold"/>
+                                        <p:tgtEl>
+                                          <p:spTgt spid="11"/>
+                                        </p:tgtEl>
+                                        <p:attrNameLst>
+                                          <p:attrName>ppt_y</p:attrName>
+                                        </p:attrNameLst>
+                                      </p:cBhvr>
+                                      <p:tavLst>
+                                        <p:tav tm="0">
+                                          <p:val>
+                                            <p:strVal val="#ppt_y+.08"/>
+                                          </p:val>
+                                        </p:tav>
+                                        <p:tav tm="100000">
+                                          <p:val>
+                                            <p:strVal val="#ppt_y"/>
+                                          </p:val>
+                                        </p:tav>
+                                      </p:tavLst>
+                                    </p:anim>
+                                  </p:childTnLst>
+                                </p:cTn>
+                              </p:par>
+                            </p:childTnLst>
+                          </p:cTn>
+                        </p:par>
+                        <p:par>
+                          <p:cTn id="19" fill="hold">
+                            <p:stCondLst>
+                              <p:cond delay="220"/>
+                            </p:stCondLst>
+                            <p:childTnLst>
+                              <p:par>
+                                <p:cTn id="20" presetID="53" presetClass="entr" presetSubtype="16" fill="hold" grpId="0" nodeType="afterEffect">
+                                  <p:stCondLst>
+                                    <p:cond delay="0"/>
+                                  </p:stCondLst>
+                                  <p:childTnLst>
+                                    <p:set>
+                                      <p:cBhvr>
+                                        <p:cTn id="21" dur="1" fill="hold">
+                                          <p:stCondLst>
+                                            <p:cond delay="0"/>
+                                          </p:stCondLst>
+                                        </p:cTn>
+                                        <p:tgtEl>
+                                          <p:spTgt spid="12"/>
+                                        </p:tgtEl>
+                                        <p:attrNameLst>
+                                          <p:attrName>style.visibility</p:attrName>
+                                        </p:attrNameLst>
+                                      </p:cBhvr>
+                                      <p:to>
+                                        <p:strVal val="visible"/>
+                                      </p:to>
+                                    </p:set>
+                                    <p:animEffect transition="in" filter="fade">
+                                      <p:cBhvr>
+                                        <p:cTn id="22" dur="550"/>
+                                        <p:tgtEl>
+                                          <p:spTgt spid="12"/>
+                                        </p:tgtEl>
+                                      </p:cBhvr>
+                                    </p:animEffect>
+                                    <p:anim calcmode="lin" valueType="num">
+                                      <p:cBhvr additive="base">
+                                        <p:cTn id="23" dur="550" fill="hold"/>
+                                        <p:tgtEl>
+                                          <p:spTgt spid="12"/>
+                                        </p:tgtEl>
+                                        <p:attrNameLst>
+                                          <p:attrName>ppt_w</p:attrName>
+                                        </p:attrNameLst>
+                                      </p:cBhvr>
+                                      <p:tavLst>
+                                        <p:tav tm="0">
+                                          <p:val>
+                                            <p:strVal val="0"/>
+                                          </p:val>
+                                        </p:tav>
+                                        <p:tav tm="100000">
+                                          <p:val>
+                                            <p:strVal val="#ppt_w"/>
+                                          </p:val>
+                                        </p:tav>
+                                      </p:tavLst>
+                                    </p:anim>
+                                    <p:anim calcmode="lin" valueType="num">
+                                      <p:cBhvr additive="base">
+                                        <p:cTn id="24" dur="550" fill="hold"/>
+                                        <p:tgtEl>
+                                          <p:spTgt spid="12"/>
+                                        </p:tgtEl>
+                                        <p:attrNameLst>
+                                          <p:attrName>ppt_h</p:attrName>
+                                        </p:attrNameLst>
+                                      </p:cBhvr>
+                                      <p:tavLst>
+                                        <p:tav tm="0">
+                                          <p:val>
+                                            <p:strVal val="0"/>
+                                          </p:val>
+                                        </p:tav>
+                                        <p:tav tm="100000">
+                                          <p:val>
+                                            <p:strVal val="#ppt_h"/>
+                                          </p:val>
+                                        </p:tav>
+                                      </p:tavLst>
+                                    </p:anim>
+                                  </p:childTnLst>
+                                </p:cTn>
+                              </p:par>
+                            </p:childTnLst>
+                          </p:cTn>
+                        </p:par>
+                        <p:par>
+                          <p:cTn id="25" fill="hold">
+                            <p:stCondLst>
+                              <p:cond delay="220"/>
+                            </p:stCondLst>
+                            <p:childTnLst>
+                              <p:par>
+                                <p:cTn id="26" presetID="42" presetClass="entr" presetSubtype="0" fill="hold" grpId="0" nodeType="afterEffect">
+                                  <p:stCondLst>
+                                    <p:cond delay="0"/>
+                                  </p:stCondLst>
+                                  <p:childTnLst>
+                                    <p:set>
+                                      <p:cBhvr>
+                                        <p:cTn id="27" dur="1" fill="hold">
+                                          <p:stCondLst>
+                                            <p:cond delay="0"/>
+                                          </p:stCondLst>
+                                        </p:cTn>
+                                        <p:tgtEl>
+                                          <p:spTgt spid="13"/>
+                                        </p:tgtEl>
+                                        <p:attrNameLst>
+                                          <p:attrName>style.visibility</p:attrName>
+                                        </p:attrNameLst>
+                                      </p:cBhvr>
+                                      <p:to>
+                                        <p:strVal val="visible"/>
+                                      </p:to>
+                                    </p:set>
+                                    <p:animEffect transition="in" filter="fade">
+                                      <p:cBhvr>
+                                        <p:cTn id="28" dur="550"/>
+                                        <p:tgtEl>
+                                          <p:spTgt spid="13"/>
+                                        </p:tgtEl>
+                                      </p:cBhvr>
+                                    </p:animEffect>
+                                    <p:anim calcmode="lin" valueType="num">
+                                      <p:cBhvr additive="base">
+                                        <p:cTn id="29" dur="550" fill="hold"/>
+                                        <p:tgtEl>
+                                          <p:spTgt spid="13"/>
+                                        </p:tgtEl>
+                                        <p:attrNameLst>
+                                          <p:attrName>ppt_x</p:attrName>
+                                        </p:attrNameLst>
+                                      </p:cBhvr>
+                                      <p:tavLst>
+                                        <p:tav tm="0">
+                                          <p:val>
+                                            <p:strVal val="#ppt_x"/>
+                                          </p:val>
+                                        </p:tav>
+                                        <p:tav tm="100000">
+                                          <p:val>
+                                            <p:strVal val="#ppt_x"/>
+                                          </p:val>
+                                        </p:tav>
+                                      </p:tavLst>
+                                    </p:anim>
+                                    <p:anim calcmode="lin" valueType="num">
+                                      <p:cBhvr additive="base">
+                                        <p:cTn id="30" dur="550" fill="hold"/>
+                                        <p:tgtEl>
+                                          <p:spTgt spid="13"/>
+                                        </p:tgtEl>
+                                        <p:attrNameLst>
+                                          <p:attrName>ppt_y</p:attrName>
+                                        </p:attrNameLst>
+                                      </p:cBhvr>
+                                      <p:tavLst>
+                                        <p:tav tm="0">
+                                          <p:val>
+                                            <p:strVal val="#ppt_y+.08"/>
+                                          </p:val>
+                                        </p:tav>
+                                        <p:tav tm="100000">
+                                          <p:val>
+                                            <p:strVal val="#ppt_y"/>
+                                          </p:val>
+                                        </p:tav>
+                                      </p:tavLst>
+                                    </p:anim>
+                                  </p:childTnLst>
+                                </p:cTn>
+                              </p:par>
+                            </p:childTnLst>
+                          </p:cTn>
+                        </p:par>
+                        <p:par>
+                          <p:cTn id="31" fill="hold">
+                            <p:stCondLst>
+                              <p:cond delay="440"/>
+                            </p:stCondLst>
+                            <p:childTnLst>
+                              <p:par>
+                                <p:cTn id="32" presetID="42" presetClass="entr" presetSubtype="0" fill="hold" grpId="0" nodeType="afterEffect">
+                                  <p:stCondLst>
+                                    <p:cond delay="0"/>
+                                  </p:stCondLst>
+                                  <p:childTnLst>
+                                    <p:set>
+                                      <p:cBhvr>
+                                        <p:cTn id="33" dur="1" fill="hold">
+                                          <p:stCondLst>
+                                            <p:cond delay="0"/>
+                                          </p:stCondLst>
+                                        </p:cTn>
+                                        <p:tgtEl>
+                                          <p:spTgt spid="14"/>
+                                        </p:tgtEl>
+                                        <p:attrNameLst>
+                                          <p:attrName>style.visibility</p:attrName>
+                                        </p:attrNameLst>
+                                      </p:cBhvr>
+                                      <p:to>
+                                        <p:strVal val="visible"/>
+                                      </p:to>
+                                    </p:set>
+                                    <p:animEffect transition="in" filter="fade">
+                                      <p:cBhvr>
+                                        <p:cTn id="34" dur="550"/>
+                                        <p:tgtEl>
+                                          <p:spTgt spid="14"/>
+                                        </p:tgtEl>
+                                      </p:cBhvr>
+                                    </p:animEffect>
+                                    <p:anim calcmode="lin" valueType="num">
+                                      <p:cBhvr additive="base">
+                                        <p:cTn id="35" dur="550" fill="hold"/>
+                                        <p:tgtEl>
+                                          <p:spTgt spid="14"/>
+                                        </p:tgtEl>
+                                        <p:attrNameLst>
+                                          <p:attrName>ppt_x</p:attrName>
+                                        </p:attrNameLst>
+                                      </p:cBhvr>
+                                      <p:tavLst>
+                                        <p:tav tm="0">
+                                          <p:val>
+                                            <p:strVal val="#ppt_x"/>
+                                          </p:val>
+                                        </p:tav>
+                                        <p:tav tm="100000">
+                                          <p:val>
+                                            <p:strVal val="#ppt_x"/>
+                                          </p:val>
+                                        </p:tav>
+                                      </p:tavLst>
+                                    </p:anim>
+                                    <p:anim calcmode="lin" valueType="num">
+                                      <p:cBhvr additive="base">
+                                        <p:cTn id="36" dur="550" fill="hold"/>
+                                        <p:tgtEl>
+                                          <p:spTgt spid="14"/>
+                                        </p:tgtEl>
+                                        <p:attrNameLst>
+                                          <p:attrName>ppt_y</p:attrName>
+                                        </p:attrNameLst>
+                                      </p:cBhvr>
+                                      <p:tavLst>
+                                        <p:tav tm="0">
+                                          <p:val>
+                                            <p:strVal val="#ppt_y+.08"/>
+                                          </p:val>
+                                        </p:tav>
+                                        <p:tav tm="100000">
+                                          <p:val>
+                                            <p:strVal val="#ppt_y"/>
+                                          </p:val>
+                                        </p:tav>
+                                      </p:tavLst>
+                                    </p:anim>
+                                  </p:childTnLst>
+                                </p:cTn>
+                              </p:par>
+                            </p:childTnLst>
+                          </p:cTn>
+                        </p:par>
+                        <p:par>
+                          <p:cTn id="37" fill="hold">
+                            <p:stCondLst>
+                              <p:cond delay="440"/>
+                            </p:stCondLst>
+                            <p:childTnLst>
+                              <p:par>
+                                <p:cTn id="38" presetID="42" presetClass="entr" presetSubtype="0" fill="hold" grpId="0" nodeType="afterEffect">
+                                  <p:stCondLst>
+                                    <p:cond delay="0"/>
+                                  </p:stCondLst>
+                                  <p:childTnLst>
+                                    <p:set>
+                                      <p:cBhvr>
+                                        <p:cTn id="39" dur="1" fill="hold">
+                                          <p:stCondLst>
+                                            <p:cond delay="0"/>
+                                          </p:stCondLst>
+                                        </p:cTn>
+                                        <p:tgtEl>
+                                          <p:spTgt spid="15"/>
+                                        </p:tgtEl>
+                                        <p:attrNameLst>
+                                          <p:attrName>style.visibility</p:attrName>
+                                        </p:attrNameLst>
+                                      </p:cBhvr>
+                                      <p:to>
+                                        <p:strVal val="visible"/>
+                                      </p:to>
+                                    </p:set>
+                                    <p:animEffect transition="in" filter="fade">
+                                      <p:cBhvr>
+                                        <p:cTn id="40" dur="550"/>
+                                        <p:tgtEl>
+                                          <p:spTgt spid="15"/>
+                                        </p:tgtEl>
+                                      </p:cBhvr>
+                                    </p:animEffect>
+                                    <p:anim calcmode="lin" valueType="num">
+                                      <p:cBhvr additive="base">
+                                        <p:cTn id="41" dur="550" fill="hold"/>
+                                        <p:tgtEl>
+                                          <p:spTgt spid="15"/>
+                                        </p:tgtEl>
+                                        <p:attrNameLst>
+                                          <p:attrName>ppt_x</p:attrName>
+                                        </p:attrNameLst>
+                                      </p:cBhvr>
+                                      <p:tavLst>
+                                        <p:tav tm="0">
+                                          <p:val>
+                                            <p:strVal val="#ppt_x"/>
+                                          </p:val>
+                                        </p:tav>
+                                        <p:tav tm="100000">
+                                          <p:val>
+                                            <p:strVal val="#ppt_x"/>
+                                          </p:val>
+                                        </p:tav>
+                                      </p:tavLst>
+                                    </p:anim>
+                                    <p:anim calcmode="lin" valueType="num">
+                                      <p:cBhvr additive="base">
+                                        <p:cTn id="42" dur="550" fill="hold"/>
+                                        <p:tgtEl>
+                                          <p:spTgt spid="15"/>
+                                        </p:tgtEl>
+                                        <p:attrNameLst>
+                                          <p:attrName>ppt_y</p:attrName>
+                                        </p:attrNameLst>
+                                      </p:cBhvr>
+                                      <p:tavLst>
+                                        <p:tav tm="0">
+                                          <p:val>
+                                            <p:strVal val="#ppt_y+.08"/>
+                                          </p:val>
+                                        </p:tav>
+                                        <p:tav tm="100000">
+                                          <p:val>
+                                            <p:strVal val="#ppt_y"/>
+                                          </p:val>
+                                        </p:tav>
+                                      </p:tavLst>
+                                    </p:anim>
+                                  </p:childTnLst>
+                                </p:cTn>
+                              </p:par>
+                            </p:childTnLst>
+                          </p:cTn>
+                        </p:par>
+                        <p:par>
+                          <p:cTn id="43" fill="hold">
+                            <p:stCondLst>
+                              <p:cond delay="440"/>
+                            </p:stCondLst>
+                            <p:childTnLst>
+                              <p:par>
+                                <p:cTn id="44" presetID="53" presetClass="entr" presetSubtype="16" fill="hold" grpId="0" nodeType="afterEffect">
+                                  <p:stCondLst>
+                                    <p:cond delay="0"/>
+                                  </p:stCondLst>
+                                  <p:childTnLst>
+                                    <p:set>
+                                      <p:cBhvr>
+                                        <p:cTn id="45" dur="1" fill="hold">
+                                          <p:stCondLst>
+                                            <p:cond delay="0"/>
+                                          </p:stCondLst>
+                                        </p:cTn>
+                                        <p:tgtEl>
+                                          <p:spTgt spid="16"/>
+                                        </p:tgtEl>
+                                        <p:attrNameLst>
+                                          <p:attrName>style.visibility</p:attrName>
+                                        </p:attrNameLst>
+                                      </p:cBhvr>
+                                      <p:to>
+                                        <p:strVal val="visible"/>
+                                      </p:to>
+                                    </p:set>
+                                    <p:animEffect transition="in" filter="fade">
+                                      <p:cBhvr>
+                                        <p:cTn id="46" dur="550"/>
+                                        <p:tgtEl>
+                                          <p:spTgt spid="16"/>
+                                        </p:tgtEl>
+                                      </p:cBhvr>
+                                    </p:animEffect>
+                                    <p:anim calcmode="lin" valueType="num">
+                                      <p:cBhvr additive="base">
+                                        <p:cTn id="47" dur="550" fill="hold"/>
+                                        <p:tgtEl>
+                                          <p:spTgt spid="16"/>
+                                        </p:tgtEl>
+                                        <p:attrNameLst>
+                                          <p:attrName>ppt_w</p:attrName>
+                                        </p:attrNameLst>
+                                      </p:cBhvr>
+                                      <p:tavLst>
+                                        <p:tav tm="0">
+                                          <p:val>
+                                            <p:strVal val="0"/>
+                                          </p:val>
+                                        </p:tav>
+                                        <p:tav tm="100000">
+                                          <p:val>
+                                            <p:strVal val="#ppt_w"/>
+                                          </p:val>
+                                        </p:tav>
+                                      </p:tavLst>
+                                    </p:anim>
+                                    <p:anim calcmode="lin" valueType="num">
+                                      <p:cBhvr additive="base">
+                                        <p:cTn id="48" dur="550" fill="hold"/>
+                                        <p:tgtEl>
+                                          <p:spTgt spid="16"/>
+                                        </p:tgtEl>
+                                        <p:attrNameLst>
+                                          <p:attrName>ppt_h</p:attrName>
+                                        </p:attrNameLst>
+                                      </p:cBhvr>
+                                      <p:tavLst>
+                                        <p:tav tm="0">
+                                          <p:val>
+                                            <p:strVal val="0"/>
+                                          </p:val>
+                                        </p:tav>
+                                        <p:tav tm="100000">
+                                          <p:val>
+                                            <p:strVal val="#ppt_h"/>
+                                          </p:val>
+                                        </p:tav>
+                                      </p:tavLst>
+                                    </p:anim>
+                                  </p:childTnLst>
+                                </p:cTn>
+                              </p:par>
+                            </p:childTnLst>
+                          </p:cTn>
+                        </p:par>
+                        <p:par>
+                          <p:cTn id="49" fill="hold">
+                            <p:stCondLst>
+                              <p:cond delay="440"/>
+                            </p:stCondLst>
+                            <p:childTnLst>
+                              <p:par>
+                                <p:cTn id="50" presetID="42" presetClass="entr" presetSubtype="0" fill="hold" grpId="0" nodeType="afterEffect">
+                                  <p:stCondLst>
+                                    <p:cond delay="0"/>
+                                  </p:stCondLst>
+                                  <p:childTnLst>
+                                    <p:set>
+                                      <p:cBhvr>
+                                        <p:cTn id="51" dur="1" fill="hold">
+                                          <p:stCondLst>
+                                            <p:cond delay="0"/>
+                                          </p:stCondLst>
+                                        </p:cTn>
+                                        <p:tgtEl>
+                                          <p:spTgt spid="17"/>
+                                        </p:tgtEl>
+                                        <p:attrNameLst>
+                                          <p:attrName>style.visibility</p:attrName>
+                                        </p:attrNameLst>
+                                      </p:cBhvr>
+                                      <p:to>
+                                        <p:strVal val="visible"/>
+                                      </p:to>
+                                    </p:set>
+                                    <p:animEffect transition="in" filter="fade">
+                                      <p:cBhvr>
+                                        <p:cTn id="52" dur="550"/>
+                                        <p:tgtEl>
+                                          <p:spTgt spid="17"/>
+                                        </p:tgtEl>
+                                      </p:cBhvr>
+                                    </p:animEffect>
+                                    <p:anim calcmode="lin" valueType="num">
+                                      <p:cBhvr additive="base">
+                                        <p:cTn id="53" dur="550" fill="hold"/>
+                                        <p:tgtEl>
+                                          <p:spTgt spid="17"/>
+                                        </p:tgtEl>
+                                        <p:attrNameLst>
+                                          <p:attrName>ppt_x</p:attrName>
+                                        </p:attrNameLst>
+                                      </p:cBhvr>
+                                      <p:tavLst>
+                                        <p:tav tm="0">
+                                          <p:val>
+                                            <p:strVal val="#ppt_x"/>
+                                          </p:val>
+                                        </p:tav>
+                                        <p:tav tm="100000">
+                                          <p:val>
+                                            <p:strVal val="#ppt_x"/>
+                                          </p:val>
+                                        </p:tav>
+                                      </p:tavLst>
+                                    </p:anim>
+                                    <p:anim calcmode="lin" valueType="num">
+                                      <p:cBhvr additive="base">
+                                        <p:cTn id="54" dur="550" fill="hold"/>
+                                        <p:tgtEl>
+                                          <p:spTgt spid="17"/>
+                                        </p:tgtEl>
+                                        <p:attrNameLst>
+                                          <p:attrName>ppt_y</p:attrName>
+                                        </p:attrNameLst>
+                                      </p:cBhvr>
+                                      <p:tavLst>
+                                        <p:tav tm="0">
+                                          <p:val>
+                                            <p:strVal val="#ppt_y+.08"/>
+                                          </p:val>
+                                        </p:tav>
+                                        <p:tav tm="100000">
+                                          <p:val>
+                                            <p:strVal val="#ppt_y"/>
+                                          </p:val>
+                                        </p:tav>
+                                      </p:tavLst>
+                                    </p:anim>
+                                  </p:childTnLst>
+                                </p:cTn>
+                              </p:par>
+                            </p:childTnLst>
+                          </p:cTn>
+                        </p:par>
+                      </p:childTnLst>
+                    </p:cTn>
+                  </p:par>
+                </p:childTnLst>
+              </p:cTn>
+              <p:prevCondLst>
+                <p:cond evt="onPrev" delay="0">
+                  <p:tgtEl>
+                    <p:sldTgt/>
+                  </p:tgtEl>
+                </p:cond>
+              </p:prevCondLst>
+              <p:nextCondLst>
+                <p:cond evt="onNext" delay="0">
+                  <p:tgtEl>
+                    <p:sldTgt/>
+                  </p:tgtEl>
+                </p:cond>
+              </p:nextCondLst>
+            </p:seq>
+          </p:childTnLst>
+        </p:cTn>
+      </p:par>
+    </p:tnLst>
+    <p:bldLst>
+      <p:bldP spid="6" grpId="0" animBg="1"/>
+      <p:bldP spid="10" grpId="0" animBg="1"/>
+      <p:bldP spid="11" grpId="0" animBg="1"/>
+      <p:bldP spid="12" grpId="0" animBg="1"/>
+      <p:bldP spid="13" grpId="0" animBg="1"/>
+      <p:bldP spid="14" grpId="0" animBg="1"/>
+      <p:bldP spid="15" grpId="0" animBg="1"/>
+      <p:bldP spid="16" grpId="0" animBg="1"/>
+      <p:bldP spid="17" grpId="0" animBg="1"/>
+    </p:bldLst>
+  </p:timing>
+</p:sld>
+</file>
+
+<file path=ppt/slides/slide11.xml><?xml version="1.0" encoding="utf-8"?>
+<p:sld xmlns:a="http://schemas.openxmlformats.org/drawingml/2006/main" xmlns:p="http://schemas.openxmlformats.org/presentationml/2006/main" xmlns:r="http://schemas.openxmlformats.org/officeDocument/2006/relationships">
+  <p:cSld>
+    <p:spTree>
+      <p:nvGrpSpPr>
+        <p:cNvPr id="1" name=""/>
+        <p:cNvGrpSpPr/>
+        <p:nvPr/>
+      </p:nvGrpSpPr>
+      <p:grpSpPr/>
+      <p:sp>
+        <p:nvSpPr>
+          <p:cNvPr id="2" name="Rectangle 1"/>
+          <p:cNvSpPr/>
+          <p:nvPr/>
+        </p:nvSpPr>
+        <p:spPr>
+          <a:xfrm>
+            <a:off x="0" y="0"/>
+            <a:ext cx="12192000" cy="1000000"/>
+          </a:xfrm>
+          <a:prstGeom prst="rect">
+            <a:avLst/>
+          </a:prstGeom>
+          <a:gradFill rotWithShape="1">
+            <a:gsLst>
+              <a:gs pos="0">
+                <a:srgbClr val="1F3A5F"/>
+              </a:gs>
+              <a:gs pos="100000">
+                <a:srgbClr val="2D5C8F"/>
+              </a:gs>
+            </a:gsLst>
+            <a:lin scaled="0" ang="0"/>
+          </a:gradFill>
+          <a:ln>
+            <a:noFill/>
+          </a:ln>
+          <a:effectLst/>
+        </p:spPr>
+        <p:style>
+          <a:lnRef idx="1">
+            <a:schemeClr val="accent1"/>
+          </a:lnRef>
+          <a:fillRef idx="3">
+            <a:schemeClr val="accent1"/>
+          </a:fillRef>
+          <a:effectRef idx="2">
+            <a:schemeClr val="accent1"/>
+          </a:effectRef>
+          <a:fontRef idx="minor">
+            <a:schemeClr val="lt1"/>
+          </a:fontRef>
+        </p:style>
+        <p:txBody>
+          <a:bodyPr rtlCol="0" anchor="ctr"/>
+          <a:lstStyle/>
+          <a:p>
+            <a:pPr algn="ctr"/>
+          </a:p>
+        </p:txBody>
+      </p:sp>
+      <p:sp>
+        <p:nvSpPr>
+          <p:cNvPr id="3" name="Oval 2"/>
+          <p:cNvSpPr/>
+          <p:nvPr/>
+        </p:nvSpPr>
+        <p:spPr>
+          <a:xfrm>
+            <a:off x="11050000" y="-350000"/>
+            <a:ext cx="900000" cy="900000"/>
+          </a:xfrm>
+          <a:prstGeom prst="ellipse">
+            <a:avLst/>
+          </a:prstGeom>
+          <a:solidFill>
+            <a:srgbClr val="3B6EA5"/>
+          </a:solidFill>
+          <a:ln>
+            <a:noFill/>
+          </a:ln>
+          <a:effectLst/>
+        </p:spPr>
+        <p:style>
+          <a:lnRef idx="1">
+            <a:schemeClr val="accent1"/>
+          </a:lnRef>
+          <a:fillRef idx="3">
+            <a:schemeClr val="accent1"/>
+          </a:fillRef>
+          <a:effectRef idx="2">
+            <a:schemeClr val="accent1"/>
+          </a:effectRef>
+          <a:fontRef idx="minor">
+            <a:schemeClr val="lt1"/>
+          </a:fontRef>
+        </p:style>
+        <p:txBody>
+          <a:bodyPr rtlCol="0" anchor="ctr"/>
+          <a:lstStyle/>
+          <a:p>
+            <a:pPr algn="ctr"/>
+          </a:p>
+        </p:txBody>
+      </p:sp>
+      <p:sp>
+        <p:nvSpPr>
+          <p:cNvPr id="4" name="Oval 3"/>
+          <p:cNvSpPr/>
+          <p:nvPr/>
+        </p:nvSpPr>
+        <p:spPr>
+          <a:xfrm>
+            <a:off x="11550000" y="450000"/>
+            <a:ext cx="420000" cy="420000"/>
+          </a:xfrm>
+          <a:prstGeom prst="ellipse">
+            <a:avLst/>
+          </a:prstGeom>
+          <a:solidFill>
+            <a:srgbClr val="0F8B8D"/>
+          </a:solidFill>
+          <a:ln>
+            <a:noFill/>
+          </a:ln>
+          <a:effectLst/>
+        </p:spPr>
+        <p:style>
+          <a:lnRef idx="1">
+            <a:schemeClr val="accent1"/>
+          </a:lnRef>
+          <a:fillRef idx="3">
+            <a:schemeClr val="accent1"/>
+          </a:fillRef>
+          <a:effectRef idx="2">
+            <a:schemeClr val="accent1"/>
+          </a:effectRef>
+          <a:fontRef idx="minor">
+            <a:schemeClr val="lt1"/>
+          </a:fontRef>
+        </p:style>
+        <p:txBody>
+          <a:bodyPr rtlCol="0" anchor="ctr"/>
+          <a:lstStyle/>
+          <a:p>
+            <a:pPr algn="ctr"/>
+          </a:p>
+        </p:txBody>
+      </p:sp>
+      <p:sp>
+        <p:nvSpPr>
+          <p:cNvPr id="5" name="TextBox 4"/>
+          <p:cNvSpPr txBox="1"/>
+          <p:nvPr/>
+        </p:nvSpPr>
+        <p:spPr>
+          <a:xfrm>
+            <a:off x="500000" y="110000"/>
+            <a:ext cx="10300000" cy="300000"/>
+          </a:xfrm>
+          <a:prstGeom prst="rect">
+            <a:avLst/>
+          </a:prstGeom>
+          <a:noFill/>
+        </p:spPr>
+        <p:txBody>
+          <a:bodyPr wrap="square" anchor="t" lIns="50800" rIns="50800">
+            <a:spAutoFit/>
+          </a:bodyPr>
+          <a:lstStyle/>
+          <a:p>
+            <a:pPr algn="l"/>
+            <a:r>
+              <a:rPr sz="1200" b="1">
+                <a:solidFill>
+                  <a:srgbClr val="A9C4E6"/>
+                </a:solidFill>
+                <a:latin typeface="Calibri"/>
+              </a:rPr>
+              <a:t>3-REJA</a:t>
+            </a:r>
+          </a:p>
+        </p:txBody>
+      </p:sp>
+      <p:sp>
+        <p:nvSpPr>
+          <p:cNvPr id="6" name="TextBox 5"/>
+          <p:cNvSpPr txBox="1"/>
+          <p:nvPr/>
+        </p:nvSpPr>
+        <p:spPr>
+          <a:xfrm>
+            <a:off x="500000" y="330000"/>
+            <a:ext cx="10400000" cy="650000"/>
+          </a:xfrm>
+          <a:prstGeom prst="rect">
+            <a:avLst/>
+          </a:prstGeom>
+          <a:noFill/>
+        </p:spPr>
+        <p:txBody>
+          <a:bodyPr wrap="square" anchor="ctr" lIns="50800" rIns="50800">
+            <a:spAutoFit/>
+          </a:bodyPr>
+          <a:lstStyle/>
+          <a:p>
+            <a:pPr algn="l"/>
+            <a:r>
+              <a:rPr sz="2600" b="1">
+                <a:solidFill>
+                  <a:srgbClr val="FFFFFF"/>
+                </a:solidFill>
+                <a:latin typeface="Calibri"/>
+              </a:rPr>
+              <a:t>OpenMP: umumiy xotirali parallellik — kod</a:t>
+            </a:r>
+          </a:p>
+        </p:txBody>
+      </p:sp>
+      <p:sp>
+        <p:nvSpPr>
+          <p:cNvPr id="7" name="Rectangle 6"/>
+          <p:cNvSpPr/>
+          <p:nvPr/>
+        </p:nvSpPr>
+        <p:spPr>
+          <a:xfrm>
+            <a:off x="0" y="1000000"/>
+            <a:ext cx="12192000" cy="45000"/>
+          </a:xfrm>
+          <a:prstGeom prst="rect">
+            <a:avLst/>
+          </a:prstGeom>
+          <a:solidFill>
+            <a:srgbClr val="0F8B8D"/>
+          </a:solidFill>
+          <a:ln>
+            <a:noFill/>
+          </a:ln>
+          <a:effectLst/>
+        </p:spPr>
+        <p:style>
+          <a:lnRef idx="1">
+            <a:schemeClr val="accent1"/>
+          </a:lnRef>
+          <a:fillRef idx="3">
+            <a:schemeClr val="accent1"/>
+          </a:fillRef>
+          <a:effectRef idx="2">
+            <a:schemeClr val="accent1"/>
+          </a:effectRef>
+          <a:fontRef idx="minor">
+            <a:schemeClr val="lt1"/>
+          </a:fontRef>
+        </p:style>
+        <p:txBody>
+          <a:bodyPr rtlCol="0" anchor="ctr"/>
+          <a:lstStyle/>
+          <a:p>
+            <a:pPr algn="ctr"/>
+          </a:p>
+        </p:txBody>
+      </p:sp>
+      <p:sp>
+        <p:nvSpPr>
+          <p:cNvPr id="8" name="TextBox 7"/>
+          <p:cNvSpPr txBox="1"/>
+          <p:nvPr/>
+        </p:nvSpPr>
+        <p:spPr>
+          <a:xfrm>
+            <a:off x="500000" y="6420000"/>
+            <a:ext cx="9500000" cy="300000"/>
+          </a:xfrm>
+          <a:prstGeom prst="rect">
+            <a:avLst/>
+          </a:prstGeom>
+          <a:noFill/>
+        </p:spPr>
+        <p:txBody>
+          <a:bodyPr wrap="square" anchor="t" lIns="50800" rIns="50800">
+            <a:spAutoFit/>
+          </a:bodyPr>
+          <a:lstStyle/>
+          <a:p>
+            <a:pPr algn="l"/>
+            <a:r>
+              <a:rPr sz="1000" b="0">
+                <a:solidFill>
+                  <a:srgbClr val="5B6878"/>
+                </a:solidFill>
+                <a:latin typeface="Calibri"/>
+              </a:rPr>
+              <a:t>M3 · Sun'iy intellekt tizimlarida parallel va taqsimlangan hisoblash texnologiyalari</a:t>
+            </a:r>
+          </a:p>
+        </p:txBody>
+      </p:sp>
+      <p:sp>
+        <p:nvSpPr>
+          <p:cNvPr id="9" name="TextBox 8"/>
+          <p:cNvSpPr txBox="1"/>
+          <p:nvPr/>
+        </p:nvSpPr>
+        <p:spPr>
+          <a:xfrm>
+            <a:off x="10600000" y="6420000"/>
+            <a:ext cx="1100000" cy="300000"/>
+          </a:xfrm>
+          <a:prstGeom prst="rect">
+            <a:avLst/>
+          </a:prstGeom>
+          <a:noFill/>
+        </p:spPr>
+        <p:txBody>
+          <a:bodyPr wrap="square" anchor="t" lIns="50800" rIns="50800">
+            <a:spAutoFit/>
+          </a:bodyPr>
+          <a:lstStyle/>
+          <a:p>
+            <a:pPr algn="r"/>
+            <a:r>
+              <a:rPr sz="1000" b="0">
+                <a:solidFill>
+                  <a:srgbClr val="5B6878"/>
+                </a:solidFill>
+                <a:latin typeface="Calibri"/>
+              </a:rPr>
+              <a:t>11</a:t>
             </a:r>
           </a:p>
         </p:txBody>
@@ -6673,7 +8310,7 @@
 </p:sld>
 </file>
 
-<file path=ppt/slides/slide11.xml><?xml version="1.0" encoding="utf-8"?>
+<file path=ppt/slides/slide12.xml><?xml version="1.0" encoding="utf-8"?>
 <p:sld xmlns:a="http://schemas.openxmlformats.org/drawingml/2006/main" xmlns:p="http://schemas.openxmlformats.org/presentationml/2006/main" xmlns:r="http://schemas.openxmlformats.org/officeDocument/2006/relationships">
   <p:cSld>
     <p:spTree>
@@ -7585,7 +9222,7 @@
 </p:sld>
 </file>
 
-<file path=ppt/slides/slide12.xml><?xml version="1.0" encoding="utf-8"?>
+<file path=ppt/slides/slide13.xml><?xml version="1.0" encoding="utf-8"?>
 <p:sld xmlns:a="http://schemas.openxmlformats.org/drawingml/2006/main" xmlns:p="http://schemas.openxmlformats.org/presentationml/2006/main" xmlns:r="http://schemas.openxmlformats.org/officeDocument/2006/relationships">
   <p:cSld>
     <p:spTree>
@@ -7914,7 +9551,7 @@
                 </a:solidFill>
                 <a:latin typeface="Calibri"/>
               </a:rPr>
-              <a:t>12</a:t>
+              <a:t>13</a:t>
             </a:r>
           </a:p>
         </p:txBody>
@@ -7927,12 +9564,12 @@
         </p:nvSpPr>
         <p:spPr>
           <a:xfrm>
-            <a:off x="550000" y="1620000"/>
-            <a:ext cx="11100000" cy="1250000"/>
+            <a:off x="550000" y="1284050"/>
+            <a:ext cx="11100000" cy="1587300"/>
           </a:xfrm>
           <a:prstGeom prst="roundRect">
             <a:avLst>
-              <a:gd name="adj" fmla="val 18000"/>
+              <a:gd name="adj" fmla="val 8000"/>
             </a:avLst>
           </a:prstGeom>
           <a:solidFill>
@@ -7973,8 +9610,8 @@
         </p:nvSpPr>
         <p:spPr>
           <a:xfrm>
-            <a:off x="550000" y="1620000"/>
-            <a:ext cx="70000" cy="1250000"/>
+            <a:off x="550000" y="1284050"/>
+            <a:ext cx="70000" cy="1587300"/>
           </a:xfrm>
           <a:prstGeom prst="rect">
             <a:avLst/>
@@ -8017,8 +9654,8 @@
         </p:nvSpPr>
         <p:spPr>
           <a:xfrm>
-            <a:off x="800000" y="2015000"/>
-            <a:ext cx="460000" cy="460000"/>
+            <a:off x="780000" y="1867700"/>
+            <a:ext cx="420000" cy="420000"/>
           </a:xfrm>
           <a:prstGeom prst="ellipse">
             <a:avLst/>
@@ -8051,7 +9688,7 @@
           <a:p>
             <a:pPr algn="ctr"/>
             <a:r>
-              <a:rPr sz="1600" b="1">
+              <a:rPr sz="1400" b="1">
                 <a:solidFill>
                   <a:srgbClr val="FFFFFF"/>
                 </a:solidFill>
@@ -8070,8 +9707,8 @@
         </p:nvSpPr>
         <p:spPr>
           <a:xfrm>
-            <a:off x="1450000" y="1620000"/>
-            <a:ext cx="10050000" cy="1250000"/>
+            <a:off x="1380000" y="1324050"/>
+            <a:ext cx="10150000" cy="1507300"/>
           </a:xfrm>
           <a:prstGeom prst="rect">
             <a:avLst/>
@@ -8079,20 +9716,35 @@
           <a:noFill/>
         </p:spPr>
         <p:txBody>
-          <a:bodyPr wrap="square" anchor="ctr" lIns="50800" rIns="50800">
+          <a:bodyPr wrap="square" anchor="ctr">
             <a:spAutoFit/>
           </a:bodyPr>
           <a:lstStyle/>
           <a:p>
-            <a:pPr algn="l"/>
             <a:r>
-              <a:rPr sz="1600" b="0">
+              <a:rPr sz="1600" b="1">
                 <a:solidFill>
-                  <a:srgbClr val="1B2430"/>
+                  <a:srgbClr val="1F3A5F"/>
                 </a:solidFill>
                 <a:latin typeface="Calibri"/>
               </a:rPr>
-              <a:t>MPI (Message Passing Interface) — alohida xotirali jarayonlar o'rtasida xabar almashish standarti, 1994-yildan beri HPC ning asosiy vositasi. Har jarayon o'z rank iga ega, umumiy xotira yo'q, barcha almashinuv aniq chaqiruvlar orqali: nuqta-nuqta…</a:t>
+              <a:t>MPI (Message Passing Interface) — alohida xotirali jarayonlar o'rtasida xabar almashish standarti, 1994-yildan beri HPC ning asosiy vositasi.</a:t>
+            </a:r>
+          </a:p>
+          <a:p>
+            <a:pPr>
+              <a:spcBef>
+                <a:spcPts val="400"/>
+              </a:spcBef>
+            </a:pPr>
+            <a:r>
+              <a:rPr sz="1500">
+                <a:solidFill>
+                  <a:srgbClr val="334055"/>
+                </a:solidFill>
+                <a:latin typeface="Calibri"/>
+              </a:rPr>
+              <a:t>Har jarayon o'z rank iga ega, umumiy xotira yo'q, barcha almashinuv aniq chaqiruvlar orqali: nuqta-nuqta (MPI_Send/MPI_Recv) va kollektiv (MPI_Bcast, MPI_Reduce, MPI_Allreduce, MPI_Allgather, MPI_Alltoall).</a:t>
             </a:r>
           </a:p>
         </p:txBody>
@@ -8105,12 +9757,12 @@
         </p:nvSpPr>
         <p:spPr>
           <a:xfrm>
-            <a:off x="550000" y="2990000"/>
-            <a:ext cx="11100000" cy="1250000"/>
+            <a:off x="550000" y="2981350"/>
+            <a:ext cx="11100000" cy="1587300"/>
           </a:xfrm>
           <a:prstGeom prst="roundRect">
             <a:avLst>
-              <a:gd name="adj" fmla="val 18000"/>
+              <a:gd name="adj" fmla="val 8000"/>
             </a:avLst>
           </a:prstGeom>
           <a:solidFill>
@@ -8151,8 +9803,8 @@
         </p:nvSpPr>
         <p:spPr>
           <a:xfrm>
-            <a:off x="550000" y="2990000"/>
-            <a:ext cx="70000" cy="1250000"/>
+            <a:off x="550000" y="2981350"/>
+            <a:ext cx="70000" cy="1587300"/>
           </a:xfrm>
           <a:prstGeom prst="rect">
             <a:avLst/>
@@ -8195,8 +9847,8 @@
         </p:nvSpPr>
         <p:spPr>
           <a:xfrm>
-            <a:off x="800000" y="3385000"/>
-            <a:ext cx="460000" cy="460000"/>
+            <a:off x="780000" y="3565000"/>
+            <a:ext cx="420000" cy="420000"/>
           </a:xfrm>
           <a:prstGeom prst="ellipse">
             <a:avLst/>
@@ -8229,7 +9881,7 @@
           <a:p>
             <a:pPr algn="ctr"/>
             <a:r>
-              <a:rPr sz="1600" b="1">
+              <a:rPr sz="1400" b="1">
                 <a:solidFill>
                   <a:srgbClr val="FFFFFF"/>
                 </a:solidFill>
@@ -8248,8 +9900,8 @@
         </p:nvSpPr>
         <p:spPr>
           <a:xfrm>
-            <a:off x="1450000" y="2990000"/>
-            <a:ext cx="10050000" cy="1250000"/>
+            <a:off x="1380000" y="3021350"/>
+            <a:ext cx="10150000" cy="1507300"/>
           </a:xfrm>
           <a:prstGeom prst="rect">
             <a:avLst/>
@@ -8257,20 +9909,35 @@
           <a:noFill/>
         </p:spPr>
         <p:txBody>
-          <a:bodyPr wrap="square" anchor="ctr" lIns="50800" rIns="50800">
+          <a:bodyPr wrap="square" anchor="ctr">
             <a:spAutoFit/>
           </a:bodyPr>
           <a:lstStyle/>
           <a:p>
-            <a:pPr algn="l"/>
             <a:r>
-              <a:rPr sz="1600" b="0">
+              <a:rPr sz="1600" b="1">
                 <a:solidFill>
-                  <a:srgbClr val="1B2430"/>
+                  <a:srgbClr val="1F3A5F"/>
                 </a:solidFill>
                 <a:latin typeface="Calibri"/>
               </a:rPr>
-              <a:t>All-reduce ni samarali bajarish alohida fan. Sodda usul — hamma rank 0 ga yuboradi, u yig'ib qaytaradi — rank 0 da (p−1) × M bayt trafik hosil qiladi va masshtablanmaydi.</a:t>
+              <a:t>All-reduce ni samarali bajarish alohida fan.</a:t>
+            </a:r>
+          </a:p>
+          <a:p>
+            <a:pPr>
+              <a:spcBef>
+                <a:spcPts val="400"/>
+              </a:spcBef>
+            </a:pPr>
+            <a:r>
+              <a:rPr sz="1500">
+                <a:solidFill>
+                  <a:srgbClr val="334055"/>
+                </a:solidFill>
+                <a:latin typeface="Calibri"/>
+              </a:rPr>
+              <a:t>Sodda usul — hamma rank 0 ga yuboradi, u yig'ib qaytaradi — rank 0 da (p−1) × M bayt trafik hosil qiladi va masshtablanmaydi.</a:t>
             </a:r>
           </a:p>
         </p:txBody>
@@ -8283,12 +9950,12 @@
         </p:nvSpPr>
         <p:spPr>
           <a:xfrm>
-            <a:off x="550000" y="4360000"/>
-            <a:ext cx="11100000" cy="1250000"/>
+            <a:off x="550000" y="4678650"/>
+            <a:ext cx="11100000" cy="1587300"/>
           </a:xfrm>
           <a:prstGeom prst="roundRect">
             <a:avLst>
-              <a:gd name="adj" fmla="val 18000"/>
+              <a:gd name="adj" fmla="val 8000"/>
             </a:avLst>
           </a:prstGeom>
           <a:solidFill>
@@ -8329,8 +9996,8 @@
         </p:nvSpPr>
         <p:spPr>
           <a:xfrm>
-            <a:off x="550000" y="4360000"/>
-            <a:ext cx="70000" cy="1250000"/>
+            <a:off x="550000" y="4678650"/>
+            <a:ext cx="70000" cy="1587300"/>
           </a:xfrm>
           <a:prstGeom prst="rect">
             <a:avLst/>
@@ -8373,8 +10040,8 @@
         </p:nvSpPr>
         <p:spPr>
           <a:xfrm>
-            <a:off x="800000" y="4755000"/>
-            <a:ext cx="460000" cy="460000"/>
+            <a:off x="780000" y="5262300"/>
+            <a:ext cx="420000" cy="420000"/>
           </a:xfrm>
           <a:prstGeom prst="ellipse">
             <a:avLst/>
@@ -8407,7 +10074,7 @@
           <a:p>
             <a:pPr algn="ctr"/>
             <a:r>
-              <a:rPr sz="1600" b="1">
+              <a:rPr sz="1400" b="1">
                 <a:solidFill>
                   <a:srgbClr val="FFFFFF"/>
                 </a:solidFill>
@@ -8426,8 +10093,8 @@
         </p:nvSpPr>
         <p:spPr>
           <a:xfrm>
-            <a:off x="1450000" y="4360000"/>
-            <a:ext cx="10050000" cy="1250000"/>
+            <a:off x="1380000" y="4718650"/>
+            <a:ext cx="10150000" cy="1507300"/>
           </a:xfrm>
           <a:prstGeom prst="rect">
             <a:avLst/>
@@ -8435,20 +10102,19 @@
           <a:noFill/>
         </p:spPr>
         <p:txBody>
-          <a:bodyPr wrap="square" anchor="ctr" lIns="50800" rIns="50800">
+          <a:bodyPr wrap="square" anchor="ctr">
             <a:spAutoFit/>
           </a:bodyPr>
           <a:lstStyle/>
           <a:p>
-            <a:pPr algn="l"/>
             <a:r>
-              <a:rPr sz="1600" b="0">
+              <a:rPr sz="1500" b="0">
                 <a:solidFill>
                   <a:srgbClr val="1B2430"/>
                 </a:solidFill>
                 <a:latin typeface="Calibri"/>
               </a:rPr>
-              <a:t>SI amaliyotida MPI ko'pincha bevosita ko'rinmaydi, lekin uning modeli saqlanadi: PyTorch Distributed rank, world_size, all_reduce atamalarini aynan MPI dan olgan; Horovod MPI ustida…</a:t>
+              <a:t>SI amaliyotida MPI ko'pincha bevosita ko'rinmaydi, lekin uning modeli saqlanadi: PyTorch Distributed rank, world_size, all_reduce atamalarini aynan MPI dan olgan; Horovod MPI ustida qurilgan; Slurm klasterlarida jarayonlarni ishga tushirish srun/mpirun orqali…</a:t>
             </a:r>
           </a:p>
         </p:txBody>
@@ -9645,7 +11311,7 @@
 </p:sld>
 </file>
 
-<file path=ppt/slides/slide13.xml><?xml version="1.0" encoding="utf-8"?>
+<file path=ppt/slides/slide14.xml><?xml version="1.0" encoding="utf-8"?>
 <p:sld xmlns:a="http://schemas.openxmlformats.org/drawingml/2006/main" xmlns:p="http://schemas.openxmlformats.org/presentationml/2006/main" xmlns:r="http://schemas.openxmlformats.org/officeDocument/2006/relationships">
   <p:cSld>
     <p:spTree>
@@ -9974,7 +11640,7 @@
                 </a:solidFill>
                 <a:latin typeface="Calibri"/>
               </a:rPr>
-              <a:t>13</a:t>
+              <a:t>14</a:t>
             </a:r>
           </a:p>
         </p:txBody>
@@ -10639,7 +12305,7 @@
 </p:sld>
 </file>
 
-<file path=ppt/slides/slide14.xml><?xml version="1.0" encoding="utf-8"?>
+<file path=ppt/slides/slide15.xml><?xml version="1.0" encoding="utf-8"?>
 <p:sld xmlns:a="http://schemas.openxmlformats.org/drawingml/2006/main" xmlns:p="http://schemas.openxmlformats.org/presentationml/2006/main" xmlns:r="http://schemas.openxmlformats.org/officeDocument/2006/relationships">
   <p:cSld>
     <p:spTree>
@@ -11551,7 +13217,7 @@
 </p:sld>
 </file>
 
-<file path=ppt/slides/slide15.xml><?xml version="1.0" encoding="utf-8"?>
+<file path=ppt/slides/slide16.xml><?xml version="1.0" encoding="utf-8"?>
 <p:sld xmlns:a="http://schemas.openxmlformats.org/drawingml/2006/main" xmlns:p="http://schemas.openxmlformats.org/presentationml/2006/main" xmlns:r="http://schemas.openxmlformats.org/officeDocument/2006/relationships">
   <p:cSld>
     <p:spTree>
@@ -11880,7 +13546,7 @@
                 </a:solidFill>
                 <a:latin typeface="Calibri"/>
               </a:rPr>
-              <a:t>15</a:t>
+              <a:t>16</a:t>
             </a:r>
           </a:p>
         </p:txBody>
@@ -11893,12 +13559,12 @@
         </p:nvSpPr>
         <p:spPr>
           <a:xfrm>
-            <a:off x="550000" y="1300000"/>
-            <a:ext cx="11100000" cy="1147500"/>
+            <a:off x="550000" y="1250000"/>
+            <a:ext cx="11100000" cy="1180000"/>
           </a:xfrm>
           <a:prstGeom prst="roundRect">
             <a:avLst>
-              <a:gd name="adj" fmla="val 18000"/>
+              <a:gd name="adj" fmla="val 8000"/>
             </a:avLst>
           </a:prstGeom>
           <a:solidFill>
@@ -11939,8 +13605,8 @@
         </p:nvSpPr>
         <p:spPr>
           <a:xfrm>
-            <a:off x="550000" y="1300000"/>
-            <a:ext cx="70000" cy="1147500"/>
+            <a:off x="550000" y="1250000"/>
+            <a:ext cx="70000" cy="1180000"/>
           </a:xfrm>
           <a:prstGeom prst="rect">
             <a:avLst/>
@@ -11983,8 +13649,8 @@
         </p:nvSpPr>
         <p:spPr>
           <a:xfrm>
-            <a:off x="800000" y="1643750"/>
-            <a:ext cx="460000" cy="460000"/>
+            <a:off x="780000" y="1630000"/>
+            <a:ext cx="420000" cy="420000"/>
           </a:xfrm>
           <a:prstGeom prst="ellipse">
             <a:avLst/>
@@ -12017,7 +13683,7 @@
           <a:p>
             <a:pPr algn="ctr"/>
             <a:r>
-              <a:rPr sz="1600" b="1">
+              <a:rPr sz="1400" b="1">
                 <a:solidFill>
                   <a:srgbClr val="FFFFFF"/>
                 </a:solidFill>
@@ -12036,8 +13702,8 @@
         </p:nvSpPr>
         <p:spPr>
           <a:xfrm>
-            <a:off x="1450000" y="1300000"/>
-            <a:ext cx="10050000" cy="1147500"/>
+            <a:off x="1380000" y="1290000"/>
+            <a:ext cx="10150000" cy="1100000"/>
           </a:xfrm>
           <a:prstGeom prst="rect">
             <a:avLst/>
@@ -12045,12 +13711,11 @@
           <a:noFill/>
         </p:spPr>
         <p:txBody>
-          <a:bodyPr wrap="square" anchor="ctr" lIns="50800" rIns="50800">
+          <a:bodyPr wrap="square" anchor="ctr">
             <a:spAutoFit/>
           </a:bodyPr>
           <a:lstStyle/>
           <a:p>
-            <a:pPr algn="l"/>
             <a:r>
               <a:rPr sz="1400" b="0">
                 <a:solidFill>
@@ -12071,12 +13736,12 @@
         </p:nvSpPr>
         <p:spPr>
           <a:xfrm>
-            <a:off x="550000" y="2567500"/>
-            <a:ext cx="11100000" cy="1147500"/>
+            <a:off x="550000" y="2540000"/>
+            <a:ext cx="11100000" cy="1180000"/>
           </a:xfrm>
           <a:prstGeom prst="roundRect">
             <a:avLst>
-              <a:gd name="adj" fmla="val 18000"/>
+              <a:gd name="adj" fmla="val 8000"/>
             </a:avLst>
           </a:prstGeom>
           <a:solidFill>
@@ -12117,8 +13782,8 @@
         </p:nvSpPr>
         <p:spPr>
           <a:xfrm>
-            <a:off x="550000" y="2567500"/>
-            <a:ext cx="70000" cy="1147500"/>
+            <a:off x="550000" y="2540000"/>
+            <a:ext cx="70000" cy="1180000"/>
           </a:xfrm>
           <a:prstGeom prst="rect">
             <a:avLst/>
@@ -12161,8 +13826,8 @@
         </p:nvSpPr>
         <p:spPr>
           <a:xfrm>
-            <a:off x="800000" y="2911250"/>
-            <a:ext cx="460000" cy="460000"/>
+            <a:off x="780000" y="2920000"/>
+            <a:ext cx="420000" cy="420000"/>
           </a:xfrm>
           <a:prstGeom prst="ellipse">
             <a:avLst/>
@@ -12195,7 +13860,7 @@
           <a:p>
             <a:pPr algn="ctr"/>
             <a:r>
-              <a:rPr sz="1600" b="1">
+              <a:rPr sz="1400" b="1">
                 <a:solidFill>
                   <a:srgbClr val="FFFFFF"/>
                 </a:solidFill>
@@ -12214,8 +13879,8 @@
         </p:nvSpPr>
         <p:spPr>
           <a:xfrm>
-            <a:off x="1450000" y="2567500"/>
-            <a:ext cx="10050000" cy="1147500"/>
+            <a:off x="1380000" y="2580000"/>
+            <a:ext cx="10150000" cy="1100000"/>
           </a:xfrm>
           <a:prstGeom prst="rect">
             <a:avLst/>
@@ -12223,22 +13888,37 @@
           <a:noFill/>
         </p:spPr>
         <p:txBody>
-          <a:bodyPr wrap="square" anchor="ctr" lIns="50800" rIns="50800">
+          <a:bodyPr wrap="square" anchor="ctr">
             <a:spAutoFit/>
           </a:bodyPr>
           <a:lstStyle/>
           <a:p>
-            <a:pPr algn="l"/>
             <a:r>
-              <a:rPr sz="1400" b="0">
+              <a:rPr sz="1500" b="1">
                 <a:solidFill>
-                  <a:srgbClr val="1B2430"/>
+                  <a:srgbClr val="1F3A5F"/>
                 </a:solidFill>
                 <a:latin typeface="Calibri"/>
               </a:rPr>
               <a:t>Ma'lumotlar parallelligi (data parallelism, DP) — eng sodda va eng keng tarqalgan usul.</a:t>
             </a:r>
           </a:p>
+          <a:p>
+            <a:pPr>
+              <a:spcBef>
+                <a:spcPts val="400"/>
+              </a:spcBef>
+            </a:pPr>
+            <a:r>
+              <a:rPr sz="1400">
+                <a:solidFill>
+                  <a:srgbClr val="334055"/>
+                </a:solidFill>
+                <a:latin typeface="Calibri"/>
+              </a:rPr>
+              <a:t>Modelning to'liq nusxasi har GPU da saqlanadi; global paket p ta mikro-paketga bo'linadi; har GPU o'z mikro-paketida oldinga va orqaga o'tishni mustaqil bajaradi; so'ng gradientlar all-reduce bilan o'rtachalanadi va har GPU bir xil yangilanishni qo'llaydi — natijada nusxalar sinxron qoladi.</a:t>
+            </a:r>
+          </a:p>
         </p:txBody>
       </p:sp>
       <p:sp>
@@ -12249,12 +13929,12 @@
         </p:nvSpPr>
         <p:spPr>
           <a:xfrm>
-            <a:off x="550000" y="3835000"/>
-            <a:ext cx="11100000" cy="1147500"/>
+            <a:off x="550000" y="3830000"/>
+            <a:ext cx="11100000" cy="1180000"/>
           </a:xfrm>
           <a:prstGeom prst="roundRect">
             <a:avLst>
-              <a:gd name="adj" fmla="val 18000"/>
+              <a:gd name="adj" fmla="val 8000"/>
             </a:avLst>
           </a:prstGeom>
           <a:solidFill>
@@ -12295,8 +13975,8 @@
         </p:nvSpPr>
         <p:spPr>
           <a:xfrm>
-            <a:off x="550000" y="3835000"/>
-            <a:ext cx="70000" cy="1147500"/>
+            <a:off x="550000" y="3830000"/>
+            <a:ext cx="70000" cy="1180000"/>
           </a:xfrm>
           <a:prstGeom prst="rect">
             <a:avLst/>
@@ -12339,8 +14019,8 @@
         </p:nvSpPr>
         <p:spPr>
           <a:xfrm>
-            <a:off x="800000" y="4178750"/>
-            <a:ext cx="460000" cy="460000"/>
+            <a:off x="780000" y="4210000"/>
+            <a:ext cx="420000" cy="420000"/>
           </a:xfrm>
           <a:prstGeom prst="ellipse">
             <a:avLst/>
@@ -12373,7 +14053,7 @@
           <a:p>
             <a:pPr algn="ctr"/>
             <a:r>
-              <a:rPr sz="1600" b="1">
+              <a:rPr sz="1400" b="1">
                 <a:solidFill>
                   <a:srgbClr val="FFFFFF"/>
                 </a:solidFill>
@@ -12392,8 +14072,8 @@
         </p:nvSpPr>
         <p:spPr>
           <a:xfrm>
-            <a:off x="1450000" y="3835000"/>
-            <a:ext cx="10050000" cy="1147500"/>
+            <a:off x="1380000" y="3870000"/>
+            <a:ext cx="10150000" cy="1100000"/>
           </a:xfrm>
           <a:prstGeom prst="rect">
             <a:avLst/>
@@ -12401,20 +14081,35 @@
           <a:noFill/>
         </p:spPr>
         <p:txBody>
-          <a:bodyPr wrap="square" anchor="ctr" lIns="50800" rIns="50800">
+          <a:bodyPr wrap="square" anchor="ctr">
             <a:spAutoFit/>
           </a:bodyPr>
           <a:lstStyle/>
           <a:p>
-            <a:pPr algn="l"/>
             <a:r>
-              <a:rPr sz="1400" b="0">
+              <a:rPr sz="1500" b="1">
                 <a:solidFill>
-                  <a:srgbClr val="1B2430"/>
+                  <a:srgbClr val="1F3A5F"/>
                 </a:solidFill>
                 <a:latin typeface="Calibri"/>
               </a:rPr>
-              <a:t>Bu cheklovni ZeRO (Zero Redundancy Optimizer; Rajbhandari va hammualliflar, SC 2020, Microsoft DeepSpeed) yumshatadi: optimizator holati (ZeRO-1), gradientlar (ZeRO-2) va parametrlar…</a:t>
+              <a:t>Bu cheklovni ZeRO (Zero Redundancy Optimizer; Rajbhandari va hammualliflar, SC 2020, Microsoft DeepSpeed) yumshatadi: optimizator holati (ZeRO-1), gradientlar (ZeRO-2) va parametrlar (ZeRO-3) GPU lar o'rtasida bo'lib saqlanadi, har GPU faqat o'z bo'lagini…</a:t>
+            </a:r>
+          </a:p>
+          <a:p>
+            <a:pPr>
+              <a:spcBef>
+                <a:spcPts val="400"/>
+              </a:spcBef>
+            </a:pPr>
+            <a:r>
+              <a:rPr sz="1400">
+                <a:solidFill>
+                  <a:srgbClr val="334055"/>
+                </a:solidFill>
+                <a:latin typeface="Calibri"/>
+              </a:rPr>
+              <a:t>Xotira p baravar tejaladi, aloqa esa DP ga nisbatan taxminan 1,5 baravar oshadi. PyTorch da bu yondashuv FSDP (Fully Sharded Data Parallel) nomi bilan amalga oshirilgan.</a:t>
             </a:r>
           </a:p>
         </p:txBody>
@@ -12427,12 +14122,12 @@
         </p:nvSpPr>
         <p:spPr>
           <a:xfrm>
-            <a:off x="550000" y="5102500"/>
-            <a:ext cx="11100000" cy="1147500"/>
+            <a:off x="550000" y="5120000"/>
+            <a:ext cx="11100000" cy="1180000"/>
           </a:xfrm>
           <a:prstGeom prst="roundRect">
             <a:avLst>
-              <a:gd name="adj" fmla="val 18000"/>
+              <a:gd name="adj" fmla="val 8000"/>
             </a:avLst>
           </a:prstGeom>
           <a:solidFill>
@@ -12473,8 +14168,8 @@
         </p:nvSpPr>
         <p:spPr>
           <a:xfrm>
-            <a:off x="550000" y="5102500"/>
-            <a:ext cx="70000" cy="1147500"/>
+            <a:off x="550000" y="5120000"/>
+            <a:ext cx="70000" cy="1180000"/>
           </a:xfrm>
           <a:prstGeom prst="rect">
             <a:avLst/>
@@ -12517,8 +14212,8 @@
         </p:nvSpPr>
         <p:spPr>
           <a:xfrm>
-            <a:off x="800000" y="5446250"/>
-            <a:ext cx="460000" cy="460000"/>
+            <a:off x="780000" y="5500000"/>
+            <a:ext cx="420000" cy="420000"/>
           </a:xfrm>
           <a:prstGeom prst="ellipse">
             <a:avLst/>
@@ -12551,7 +14246,7 @@
           <a:p>
             <a:pPr algn="ctr"/>
             <a:r>
-              <a:rPr sz="1600" b="1">
+              <a:rPr sz="1400" b="1">
                 <a:solidFill>
                   <a:srgbClr val="FFFFFF"/>
                 </a:solidFill>
@@ -12570,8 +14265,8 @@
         </p:nvSpPr>
         <p:spPr>
           <a:xfrm>
-            <a:off x="1450000" y="5102500"/>
-            <a:ext cx="10050000" cy="1147500"/>
+            <a:off x="1380000" y="5160000"/>
+            <a:ext cx="10150000" cy="1100000"/>
           </a:xfrm>
           <a:prstGeom prst="rect">
             <a:avLst/>
@@ -12579,20 +14274,35 @@
           <a:noFill/>
         </p:spPr>
         <p:txBody>
-          <a:bodyPr wrap="square" anchor="ctr" lIns="50800" rIns="50800">
+          <a:bodyPr wrap="square" anchor="ctr">
             <a:spAutoFit/>
           </a:bodyPr>
           <a:lstStyle/>
           <a:p>
-            <a:pPr algn="l"/>
             <a:r>
-              <a:rPr sz="1400" b="0">
+              <a:rPr sz="1500" b="1">
                 <a:solidFill>
-                  <a:srgbClr val="1B2430"/>
+                  <a:srgbClr val="1F3A5F"/>
                 </a:solidFill>
                 <a:latin typeface="Calibri"/>
               </a:rPr>
               <a:t>Model parallelligi (model parallelism) — model qismlari turli GPU larga joylashtiriladi; har GPU faqat o'z qismini saqlaydi va hisoblaydi.</a:t>
+            </a:r>
+          </a:p>
+          <a:p>
+            <a:pPr>
+              <a:spcBef>
+                <a:spcPts val="400"/>
+              </a:spcBef>
+            </a:pPr>
+            <a:r>
+              <a:rPr sz="1400">
+                <a:solidFill>
+                  <a:srgbClr val="334055"/>
+                </a:solidFill>
+                <a:latin typeface="Calibri"/>
+              </a:rPr>
+              <a:t>Uning ikki asosiy ko'rinishi — tensor va quvur parallelligi.</a:t>
             </a:r>
           </a:p>
         </p:txBody>
@@ -14153,7 +15863,7 @@
 </p:sld>
 </file>
 
-<file path=ppt/slides/slide16.xml><?xml version="1.0" encoding="utf-8"?>
+<file path=ppt/slides/slide17.xml><?xml version="1.0" encoding="utf-8"?>
 <p:sld xmlns:a="http://schemas.openxmlformats.org/drawingml/2006/main" xmlns:p="http://schemas.openxmlformats.org/presentationml/2006/main" xmlns:r="http://schemas.openxmlformats.org/officeDocument/2006/relationships">
   <p:cSld>
     <p:spTree>
@@ -15065,7 +16775,7 @@
 </p:sld>
 </file>
 
-<file path=ppt/slides/slide17.xml><?xml version="1.0" encoding="utf-8"?>
+<file path=ppt/slides/slide18.xml><?xml version="1.0" encoding="utf-8"?>
 <p:sld xmlns:a="http://schemas.openxmlformats.org/drawingml/2006/main" xmlns:p="http://schemas.openxmlformats.org/presentationml/2006/main" xmlns:r="http://schemas.openxmlformats.org/officeDocument/2006/relationships">
   <p:cSld>
     <p:spTree>
@@ -15394,7 +17104,7 @@
                 </a:solidFill>
                 <a:latin typeface="Calibri"/>
               </a:rPr>
-              <a:t>17</a:t>
+              <a:t>18</a:t>
             </a:r>
           </a:p>
         </p:txBody>
@@ -15407,12 +17117,12 @@
         </p:nvSpPr>
         <p:spPr>
           <a:xfrm>
-            <a:off x="550000" y="1620000"/>
-            <a:ext cx="11100000" cy="1250000"/>
+            <a:off x="550000" y="1284050"/>
+            <a:ext cx="11100000" cy="1587300"/>
           </a:xfrm>
           <a:prstGeom prst="roundRect">
             <a:avLst>
-              <a:gd name="adj" fmla="val 18000"/>
+              <a:gd name="adj" fmla="val 8000"/>
             </a:avLst>
           </a:prstGeom>
           <a:solidFill>
@@ -15453,8 +17163,8 @@
         </p:nvSpPr>
         <p:spPr>
           <a:xfrm>
-            <a:off x="550000" y="1620000"/>
-            <a:ext cx="70000" cy="1250000"/>
+            <a:off x="550000" y="1284050"/>
+            <a:ext cx="70000" cy="1587300"/>
           </a:xfrm>
           <a:prstGeom prst="rect">
             <a:avLst/>
@@ -15497,8 +17207,8 @@
         </p:nvSpPr>
         <p:spPr>
           <a:xfrm>
-            <a:off x="800000" y="2015000"/>
-            <a:ext cx="460000" cy="460000"/>
+            <a:off x="780000" y="1867700"/>
+            <a:ext cx="420000" cy="420000"/>
           </a:xfrm>
           <a:prstGeom prst="ellipse">
             <a:avLst/>
@@ -15531,7 +17241,7 @@
           <a:p>
             <a:pPr algn="ctr"/>
             <a:r>
-              <a:rPr sz="1600" b="1">
+              <a:rPr sz="1400" b="1">
                 <a:solidFill>
                   <a:srgbClr val="FFFFFF"/>
                 </a:solidFill>
@@ -15550,8 +17260,8 @@
         </p:nvSpPr>
         <p:spPr>
           <a:xfrm>
-            <a:off x="1450000" y="1620000"/>
-            <a:ext cx="10050000" cy="1250000"/>
+            <a:off x="1380000" y="1324050"/>
+            <a:ext cx="10150000" cy="1507300"/>
           </a:xfrm>
           <a:prstGeom prst="rect">
             <a:avLst/>
@@ -15559,20 +17269,19 @@
           <a:noFill/>
         </p:spPr>
         <p:txBody>
-          <a:bodyPr wrap="square" anchor="ctr" lIns="50800" rIns="50800">
+          <a:bodyPr wrap="square" anchor="ctr">
             <a:spAutoFit/>
           </a:bodyPr>
           <a:lstStyle/>
           <a:p>
-            <a:pPr algn="l"/>
             <a:r>
-              <a:rPr sz="1600" b="0">
+              <a:rPr sz="1500" b="0">
                 <a:solidFill>
                   <a:srgbClr val="1B2430"/>
                 </a:solidFill>
                 <a:latin typeface="Calibri"/>
               </a:rPr>
-              <a:t>Tensor parallelligi (tensor parallelism, TP) bitta qatlamni, ya'ni bitta matritsa ko'paytirishni GPU lar o'rtasida bo'ladi. Megatron-LM (Shoeybi va hammualliflar, 2019, NVIDIA) transformer uchun samarali sxemani taklif qildi: MLP blokidagi birinchi chiziqli…</a:t>
+              <a:t>Tensor parallelligi (tensor parallelism, TP) bitta qatlamni, ya'ni bitta matritsa ko'paytirishni GPU lar o'rtasida bo'ladi.</a:t>
             </a:r>
           </a:p>
         </p:txBody>
@@ -15585,12 +17294,12 @@
         </p:nvSpPr>
         <p:spPr>
           <a:xfrm>
-            <a:off x="550000" y="2990000"/>
-            <a:ext cx="11100000" cy="1250000"/>
+            <a:off x="550000" y="2981350"/>
+            <a:ext cx="11100000" cy="1587300"/>
           </a:xfrm>
           <a:prstGeom prst="roundRect">
             <a:avLst>
-              <a:gd name="adj" fmla="val 18000"/>
+              <a:gd name="adj" fmla="val 8000"/>
             </a:avLst>
           </a:prstGeom>
           <a:solidFill>
@@ -15631,8 +17340,8 @@
         </p:nvSpPr>
         <p:spPr>
           <a:xfrm>
-            <a:off x="550000" y="2990000"/>
-            <a:ext cx="70000" cy="1250000"/>
+            <a:off x="550000" y="2981350"/>
+            <a:ext cx="70000" cy="1587300"/>
           </a:xfrm>
           <a:prstGeom prst="rect">
             <a:avLst/>
@@ -15675,8 +17384,8 @@
         </p:nvSpPr>
         <p:spPr>
           <a:xfrm>
-            <a:off x="800000" y="3385000"/>
-            <a:ext cx="460000" cy="460000"/>
+            <a:off x="780000" y="3565000"/>
+            <a:ext cx="420000" cy="420000"/>
           </a:xfrm>
           <a:prstGeom prst="ellipse">
             <a:avLst/>
@@ -15709,7 +17418,7 @@
           <a:p>
             <a:pPr algn="ctr"/>
             <a:r>
-              <a:rPr sz="1600" b="1">
+              <a:rPr sz="1400" b="1">
                 <a:solidFill>
                   <a:srgbClr val="FFFFFF"/>
                 </a:solidFill>
@@ -15728,8 +17437,8 @@
         </p:nvSpPr>
         <p:spPr>
           <a:xfrm>
-            <a:off x="1450000" y="2990000"/>
-            <a:ext cx="10050000" cy="1250000"/>
+            <a:off x="1380000" y="3021350"/>
+            <a:ext cx="10150000" cy="1507300"/>
           </a:xfrm>
           <a:prstGeom prst="rect">
             <a:avLst/>
@@ -15737,20 +17446,35 @@
           <a:noFill/>
         </p:spPr>
         <p:txBody>
-          <a:bodyPr wrap="square" anchor="ctr" lIns="50800" rIns="50800">
+          <a:bodyPr wrap="square" anchor="ctr">
             <a:spAutoFit/>
           </a:bodyPr>
           <a:lstStyle/>
           <a:p>
-            <a:pPr algn="l"/>
             <a:r>
-              <a:rPr sz="1600" b="0">
+              <a:rPr sz="1600" b="1">
                 <a:solidFill>
-                  <a:srgbClr val="1B2430"/>
+                  <a:srgbClr val="1F3A5F"/>
                 </a:solidFill>
                 <a:latin typeface="Calibri"/>
               </a:rPr>
-              <a:t>Quvur parallelligi (pipeline parallelism, PP) modelni qatlamlar bo'yicha ketma-ket bosqichlarga (stage) bo'ladi: 1–8-qatlamlar GPU 0 da, 9–16-qatlamlar GPU 1 da va hokazo. Bosqichlar o'rtasida faqat chegara aktivatsiyalari (nuqta-nuqta) uzatiladi — bu TP dan…</a:t>
+              <a:t>Quvur parallelligi (pipeline parallelism, PP) modelni qatlamlar bo'yicha ketma-ket bosqichlarga (stage) bo'ladi: 1–8-qatlamlar GPU 0 da, 9–16-qatlamlar GPU 1 da va hokazo.</a:t>
+            </a:r>
+          </a:p>
+          <a:p>
+            <a:pPr>
+              <a:spcBef>
+                <a:spcPts val="400"/>
+              </a:spcBef>
+            </a:pPr>
+            <a:r>
+              <a:rPr sz="1500">
+                <a:solidFill>
+                  <a:srgbClr val="334055"/>
+                </a:solidFill>
+                <a:latin typeface="Calibri"/>
+              </a:rPr>
+              <a:t>Bosqichlar o'rtasida faqat chegara aktivatsiyalari (nuqta-nuqta) uzatiladi — bu TP dan ancha kam aloqa, shuning uchun PP serverlar o'rtasida ham ishlaydi. Muammo — pufak (bubble): sodda bajarishda GPU 1 GPU 0 tugatguncha bo'sh turadi.</a:t>
             </a:r>
           </a:p>
         </p:txBody>
@@ -15763,12 +17487,12 @@
         </p:nvSpPr>
         <p:spPr>
           <a:xfrm>
-            <a:off x="550000" y="4360000"/>
-            <a:ext cx="11100000" cy="1250000"/>
+            <a:off x="550000" y="4678650"/>
+            <a:ext cx="11100000" cy="1587300"/>
           </a:xfrm>
           <a:prstGeom prst="roundRect">
             <a:avLst>
-              <a:gd name="adj" fmla="val 18000"/>
+              <a:gd name="adj" fmla="val 8000"/>
             </a:avLst>
           </a:prstGeom>
           <a:solidFill>
@@ -15809,8 +17533,8 @@
         </p:nvSpPr>
         <p:spPr>
           <a:xfrm>
-            <a:off x="550000" y="4360000"/>
-            <a:ext cx="70000" cy="1250000"/>
+            <a:off x="550000" y="4678650"/>
+            <a:ext cx="70000" cy="1587300"/>
           </a:xfrm>
           <a:prstGeom prst="rect">
             <a:avLst/>
@@ -15853,8 +17577,8 @@
         </p:nvSpPr>
         <p:spPr>
           <a:xfrm>
-            <a:off x="800000" y="4755000"/>
-            <a:ext cx="460000" cy="460000"/>
+            <a:off x="780000" y="5262300"/>
+            <a:ext cx="420000" cy="420000"/>
           </a:xfrm>
           <a:prstGeom prst="ellipse">
             <a:avLst/>
@@ -15887,7 +17611,7 @@
           <a:p>
             <a:pPr algn="ctr"/>
             <a:r>
-              <a:rPr sz="1600" b="1">
+              <a:rPr sz="1400" b="1">
                 <a:solidFill>
                   <a:srgbClr val="FFFFFF"/>
                 </a:solidFill>
@@ -15906,8 +17630,8 @@
         </p:nvSpPr>
         <p:spPr>
           <a:xfrm>
-            <a:off x="1450000" y="4360000"/>
-            <a:ext cx="10050000" cy="1250000"/>
+            <a:off x="1380000" y="4718650"/>
+            <a:ext cx="10150000" cy="1507300"/>
           </a:xfrm>
           <a:prstGeom prst="rect">
             <a:avLst/>
@@ -15915,20 +17639,35 @@
           <a:noFill/>
         </p:spPr>
         <p:txBody>
-          <a:bodyPr wrap="square" anchor="ctr" lIns="50800" rIns="50800">
+          <a:bodyPr wrap="square" anchor="ctr">
             <a:spAutoFit/>
           </a:bodyPr>
           <a:lstStyle/>
           <a:p>
-            <a:pPr algn="l"/>
             <a:r>
-              <a:rPr sz="1600" b="0">
+              <a:rPr sz="1600" b="1">
                 <a:solidFill>
-                  <a:srgbClr val="1B2430"/>
+                  <a:srgbClr val="1F3A5F"/>
                 </a:solidFill>
                 <a:latin typeface="Calibri"/>
               </a:rPr>
-              <a:t>Amalda uchala o'q birlashtiriladi — 3D parallellik: TP server ichida (NVLink, 8 GPU), PP serverlar guruhi bo'ylab, DP (yoki ZeRO) eng tashqi darajada. Megatron-Turing NLG 530B (2021) 560 ta DGX A100 da TP = 8, PP = 35, DP = 12 konfiguratsiyasida o'qitilgan.</a:t>
+              <a:t>Amalda uchala o'q birlashtiriladi — 3D parallellik: TP server ichida (NVLink, 8 GPU), PP serverlar guruhi bo'ylab, DP (yoki ZeRO) eng tashqi darajada.</a:t>
+            </a:r>
+          </a:p>
+          <a:p>
+            <a:pPr>
+              <a:spcBef>
+                <a:spcPts val="400"/>
+              </a:spcBef>
+            </a:pPr>
+            <a:r>
+              <a:rPr sz="1500">
+                <a:solidFill>
+                  <a:srgbClr val="334055"/>
+                </a:solidFill>
+                <a:latin typeface="Calibri"/>
+              </a:rPr>
+              <a:t>Megatron-Turing NLG 530B (2021) 560 ta DGX A100 da TP = 8, PP = 35, DP = 12 konfiguratsiyasida o'qitilgan. Quyidagi jadval strategiyalarni taqqoslaydi:</a:t>
             </a:r>
           </a:p>
         </p:txBody>
@@ -17125,7 +18864,7 @@
 </p:sld>
 </file>
 
-<file path=ppt/slides/slide18.xml><?xml version="1.0" encoding="utf-8"?>
+<file path=ppt/slides/slide19.xml><?xml version="1.0" encoding="utf-8"?>
 <p:sld xmlns:a="http://schemas.openxmlformats.org/drawingml/2006/main" xmlns:p="http://schemas.openxmlformats.org/presentationml/2006/main" xmlns:r="http://schemas.openxmlformats.org/officeDocument/2006/relationships">
   <p:cSld>
     <p:spTree>
@@ -17454,7 +19193,7 @@
                 </a:solidFill>
                 <a:latin typeface="Calibri"/>
               </a:rPr>
-              <a:t>18</a:t>
+              <a:t>19</a:t>
             </a:r>
           </a:p>
         </p:txBody>
@@ -18304,918 +20043,6 @@
 </p:sld>
 </file>
 
-<file path=ppt/slides/slide19.xml><?xml version="1.0" encoding="utf-8"?>
-<p:sld xmlns:a="http://schemas.openxmlformats.org/drawingml/2006/main" xmlns:p="http://schemas.openxmlformats.org/presentationml/2006/main" xmlns:r="http://schemas.openxmlformats.org/officeDocument/2006/relationships">
-  <p:cSld>
-    <p:spTree>
-      <p:nvGrpSpPr>
-        <p:cNvPr id="1" name=""/>
-        <p:cNvGrpSpPr/>
-        <p:nvPr/>
-      </p:nvGrpSpPr>
-      <p:grpSpPr/>
-      <p:sp>
-        <p:nvSpPr>
-          <p:cNvPr id="2" name="Rectangle 1"/>
-          <p:cNvSpPr/>
-          <p:nvPr/>
-        </p:nvSpPr>
-        <p:spPr>
-          <a:xfrm>
-            <a:off x="0" y="0"/>
-            <a:ext cx="12192000" cy="6858000"/>
-          </a:xfrm>
-          <a:prstGeom prst="rect">
-            <a:avLst/>
-          </a:prstGeom>
-          <a:gradFill rotWithShape="1">
-            <a:gsLst>
-              <a:gs pos="0">
-                <a:srgbClr val="162E4D"/>
-              </a:gs>
-              <a:gs pos="100000">
-                <a:srgbClr val="2D5C8F"/>
-              </a:gs>
-            </a:gsLst>
-            <a:lin scaled="0" ang="0"/>
-          </a:gradFill>
-          <a:ln>
-            <a:noFill/>
-          </a:ln>
-          <a:effectLst/>
-        </p:spPr>
-        <p:style>
-          <a:lnRef idx="1">
-            <a:schemeClr val="accent1"/>
-          </a:lnRef>
-          <a:fillRef idx="3">
-            <a:schemeClr val="accent1"/>
-          </a:fillRef>
-          <a:effectRef idx="2">
-            <a:schemeClr val="accent1"/>
-          </a:effectRef>
-          <a:fontRef idx="minor">
-            <a:schemeClr val="lt1"/>
-          </a:fontRef>
-        </p:style>
-        <p:txBody>
-          <a:bodyPr rtlCol="0" anchor="ctr"/>
-          <a:lstStyle/>
-          <a:p>
-            <a:pPr algn="ctr"/>
-          </a:p>
-        </p:txBody>
-      </p:sp>
-      <p:pic>
-        <p:nvPicPr>
-          <p:cNvPr id="3" name="Picture 2" descr="ee6289259cc57ea0.jpg"/>
-          <p:cNvPicPr>
-            <a:picLocks noChangeAspect="1"/>
-          </p:cNvPicPr>
-          <p:nvPr/>
-        </p:nvPicPr>
-        <p:blipFill>
-          <a:blip r:embed="rId2"/>
-          <a:srcRect l="30669" r="30669"/>
-          <a:stretch>
-            <a:fillRect/>
-          </a:stretch>
-        </p:blipFill>
-        <p:spPr>
-          <a:xfrm>
-            <a:off x="6300000" y="0"/>
-            <a:ext cx="5892000" cy="6858000"/>
-          </a:xfrm>
-          <a:prstGeom prst="rect">
-            <a:avLst/>
-          </a:prstGeom>
-        </p:spPr>
-      </p:pic>
-      <p:sp>
-        <p:nvSpPr>
-          <p:cNvPr id="4" name="Rectangle 3"/>
-          <p:cNvSpPr/>
-          <p:nvPr/>
-        </p:nvSpPr>
-        <p:spPr>
-          <a:xfrm>
-            <a:off x="6300000" y="6558000"/>
-            <a:ext cx="5892000" cy="300000"/>
-          </a:xfrm>
-          <a:prstGeom prst="rect">
-            <a:avLst/>
-          </a:prstGeom>
-          <a:solidFill>
-            <a:srgbClr val="0B1626"/>
-          </a:solidFill>
-          <a:ln>
-            <a:noFill/>
-          </a:ln>
-          <a:effectLst/>
-        </p:spPr>
-        <p:style>
-          <a:lnRef idx="1">
-            <a:schemeClr val="accent1"/>
-          </a:lnRef>
-          <a:fillRef idx="3">
-            <a:schemeClr val="accent1"/>
-          </a:fillRef>
-          <a:effectRef idx="2">
-            <a:schemeClr val="accent1"/>
-          </a:effectRef>
-          <a:fontRef idx="minor">
-            <a:schemeClr val="lt1"/>
-          </a:fontRef>
-        </p:style>
-        <p:txBody>
-          <a:bodyPr rtlCol="0" anchor="ctr"/>
-          <a:lstStyle/>
-          <a:p>
-            <a:pPr algn="ctr"/>
-          </a:p>
-        </p:txBody>
-      </p:sp>
-      <p:sp>
-        <p:nvSpPr>
-          <p:cNvPr id="5" name="TextBox 4"/>
-          <p:cNvSpPr txBox="1"/>
-          <p:nvPr/>
-        </p:nvSpPr>
-        <p:spPr>
-          <a:xfrm>
-            <a:off x="6380000" y="6558000"/>
-            <a:ext cx="5732000" cy="300000"/>
-          </a:xfrm>
-          <a:prstGeom prst="rect">
-            <a:avLst/>
-          </a:prstGeom>
-          <a:noFill/>
-        </p:spPr>
-        <p:txBody>
-          <a:bodyPr wrap="square" anchor="ctr" lIns="50800" rIns="50800">
-            <a:spAutoFit/>
-          </a:bodyPr>
-          <a:lstStyle/>
-          <a:p>
-            <a:pPr algn="l"/>
-            <a:r>
-              <a:rPr sz="900" b="0">
-                <a:solidFill>
-                  <a:srgbClr val="D7E3F4"/>
-                </a:solidFill>
-                <a:latin typeface="Calibri"/>
-              </a:rPr>
-              <a:t>Rasm: Julian Herzog (Website) · Wikimedia Commons · CC BY 4.0</a:t>
-            </a:r>
-          </a:p>
-        </p:txBody>
-      </p:sp>
-      <p:sp>
-        <p:nvSpPr>
-          <p:cNvPr id="6" name="Rectangle 5"/>
-          <p:cNvSpPr/>
-          <p:nvPr/>
-        </p:nvSpPr>
-        <p:spPr>
-          <a:xfrm>
-            <a:off x="6240000" y="0"/>
-            <a:ext cx="60000" cy="6858000"/>
-          </a:xfrm>
-          <a:prstGeom prst="rect">
-            <a:avLst/>
-          </a:prstGeom>
-          <a:solidFill>
-            <a:srgbClr val="0F8B8D"/>
-          </a:solidFill>
-          <a:ln>
-            <a:noFill/>
-          </a:ln>
-          <a:effectLst/>
-        </p:spPr>
-        <p:style>
-          <a:lnRef idx="1">
-            <a:schemeClr val="accent1"/>
-          </a:lnRef>
-          <a:fillRef idx="3">
-            <a:schemeClr val="accent1"/>
-          </a:fillRef>
-          <a:effectRef idx="2">
-            <a:schemeClr val="accent1"/>
-          </a:effectRef>
-          <a:fontRef idx="minor">
-            <a:schemeClr val="lt1"/>
-          </a:fontRef>
-        </p:style>
-        <p:txBody>
-          <a:bodyPr rtlCol="0" anchor="ctr"/>
-          <a:lstStyle/>
-          <a:p>
-            <a:pPr algn="ctr"/>
-          </a:p>
-        </p:txBody>
-      </p:sp>
-      <p:sp>
-        <p:nvSpPr>
-          <p:cNvPr id="7" name="Oval 6"/>
-          <p:cNvSpPr/>
-          <p:nvPr/>
-        </p:nvSpPr>
-        <p:spPr>
-          <a:xfrm>
-            <a:off x="800000" y="900000"/>
-            <a:ext cx="2300000" cy="2300000"/>
-          </a:xfrm>
-          <a:prstGeom prst="ellipse">
-            <a:avLst/>
-          </a:prstGeom>
-          <a:noFill/>
-          <a:ln w="76200">
-            <a:solidFill>
-              <a:srgbClr val="7FD6D7"/>
-            </a:solidFill>
-          </a:ln>
-          <a:effectLst/>
-        </p:spPr>
-        <p:style>
-          <a:lnRef idx="1">
-            <a:schemeClr val="accent1"/>
-          </a:lnRef>
-          <a:fillRef idx="3">
-            <a:schemeClr val="accent1"/>
-          </a:fillRef>
-          <a:effectRef idx="2">
-            <a:schemeClr val="accent1"/>
-          </a:effectRef>
-          <a:fontRef idx="minor">
-            <a:schemeClr val="lt1"/>
-          </a:fontRef>
-        </p:style>
-        <p:txBody>
-          <a:bodyPr rtlCol="0" anchor="ctr"/>
-          <a:lstStyle/>
-          <a:p>
-            <a:pPr algn="ctr"/>
-          </a:p>
-        </p:txBody>
-      </p:sp>
-      <p:sp>
-        <p:nvSpPr>
-          <p:cNvPr id="8" name="TextBox 7"/>
-          <p:cNvSpPr txBox="1"/>
-          <p:nvPr/>
-        </p:nvSpPr>
-        <p:spPr>
-          <a:xfrm>
-            <a:off x="800000" y="900000"/>
-            <a:ext cx="2300000" cy="2300000"/>
-          </a:xfrm>
-          <a:prstGeom prst="rect">
-            <a:avLst/>
-          </a:prstGeom>
-          <a:noFill/>
-        </p:spPr>
-        <p:txBody>
-          <a:bodyPr wrap="square" anchor="ctr" lIns="50800" rIns="50800">
-            <a:spAutoFit/>
-          </a:bodyPr>
-          <a:lstStyle/>
-          <a:p>
-            <a:pPr algn="ctr"/>
-            <a:r>
-              <a:rPr sz="6400" b="1">
-                <a:solidFill>
-                  <a:srgbClr val="FFFFFF"/>
-                </a:solidFill>
-                <a:latin typeface="Calibri"/>
-              </a:rPr>
-              <a:t>07</a:t>
-            </a:r>
-          </a:p>
-        </p:txBody>
-      </p:sp>
-      <p:sp>
-        <p:nvSpPr>
-          <p:cNvPr id="9" name="TextBox 8"/>
-          <p:cNvSpPr txBox="1"/>
-          <p:nvPr/>
-        </p:nvSpPr>
-        <p:spPr>
-          <a:xfrm>
-            <a:off x="800000" y="3500000"/>
-            <a:ext cx="5200000" cy="1600000"/>
-          </a:xfrm>
-          <a:prstGeom prst="rect">
-            <a:avLst/>
-          </a:prstGeom>
-          <a:noFill/>
-        </p:spPr>
-        <p:txBody>
-          <a:bodyPr wrap="square" anchor="t" lIns="50800" rIns="50800">
-            <a:spAutoFit/>
-          </a:bodyPr>
-          <a:lstStyle/>
-          <a:p>
-            <a:pPr algn="l"/>
-            <a:r>
-              <a:rPr sz="2400" b="1">
-                <a:solidFill>
-                  <a:srgbClr val="FFFFFF"/>
-                </a:solidFill>
-                <a:latin typeface="Calibri"/>
-              </a:rPr>
-              <a:t>Taqsimlangan AI hisoblash muhitlari va yuqori unumdor tizimlarni tashkil etish</a:t>
-            </a:r>
-          </a:p>
-        </p:txBody>
-      </p:sp>
-      <p:sp>
-        <p:nvSpPr>
-          <p:cNvPr id="10" name="Rectangle 9"/>
-          <p:cNvSpPr/>
-          <p:nvPr/>
-        </p:nvSpPr>
-        <p:spPr>
-          <a:xfrm>
-            <a:off x="850000" y="5200000"/>
-            <a:ext cx="2200000" cy="60000"/>
-          </a:xfrm>
-          <a:prstGeom prst="rect">
-            <a:avLst/>
-          </a:prstGeom>
-          <a:solidFill>
-            <a:srgbClr val="0F8B8D"/>
-          </a:solidFill>
-          <a:ln>
-            <a:noFill/>
-          </a:ln>
-          <a:effectLst/>
-        </p:spPr>
-        <p:style>
-          <a:lnRef idx="1">
-            <a:schemeClr val="accent1"/>
-          </a:lnRef>
-          <a:fillRef idx="3">
-            <a:schemeClr val="accent1"/>
-          </a:fillRef>
-          <a:effectRef idx="2">
-            <a:schemeClr val="accent1"/>
-          </a:effectRef>
-          <a:fontRef idx="minor">
-            <a:schemeClr val="lt1"/>
-          </a:fontRef>
-        </p:style>
-        <p:txBody>
-          <a:bodyPr rtlCol="0" anchor="ctr"/>
-          <a:lstStyle/>
-          <a:p>
-            <a:pPr algn="ctr"/>
-          </a:p>
-        </p:txBody>
-      </p:sp>
-    </p:spTree>
-  </p:cSld>
-  <p:clrMapOvr>
-    <a:masterClrMapping/>
-  </p:clrMapOvr>
-  <p:transition spd="med">
-    <p:push dir="u"/>
-  </p:transition>
-  <p:timing>
-    <p:tnLst>
-      <p:par>
-        <p:cTn id="1" dur="indefinite" restart="never" nodeType="tmRoot">
-          <p:childTnLst>
-            <p:seq concurrent="1" nextAc="seek">
-              <p:cTn id="2" dur="indefinite" nodeType="mainSeq">
-                <p:childTnLst>
-                  <p:par>
-                    <p:cTn id="43" fill="hold">
-                      <p:stCondLst>
-                        <p:cond delay="indefinite"/>
-                        <p:cond evt="onBegin" delay="0">
-                          <p:tn val="2"/>
-                        </p:cond>
-                      </p:stCondLst>
-                      <p:childTnLst>
-                        <p:par>
-                          <p:cTn id="3" fill="hold">
-                            <p:stCondLst>
-                              <p:cond delay="0"/>
-                            </p:stCondLst>
-                            <p:childTnLst>
-                              <p:par>
-                                <p:cTn id="4" presetID="10" presetClass="entr" presetSubtype="0" fill="hold" grpId="0" nodeType="withEffect">
-                                  <p:stCondLst>
-                                    <p:cond delay="0"/>
-                                  </p:stCondLst>
-                                  <p:childTnLst>
-                                    <p:set>
-                                      <p:cBhvr>
-                                        <p:cTn id="5" dur="1" fill="hold">
-                                          <p:stCondLst>
-                                            <p:cond delay="0"/>
-                                          </p:stCondLst>
-                                        </p:cTn>
-                                        <p:tgtEl>
-                                          <p:spTgt spid="3"/>
-                                        </p:tgtEl>
-                                        <p:attrNameLst>
-                                          <p:attrName>style.visibility</p:attrName>
-                                        </p:attrNameLst>
-                                      </p:cBhvr>
-                                      <p:to>
-                                        <p:strVal val="visible"/>
-                                      </p:to>
-                                    </p:set>
-                                    <p:animEffect transition="in" filter="fade">
-                                      <p:cBhvr>
-                                        <p:cTn id="6" dur="550"/>
-                                        <p:tgtEl>
-                                          <p:spTgt spid="3"/>
-                                        </p:tgtEl>
-                                      </p:cBhvr>
-                                    </p:animEffect>
-                                  </p:childTnLst>
-                                </p:cTn>
-                              </p:par>
-                            </p:childTnLst>
-                          </p:cTn>
-                        </p:par>
-                        <p:par>
-                          <p:cTn id="7" fill="hold">
-                            <p:stCondLst>
-                              <p:cond delay="0"/>
-                            </p:stCondLst>
-                            <p:childTnLst>
-                              <p:par>
-                                <p:cTn id="8" presetID="22" presetClass="entr" presetSubtype="8" fill="hold" grpId="0" nodeType="afterEffect">
-                                  <p:stCondLst>
-                                    <p:cond delay="0"/>
-                                  </p:stCondLst>
-                                  <p:childTnLst>
-                                    <p:set>
-                                      <p:cBhvr>
-                                        <p:cTn id="9" dur="1" fill="hold">
-                                          <p:stCondLst>
-                                            <p:cond delay="0"/>
-                                          </p:stCondLst>
-                                        </p:cTn>
-                                        <p:tgtEl>
-                                          <p:spTgt spid="6"/>
-                                        </p:tgtEl>
-                                        <p:attrNameLst>
-                                          <p:attrName>style.visibility</p:attrName>
-                                        </p:attrNameLst>
-                                      </p:cBhvr>
-                                      <p:to>
-                                        <p:strVal val="visible"/>
-                                      </p:to>
-                                    </p:set>
-                                    <p:animEffect transition="in" filter="wipe(left)">
-                                      <p:cBhvr>
-                                        <p:cTn id="11" dur="800"/>
-                                        <p:tgtEl>
-                                          <p:spTgt spid="6"/>
-                                        </p:tgtEl>
-                                      </p:cBhvr>
-                                    </p:animEffect>
-                                  </p:childTnLst>
-                                </p:cTn>
-                              </p:par>
-                            </p:childTnLst>
-                          </p:cTn>
-                        </p:par>
-                        <p:par>
-                          <p:cTn id="12" fill="hold">
-                            <p:stCondLst>
-                              <p:cond delay="0"/>
-                            </p:stCondLst>
-                            <p:childTnLst>
-                              <p:par>
-                                <p:cTn id="13" presetID="10" presetClass="entr" presetSubtype="0" fill="hold" grpId="0" nodeType="afterEffect">
-                                  <p:stCondLst>
-                                    <p:cond delay="0"/>
-                                  </p:stCondLst>
-                                  <p:childTnLst>
-                                    <p:set>
-                                      <p:cBhvr>
-                                        <p:cTn id="14" dur="1" fill="hold">
-                                          <p:stCondLst>
-                                            <p:cond delay="0"/>
-                                          </p:stCondLst>
-                                        </p:cTn>
-                                        <p:tgtEl>
-                                          <p:spTgt spid="4"/>
-                                        </p:tgtEl>
-                                        <p:attrNameLst>
-                                          <p:attrName>style.visibility</p:attrName>
-                                        </p:attrNameLst>
-                                      </p:cBhvr>
-                                      <p:to>
-                                        <p:strVal val="visible"/>
-                                      </p:to>
-                                    </p:set>
-                                    <p:animEffect transition="in" filter="fade">
-                                      <p:cBhvr>
-                                        <p:cTn id="15" dur="550"/>
-                                        <p:tgtEl>
-                                          <p:spTgt spid="4"/>
-                                        </p:tgtEl>
-                                      </p:cBhvr>
-                                    </p:animEffect>
-                                  </p:childTnLst>
-                                </p:cTn>
-                              </p:par>
-                            </p:childTnLst>
-                          </p:cTn>
-                        </p:par>
-                        <p:par>
-                          <p:cTn id="16" fill="hold">
-                            <p:stCondLst>
-                              <p:cond delay="0"/>
-                            </p:stCondLst>
-                            <p:childTnLst>
-                              <p:par>
-                                <p:cTn id="17" presetID="10" presetClass="entr" presetSubtype="0" fill="hold" grpId="0" nodeType="afterEffect">
-                                  <p:stCondLst>
-                                    <p:cond delay="0"/>
-                                  </p:stCondLst>
-                                  <p:childTnLst>
-                                    <p:set>
-                                      <p:cBhvr>
-                                        <p:cTn id="18" dur="1" fill="hold">
-                                          <p:stCondLst>
-                                            <p:cond delay="0"/>
-                                          </p:stCondLst>
-                                        </p:cTn>
-                                        <p:tgtEl>
-                                          <p:spTgt spid="5"/>
-                                        </p:tgtEl>
-                                        <p:attrNameLst>
-                                          <p:attrName>style.visibility</p:attrName>
-                                        </p:attrNameLst>
-                                      </p:cBhvr>
-                                      <p:to>
-                                        <p:strVal val="visible"/>
-                                      </p:to>
-                                    </p:set>
-                                    <p:animEffect transition="in" filter="fade">
-                                      <p:cBhvr>
-                                        <p:cTn id="19" dur="550"/>
-                                        <p:tgtEl>
-                                          <p:spTgt spid="5"/>
-                                        </p:tgtEl>
-                                      </p:cBhvr>
-                                    </p:animEffect>
-                                  </p:childTnLst>
-                                </p:cTn>
-                              </p:par>
-                            </p:childTnLst>
-                          </p:cTn>
-                        </p:par>
-                        <p:par>
-                          <p:cTn id="20" fill="hold">
-                            <p:stCondLst>
-                              <p:cond delay="200"/>
-                            </p:stCondLst>
-                            <p:childTnLst>
-                              <p:par>
-                                <p:cTn id="21" presetID="53" presetClass="entr" presetSubtype="16" fill="hold" grpId="0" nodeType="afterEffect">
-                                  <p:stCondLst>
-                                    <p:cond delay="0"/>
-                                  </p:stCondLst>
-                                  <p:childTnLst>
-                                    <p:set>
-                                      <p:cBhvr>
-                                        <p:cTn id="22" dur="1" fill="hold">
-                                          <p:stCondLst>
-                                            <p:cond delay="0"/>
-                                          </p:stCondLst>
-                                        </p:cTn>
-                                        <p:tgtEl>
-                                          <p:spTgt spid="7"/>
-                                        </p:tgtEl>
-                                        <p:attrNameLst>
-                                          <p:attrName>style.visibility</p:attrName>
-                                        </p:attrNameLst>
-                                      </p:cBhvr>
-                                      <p:to>
-                                        <p:strVal val="visible"/>
-                                      </p:to>
-                                    </p:set>
-                                    <p:animEffect transition="in" filter="fade">
-                                      <p:cBhvr>
-                                        <p:cTn id="23" dur="550"/>
-                                        <p:tgtEl>
-                                          <p:spTgt spid="7"/>
-                                        </p:tgtEl>
-                                      </p:cBhvr>
-                                    </p:animEffect>
-                                    <p:anim calcmode="lin" valueType="num">
-                                      <p:cBhvr additive="base">
-                                        <p:cTn id="24" dur="550" fill="hold"/>
-                                        <p:tgtEl>
-                                          <p:spTgt spid="7"/>
-                                        </p:tgtEl>
-                                        <p:attrNameLst>
-                                          <p:attrName>ppt_w</p:attrName>
-                                        </p:attrNameLst>
-                                      </p:cBhvr>
-                                      <p:tavLst>
-                                        <p:tav tm="0">
-                                          <p:val>
-                                            <p:strVal val="0"/>
-                                          </p:val>
-                                        </p:tav>
-                                        <p:tav tm="100000">
-                                          <p:val>
-                                            <p:strVal val="#ppt_w"/>
-                                          </p:val>
-                                        </p:tav>
-                                      </p:tavLst>
-                                    </p:anim>
-                                    <p:anim calcmode="lin" valueType="num">
-                                      <p:cBhvr additive="base">
-                                        <p:cTn id="25" dur="550" fill="hold"/>
-                                        <p:tgtEl>
-                                          <p:spTgt spid="7"/>
-                                        </p:tgtEl>
-                                        <p:attrNameLst>
-                                          <p:attrName>ppt_h</p:attrName>
-                                        </p:attrNameLst>
-                                      </p:cBhvr>
-                                      <p:tavLst>
-                                        <p:tav tm="0">
-                                          <p:val>
-                                            <p:strVal val="0"/>
-                                          </p:val>
-                                        </p:tav>
-                                        <p:tav tm="100000">
-                                          <p:val>
-                                            <p:strVal val="#ppt_h"/>
-                                          </p:val>
-                                        </p:tav>
-                                      </p:tavLst>
-                                    </p:anim>
-                                  </p:childTnLst>
-                                </p:cTn>
-                              </p:par>
-                            </p:childTnLst>
-                          </p:cTn>
-                        </p:par>
-                        <p:par>
-                          <p:cTn id="26" fill="hold">
-                            <p:stCondLst>
-                              <p:cond delay="300"/>
-                            </p:stCondLst>
-                            <p:childTnLst>
-                              <p:par>
-                                <p:cTn id="27" presetID="53" presetClass="entr" presetSubtype="16" fill="hold" grpId="0" nodeType="afterEffect">
-                                  <p:stCondLst>
-                                    <p:cond delay="0"/>
-                                  </p:stCondLst>
-                                  <p:childTnLst>
-                                    <p:set>
-                                      <p:cBhvr>
-                                        <p:cTn id="28" dur="1" fill="hold">
-                                          <p:stCondLst>
-                                            <p:cond delay="0"/>
-                                          </p:stCondLst>
-                                        </p:cTn>
-                                        <p:tgtEl>
-                                          <p:spTgt spid="8"/>
-                                        </p:tgtEl>
-                                        <p:attrNameLst>
-                                          <p:attrName>style.visibility</p:attrName>
-                                        </p:attrNameLst>
-                                      </p:cBhvr>
-                                      <p:to>
-                                        <p:strVal val="visible"/>
-                                      </p:to>
-                                    </p:set>
-                                    <p:animEffect transition="in" filter="fade">
-                                      <p:cBhvr>
-                                        <p:cTn id="29" dur="550"/>
-                                        <p:tgtEl>
-                                          <p:spTgt spid="8"/>
-                                        </p:tgtEl>
-                                      </p:cBhvr>
-                                    </p:animEffect>
-                                    <p:anim calcmode="lin" valueType="num">
-                                      <p:cBhvr additive="base">
-                                        <p:cTn id="30" dur="550" fill="hold"/>
-                                        <p:tgtEl>
-                                          <p:spTgt spid="8"/>
-                                        </p:tgtEl>
-                                        <p:attrNameLst>
-                                          <p:attrName>ppt_w</p:attrName>
-                                        </p:attrNameLst>
-                                      </p:cBhvr>
-                                      <p:tavLst>
-                                        <p:tav tm="0">
-                                          <p:val>
-                                            <p:strVal val="0"/>
-                                          </p:val>
-                                        </p:tav>
-                                        <p:tav tm="100000">
-                                          <p:val>
-                                            <p:strVal val="#ppt_w"/>
-                                          </p:val>
-                                        </p:tav>
-                                      </p:tavLst>
-                                    </p:anim>
-                                    <p:anim calcmode="lin" valueType="num">
-                                      <p:cBhvr additive="base">
-                                        <p:cTn id="31" dur="550" fill="hold"/>
-                                        <p:tgtEl>
-                                          <p:spTgt spid="8"/>
-                                        </p:tgtEl>
-                                        <p:attrNameLst>
-                                          <p:attrName>ppt_h</p:attrName>
-                                        </p:attrNameLst>
-                                      </p:cBhvr>
-                                      <p:tavLst>
-                                        <p:tav tm="0">
-                                          <p:val>
-                                            <p:strVal val="0"/>
-                                          </p:val>
-                                        </p:tav>
-                                        <p:tav tm="100000">
-                                          <p:val>
-                                            <p:strVal val="#ppt_h"/>
-                                          </p:val>
-                                        </p:tav>
-                                      </p:tavLst>
-                                    </p:anim>
-                                  </p:childTnLst>
-                                </p:cTn>
-                              </p:par>
-                            </p:childTnLst>
-                          </p:cTn>
-                        </p:par>
-                        <p:par>
-                          <p:cTn id="32" fill="hold">
-                            <p:stCondLst>
-                              <p:cond delay="450"/>
-                            </p:stCondLst>
-                            <p:childTnLst>
-                              <p:par>
-                                <p:cTn id="33" presetID="2" presetClass="entr" presetSubtype="8" fill="hold" grpId="0" nodeType="afterEffect">
-                                  <p:stCondLst>
-                                    <p:cond delay="0"/>
-                                  </p:stCondLst>
-                                  <p:childTnLst>
-                                    <p:set>
-                                      <p:cBhvr>
-                                        <p:cTn id="34" dur="1" fill="hold">
-                                          <p:stCondLst>
-                                            <p:cond delay="0"/>
-                                          </p:stCondLst>
-                                        </p:cTn>
-                                        <p:tgtEl>
-                                          <p:spTgt spid="9"/>
-                                        </p:tgtEl>
-                                        <p:attrNameLst>
-                                          <p:attrName>style.visibility</p:attrName>
-                                        </p:attrNameLst>
-                                      </p:cBhvr>
-                                      <p:to>
-                                        <p:strVal val="visible"/>
-                                      </p:to>
-                                    </p:set>
-                                    <p:anim calcmode="lin" valueType="num">
-                                      <p:cBhvr additive="base">
-                                        <p:cTn id="36" dur="550" fill="hold"/>
-                                        <p:tgtEl>
-                                          <p:spTgt spid="9"/>
-                                        </p:tgtEl>
-                                        <p:attrNameLst>
-                                          <p:attrName>ppt_x</p:attrName>
-                                        </p:attrNameLst>
-                                      </p:cBhvr>
-                                      <p:tavLst>
-                                        <p:tav tm="0">
-                                          <p:val>
-                                            <p:strVal val="0-#ppt_w/2"/>
-                                          </p:val>
-                                        </p:tav>
-                                        <p:tav tm="100000">
-                                          <p:val>
-                                            <p:strVal val="#ppt_x"/>
-                                          </p:val>
-                                        </p:tav>
-                                      </p:tavLst>
-                                    </p:anim>
-                                    <p:anim calcmode="lin" valueType="num">
-                                      <p:cBhvr additive="base">
-                                        <p:cTn id="37" dur="550" fill="hold"/>
-                                        <p:tgtEl>
-                                          <p:spTgt spid="9"/>
-                                        </p:tgtEl>
-                                        <p:attrNameLst>
-                                          <p:attrName>ppt_y</p:attrName>
-                                        </p:attrNameLst>
-                                      </p:cBhvr>
-                                      <p:tavLst>
-                                        <p:tav tm="0">
-                                          <p:val>
-                                            <p:strVal val="#ppt_y"/>
-                                          </p:val>
-                                        </p:tav>
-                                        <p:tav tm="100000">
-                                          <p:val>
-                                            <p:strVal val="#ppt_y"/>
-                                          </p:val>
-                                        </p:tav>
-                                      </p:tavLst>
-                                    </p:anim>
-                                  </p:childTnLst>
-                                </p:cTn>
-                              </p:par>
-                            </p:childTnLst>
-                          </p:cTn>
-                        </p:par>
-                        <p:par>
-                          <p:cTn id="38" fill="hold">
-                            <p:stCondLst>
-                              <p:cond delay="550"/>
-                            </p:stCondLst>
-                            <p:childTnLst>
-                              <p:par>
-                                <p:cTn id="39" presetID="22" presetClass="entr" presetSubtype="8" fill="hold" grpId="0" nodeType="afterEffect">
-                                  <p:stCondLst>
-                                    <p:cond delay="0"/>
-                                  </p:stCondLst>
-                                  <p:childTnLst>
-                                    <p:set>
-                                      <p:cBhvr>
-                                        <p:cTn id="40" dur="1" fill="hold">
-                                          <p:stCondLst>
-                                            <p:cond delay="0"/>
-                                          </p:stCondLst>
-                                        </p:cTn>
-                                        <p:tgtEl>
-                                          <p:spTgt spid="10"/>
-                                        </p:tgtEl>
-                                        <p:attrNameLst>
-                                          <p:attrName>style.visibility</p:attrName>
-                                        </p:attrNameLst>
-                                      </p:cBhvr>
-                                      <p:to>
-                                        <p:strVal val="visible"/>
-                                      </p:to>
-                                    </p:set>
-                                    <p:animEffect transition="in" filter="wipe(left)">
-                                      <p:cBhvr>
-                                        <p:cTn id="42" dur="800"/>
-                                        <p:tgtEl>
-                                          <p:spTgt spid="10"/>
-                                        </p:tgtEl>
-                                      </p:cBhvr>
-                                    </p:animEffect>
-                                  </p:childTnLst>
-                                </p:cTn>
-                              </p:par>
-                            </p:childTnLst>
-                          </p:cTn>
-                        </p:par>
-                      </p:childTnLst>
-                    </p:cTn>
-                  </p:par>
-                </p:childTnLst>
-              </p:cTn>
-              <p:prevCondLst>
-                <p:cond evt="onPrev" delay="0">
-                  <p:tgtEl>
-                    <p:sldTgt/>
-                  </p:tgtEl>
-                </p:cond>
-              </p:prevCondLst>
-              <p:nextCondLst>
-                <p:cond evt="onNext" delay="0">
-                  <p:tgtEl>
-                    <p:sldTgt/>
-                  </p:tgtEl>
-                </p:cond>
-              </p:nextCondLst>
-            </p:seq>
-          </p:childTnLst>
-        </p:cTn>
-      </p:par>
-    </p:tnLst>
-    <p:bldLst>
-      <p:bldP spid="6" grpId="0" animBg="1"/>
-      <p:bldP spid="4" grpId="0" animBg="1"/>
-      <p:bldP spid="5" grpId="0" animBg="1"/>
-      <p:bldP spid="7" grpId="0" animBg="1"/>
-      <p:bldP spid="8" grpId="0" animBg="1"/>
-      <p:bldP spid="9" grpId="0" animBg="1"/>
-      <p:bldP spid="10" grpId="0" animBg="1"/>
-    </p:bldLst>
-  </p:timing>
-</p:sld>
-</file>
-
 <file path=ppt/slides/slide2.xml><?xml version="1.0" encoding="utf-8"?>
 <p:sld xmlns:a="http://schemas.openxmlformats.org/drawingml/2006/main" xmlns:p="http://schemas.openxmlformats.org/presentationml/2006/main" xmlns:r="http://schemas.openxmlformats.org/officeDocument/2006/relationships">
   <p:cSld>
@@ -19558,8 +20385,8 @@
         </p:nvSpPr>
         <p:spPr>
           <a:xfrm>
-            <a:off x="550000" y="1300001"/>
-            <a:ext cx="11100000" cy="604285"/>
+            <a:off x="550000" y="1625000"/>
+            <a:ext cx="11100000" cy="520000"/>
           </a:xfrm>
           <a:prstGeom prst="roundRect">
             <a:avLst>
@@ -19604,8 +20431,8 @@
         </p:nvSpPr>
         <p:spPr>
           <a:xfrm>
-            <a:off x="550000" y="1300001"/>
-            <a:ext cx="70000" cy="604285"/>
+            <a:off x="550000" y="1625000"/>
+            <a:ext cx="70000" cy="520000"/>
           </a:xfrm>
           <a:prstGeom prst="rect">
             <a:avLst/>
@@ -19648,8 +20475,8 @@
         </p:nvSpPr>
         <p:spPr>
           <a:xfrm>
-            <a:off x="800000" y="1372143"/>
-            <a:ext cx="460000" cy="460000"/>
+            <a:off x="780000" y="1695000"/>
+            <a:ext cx="380000" cy="380000"/>
           </a:xfrm>
           <a:prstGeom prst="ellipse">
             <a:avLst/>
@@ -19682,7 +20509,7 @@
           <a:p>
             <a:pPr algn="ctr"/>
             <a:r>
-              <a:rPr sz="1600" b="1">
+              <a:rPr sz="1400" b="1">
                 <a:solidFill>
                   <a:srgbClr val="FFFFFF"/>
                 </a:solidFill>
@@ -19701,8 +20528,8 @@
         </p:nvSpPr>
         <p:spPr>
           <a:xfrm>
-            <a:off x="1450000" y="1300001"/>
-            <a:ext cx="10050000" cy="604285"/>
+            <a:off x="1380000" y="1665000"/>
+            <a:ext cx="10150000" cy="440000"/>
           </a:xfrm>
           <a:prstGeom prst="rect">
             <a:avLst/>
@@ -19710,14 +20537,13 @@
           <a:noFill/>
         </p:spPr>
         <p:txBody>
-          <a:bodyPr wrap="square" anchor="ctr" lIns="50800" rIns="50800">
+          <a:bodyPr wrap="square" anchor="ctr">
             <a:spAutoFit/>
           </a:bodyPr>
           <a:lstStyle/>
           <a:p>
-            <a:pPr algn="l"/>
             <a:r>
-              <a:rPr sz="1900" b="0">
+              <a:rPr sz="1600" b="0">
                 <a:solidFill>
                   <a:srgbClr val="1B2430"/>
                 </a:solidFill>
@@ -19736,8 +20562,8 @@
         </p:nvSpPr>
         <p:spPr>
           <a:xfrm>
-            <a:off x="550000" y="2024286"/>
-            <a:ext cx="11100000" cy="604285"/>
+            <a:off x="550000" y="2255000"/>
+            <a:ext cx="11100000" cy="520000"/>
           </a:xfrm>
           <a:prstGeom prst="roundRect">
             <a:avLst>
@@ -19782,8 +20608,8 @@
         </p:nvSpPr>
         <p:spPr>
           <a:xfrm>
-            <a:off x="550000" y="2024286"/>
-            <a:ext cx="70000" cy="604285"/>
+            <a:off x="550000" y="2255000"/>
+            <a:ext cx="70000" cy="520000"/>
           </a:xfrm>
           <a:prstGeom prst="rect">
             <a:avLst/>
@@ -19826,8 +20652,8 @@
         </p:nvSpPr>
         <p:spPr>
           <a:xfrm>
-            <a:off x="800000" y="2096428"/>
-            <a:ext cx="460000" cy="460000"/>
+            <a:off x="780000" y="2325000"/>
+            <a:ext cx="380000" cy="380000"/>
           </a:xfrm>
           <a:prstGeom prst="ellipse">
             <a:avLst/>
@@ -19860,7 +20686,7 @@
           <a:p>
             <a:pPr algn="ctr"/>
             <a:r>
-              <a:rPr sz="1600" b="1">
+              <a:rPr sz="1400" b="1">
                 <a:solidFill>
                   <a:srgbClr val="FFFFFF"/>
                 </a:solidFill>
@@ -19879,8 +20705,8 @@
         </p:nvSpPr>
         <p:spPr>
           <a:xfrm>
-            <a:off x="1450000" y="2024286"/>
-            <a:ext cx="10050000" cy="604285"/>
+            <a:off x="1380000" y="2295000"/>
+            <a:ext cx="10150000" cy="440000"/>
           </a:xfrm>
           <a:prstGeom prst="rect">
             <a:avLst/>
@@ -19888,14 +20714,13 @@
           <a:noFill/>
         </p:spPr>
         <p:txBody>
-          <a:bodyPr wrap="square" anchor="ctr" lIns="50800" rIns="50800">
+          <a:bodyPr wrap="square" anchor="ctr">
             <a:spAutoFit/>
           </a:bodyPr>
           <a:lstStyle/>
           <a:p>
-            <a:pPr algn="l"/>
             <a:r>
-              <a:rPr sz="1900" b="0">
+              <a:rPr sz="1600" b="0">
                 <a:solidFill>
                   <a:srgbClr val="1B2430"/>
                 </a:solidFill>
@@ -19914,8 +20739,8 @@
         </p:nvSpPr>
         <p:spPr>
           <a:xfrm>
-            <a:off x="550000" y="2748571"/>
-            <a:ext cx="11100000" cy="604285"/>
+            <a:off x="550000" y="2885000"/>
+            <a:ext cx="11100000" cy="520000"/>
           </a:xfrm>
           <a:prstGeom prst="roundRect">
             <a:avLst>
@@ -19960,8 +20785,8 @@
         </p:nvSpPr>
         <p:spPr>
           <a:xfrm>
-            <a:off x="550000" y="2748571"/>
-            <a:ext cx="70000" cy="604285"/>
+            <a:off x="550000" y="2885000"/>
+            <a:ext cx="70000" cy="520000"/>
           </a:xfrm>
           <a:prstGeom prst="rect">
             <a:avLst/>
@@ -20004,8 +20829,8 @@
         </p:nvSpPr>
         <p:spPr>
           <a:xfrm>
-            <a:off x="800000" y="2820713"/>
-            <a:ext cx="460000" cy="460000"/>
+            <a:off x="780000" y="2955000"/>
+            <a:ext cx="380000" cy="380000"/>
           </a:xfrm>
           <a:prstGeom prst="ellipse">
             <a:avLst/>
@@ -20038,7 +20863,7 @@
           <a:p>
             <a:pPr algn="ctr"/>
             <a:r>
-              <a:rPr sz="1600" b="1">
+              <a:rPr sz="1400" b="1">
                 <a:solidFill>
                   <a:srgbClr val="FFFFFF"/>
                 </a:solidFill>
@@ -20057,8 +20882,8 @@
         </p:nvSpPr>
         <p:spPr>
           <a:xfrm>
-            <a:off x="1450000" y="2748571"/>
-            <a:ext cx="10050000" cy="604285"/>
+            <a:off x="1380000" y="2925000"/>
+            <a:ext cx="10150000" cy="440000"/>
           </a:xfrm>
           <a:prstGeom prst="rect">
             <a:avLst/>
@@ -20066,14 +20891,13 @@
           <a:noFill/>
         </p:spPr>
         <p:txBody>
-          <a:bodyPr wrap="square" anchor="ctr" lIns="50800" rIns="50800">
+          <a:bodyPr wrap="square" anchor="ctr">
             <a:spAutoFit/>
           </a:bodyPr>
           <a:lstStyle/>
           <a:p>
-            <a:pPr algn="l"/>
             <a:r>
-              <a:rPr sz="1900" b="0">
+              <a:rPr sz="1600" b="0">
                 <a:solidFill>
                   <a:srgbClr val="1B2430"/>
                 </a:solidFill>
@@ -20092,8 +20916,8 @@
         </p:nvSpPr>
         <p:spPr>
           <a:xfrm>
-            <a:off x="550000" y="3472856"/>
-            <a:ext cx="11100000" cy="604285"/>
+            <a:off x="550000" y="3515000"/>
+            <a:ext cx="11100000" cy="520000"/>
           </a:xfrm>
           <a:prstGeom prst="roundRect">
             <a:avLst>
@@ -20138,8 +20962,8 @@
         </p:nvSpPr>
         <p:spPr>
           <a:xfrm>
-            <a:off x="550000" y="3472856"/>
-            <a:ext cx="70000" cy="604285"/>
+            <a:off x="550000" y="3515000"/>
+            <a:ext cx="70000" cy="520000"/>
           </a:xfrm>
           <a:prstGeom prst="rect">
             <a:avLst/>
@@ -20182,8 +21006,8 @@
         </p:nvSpPr>
         <p:spPr>
           <a:xfrm>
-            <a:off x="800000" y="3544998"/>
-            <a:ext cx="460000" cy="460000"/>
+            <a:off x="780000" y="3585000"/>
+            <a:ext cx="380000" cy="380000"/>
           </a:xfrm>
           <a:prstGeom prst="ellipse">
             <a:avLst/>
@@ -20216,7 +21040,7 @@
           <a:p>
             <a:pPr algn="ctr"/>
             <a:r>
-              <a:rPr sz="1600" b="1">
+              <a:rPr sz="1400" b="1">
                 <a:solidFill>
                   <a:srgbClr val="FFFFFF"/>
                 </a:solidFill>
@@ -20235,8 +21059,8 @@
         </p:nvSpPr>
         <p:spPr>
           <a:xfrm>
-            <a:off x="1450000" y="3472856"/>
-            <a:ext cx="10050000" cy="604285"/>
+            <a:off x="1380000" y="3555000"/>
+            <a:ext cx="10150000" cy="440000"/>
           </a:xfrm>
           <a:prstGeom prst="rect">
             <a:avLst/>
@@ -20244,14 +21068,13 @@
           <a:noFill/>
         </p:spPr>
         <p:txBody>
-          <a:bodyPr wrap="square" anchor="ctr" lIns="50800" rIns="50800">
+          <a:bodyPr wrap="square" anchor="ctr">
             <a:spAutoFit/>
           </a:bodyPr>
           <a:lstStyle/>
           <a:p>
-            <a:pPr algn="l"/>
             <a:r>
-              <a:rPr sz="1900" b="0">
+              <a:rPr sz="1600" b="0">
                 <a:solidFill>
                   <a:srgbClr val="1B2430"/>
                 </a:solidFill>
@@ -20270,8 +21093,8 @@
         </p:nvSpPr>
         <p:spPr>
           <a:xfrm>
-            <a:off x="550000" y="4197141"/>
-            <a:ext cx="11100000" cy="604285"/>
+            <a:off x="550000" y="4145000"/>
+            <a:ext cx="11100000" cy="520000"/>
           </a:xfrm>
           <a:prstGeom prst="roundRect">
             <a:avLst>
@@ -20316,8 +21139,8 @@
         </p:nvSpPr>
         <p:spPr>
           <a:xfrm>
-            <a:off x="550000" y="4197141"/>
-            <a:ext cx="70000" cy="604285"/>
+            <a:off x="550000" y="4145000"/>
+            <a:ext cx="70000" cy="520000"/>
           </a:xfrm>
           <a:prstGeom prst="rect">
             <a:avLst/>
@@ -20360,8 +21183,8 @@
         </p:nvSpPr>
         <p:spPr>
           <a:xfrm>
-            <a:off x="800000" y="4269283"/>
-            <a:ext cx="460000" cy="460000"/>
+            <a:off x="780000" y="4215000"/>
+            <a:ext cx="380000" cy="380000"/>
           </a:xfrm>
           <a:prstGeom prst="ellipse">
             <a:avLst/>
@@ -20394,7 +21217,7 @@
           <a:p>
             <a:pPr algn="ctr"/>
             <a:r>
-              <a:rPr sz="1600" b="1">
+              <a:rPr sz="1400" b="1">
                 <a:solidFill>
                   <a:srgbClr val="FFFFFF"/>
                 </a:solidFill>
@@ -20413,8 +21236,8 @@
         </p:nvSpPr>
         <p:spPr>
           <a:xfrm>
-            <a:off x="1450000" y="4197141"/>
-            <a:ext cx="10050000" cy="604285"/>
+            <a:off x="1380000" y="4185000"/>
+            <a:ext cx="10150000" cy="440000"/>
           </a:xfrm>
           <a:prstGeom prst="rect">
             <a:avLst/>
@@ -20422,14 +21245,13 @@
           <a:noFill/>
         </p:spPr>
         <p:txBody>
-          <a:bodyPr wrap="square" anchor="ctr" lIns="50800" rIns="50800">
+          <a:bodyPr wrap="square" anchor="ctr">
             <a:spAutoFit/>
           </a:bodyPr>
           <a:lstStyle/>
           <a:p>
-            <a:pPr algn="l"/>
             <a:r>
-              <a:rPr sz="1900" b="0">
+              <a:rPr sz="1600" b="0">
                 <a:solidFill>
                   <a:srgbClr val="1B2430"/>
                 </a:solidFill>
@@ -20448,8 +21270,8 @@
         </p:nvSpPr>
         <p:spPr>
           <a:xfrm>
-            <a:off x="550000" y="4921426"/>
-            <a:ext cx="11100000" cy="604285"/>
+            <a:off x="550000" y="4775000"/>
+            <a:ext cx="11100000" cy="520000"/>
           </a:xfrm>
           <a:prstGeom prst="roundRect">
             <a:avLst>
@@ -20494,8 +21316,8 @@
         </p:nvSpPr>
         <p:spPr>
           <a:xfrm>
-            <a:off x="550000" y="4921426"/>
-            <a:ext cx="70000" cy="604285"/>
+            <a:off x="550000" y="4775000"/>
+            <a:ext cx="70000" cy="520000"/>
           </a:xfrm>
           <a:prstGeom prst="rect">
             <a:avLst/>
@@ -20538,8 +21360,8 @@
         </p:nvSpPr>
         <p:spPr>
           <a:xfrm>
-            <a:off x="800000" y="4993568"/>
-            <a:ext cx="460000" cy="460000"/>
+            <a:off x="780000" y="4845000"/>
+            <a:ext cx="380000" cy="380000"/>
           </a:xfrm>
           <a:prstGeom prst="ellipse">
             <a:avLst/>
@@ -20572,7 +21394,7 @@
           <a:p>
             <a:pPr algn="ctr"/>
             <a:r>
-              <a:rPr sz="1600" b="1">
+              <a:rPr sz="1400" b="1">
                 <a:solidFill>
                   <a:srgbClr val="FFFFFF"/>
                 </a:solidFill>
@@ -20591,8 +21413,8 @@
         </p:nvSpPr>
         <p:spPr>
           <a:xfrm>
-            <a:off x="1450000" y="4921426"/>
-            <a:ext cx="10050000" cy="604285"/>
+            <a:off x="1380000" y="4815000"/>
+            <a:ext cx="10150000" cy="440000"/>
           </a:xfrm>
           <a:prstGeom prst="rect">
             <a:avLst/>
@@ -20600,14 +21422,13 @@
           <a:noFill/>
         </p:spPr>
         <p:txBody>
-          <a:bodyPr wrap="square" anchor="ctr" lIns="50800" rIns="50800">
+          <a:bodyPr wrap="square" anchor="ctr">
             <a:spAutoFit/>
           </a:bodyPr>
           <a:lstStyle/>
           <a:p>
-            <a:pPr algn="l"/>
             <a:r>
-              <a:rPr sz="1900" b="0">
+              <a:rPr sz="1600" b="0">
                 <a:solidFill>
                   <a:srgbClr val="1B2430"/>
                 </a:solidFill>
@@ -20626,8 +21447,8 @@
         </p:nvSpPr>
         <p:spPr>
           <a:xfrm>
-            <a:off x="550000" y="5645711"/>
-            <a:ext cx="11100000" cy="604285"/>
+            <a:off x="550000" y="5405000"/>
+            <a:ext cx="11100000" cy="520000"/>
           </a:xfrm>
           <a:prstGeom prst="roundRect">
             <a:avLst>
@@ -20672,8 +21493,8 @@
         </p:nvSpPr>
         <p:spPr>
           <a:xfrm>
-            <a:off x="550000" y="5645711"/>
-            <a:ext cx="70000" cy="604285"/>
+            <a:off x="550000" y="5405000"/>
+            <a:ext cx="70000" cy="520000"/>
           </a:xfrm>
           <a:prstGeom prst="rect">
             <a:avLst/>
@@ -20716,8 +21537,8 @@
         </p:nvSpPr>
         <p:spPr>
           <a:xfrm>
-            <a:off x="800000" y="5717853"/>
-            <a:ext cx="460000" cy="460000"/>
+            <a:off x="780000" y="5475000"/>
+            <a:ext cx="380000" cy="380000"/>
           </a:xfrm>
           <a:prstGeom prst="ellipse">
             <a:avLst/>
@@ -20750,7 +21571,7 @@
           <a:p>
             <a:pPr algn="ctr"/>
             <a:r>
-              <a:rPr sz="1600" b="1">
+              <a:rPr sz="1400" b="1">
                 <a:solidFill>
                   <a:srgbClr val="FFFFFF"/>
                 </a:solidFill>
@@ -20769,8 +21590,8 @@
         </p:nvSpPr>
         <p:spPr>
           <a:xfrm>
-            <a:off x="1450000" y="5645711"/>
-            <a:ext cx="10050000" cy="604285"/>
+            <a:off x="1380000" y="5445000"/>
+            <a:ext cx="10150000" cy="440000"/>
           </a:xfrm>
           <a:prstGeom prst="rect">
             <a:avLst/>
@@ -20778,14 +21599,13 @@
           <a:noFill/>
         </p:spPr>
         <p:txBody>
-          <a:bodyPr wrap="square" anchor="ctr" lIns="50800" rIns="50800">
+          <a:bodyPr wrap="square" anchor="ctr">
             <a:spAutoFit/>
           </a:bodyPr>
           <a:lstStyle/>
           <a:p>
-            <a:pPr algn="l"/>
             <a:r>
-              <a:rPr sz="1900" b="0">
+              <a:rPr sz="1600" b="0">
                 <a:solidFill>
                   <a:srgbClr val="1B2430"/>
                 </a:solidFill>
@@ -23463,6 +24283,918 @@
         <p:spPr>
           <a:xfrm>
             <a:off x="0" y="0"/>
+            <a:ext cx="12192000" cy="6858000"/>
+          </a:xfrm>
+          <a:prstGeom prst="rect">
+            <a:avLst/>
+          </a:prstGeom>
+          <a:gradFill rotWithShape="1">
+            <a:gsLst>
+              <a:gs pos="0">
+                <a:srgbClr val="162E4D"/>
+              </a:gs>
+              <a:gs pos="100000">
+                <a:srgbClr val="2D5C8F"/>
+              </a:gs>
+            </a:gsLst>
+            <a:lin scaled="0" ang="0"/>
+          </a:gradFill>
+          <a:ln>
+            <a:noFill/>
+          </a:ln>
+          <a:effectLst/>
+        </p:spPr>
+        <p:style>
+          <a:lnRef idx="1">
+            <a:schemeClr val="accent1"/>
+          </a:lnRef>
+          <a:fillRef idx="3">
+            <a:schemeClr val="accent1"/>
+          </a:fillRef>
+          <a:effectRef idx="2">
+            <a:schemeClr val="accent1"/>
+          </a:effectRef>
+          <a:fontRef idx="minor">
+            <a:schemeClr val="lt1"/>
+          </a:fontRef>
+        </p:style>
+        <p:txBody>
+          <a:bodyPr rtlCol="0" anchor="ctr"/>
+          <a:lstStyle/>
+          <a:p>
+            <a:pPr algn="ctr"/>
+          </a:p>
+        </p:txBody>
+      </p:sp>
+      <p:pic>
+        <p:nvPicPr>
+          <p:cNvPr id="3" name="Picture 2" descr="ee6289259cc57ea0.jpg"/>
+          <p:cNvPicPr>
+            <a:picLocks noChangeAspect="1"/>
+          </p:cNvPicPr>
+          <p:nvPr/>
+        </p:nvPicPr>
+        <p:blipFill>
+          <a:blip r:embed="rId2"/>
+          <a:srcRect l="30669" r="30669"/>
+          <a:stretch>
+            <a:fillRect/>
+          </a:stretch>
+        </p:blipFill>
+        <p:spPr>
+          <a:xfrm>
+            <a:off x="6300000" y="0"/>
+            <a:ext cx="5892000" cy="6858000"/>
+          </a:xfrm>
+          <a:prstGeom prst="rect">
+            <a:avLst/>
+          </a:prstGeom>
+        </p:spPr>
+      </p:pic>
+      <p:sp>
+        <p:nvSpPr>
+          <p:cNvPr id="4" name="Rectangle 3"/>
+          <p:cNvSpPr/>
+          <p:nvPr/>
+        </p:nvSpPr>
+        <p:spPr>
+          <a:xfrm>
+            <a:off x="6300000" y="6558000"/>
+            <a:ext cx="5892000" cy="300000"/>
+          </a:xfrm>
+          <a:prstGeom prst="rect">
+            <a:avLst/>
+          </a:prstGeom>
+          <a:solidFill>
+            <a:srgbClr val="0B1626"/>
+          </a:solidFill>
+          <a:ln>
+            <a:noFill/>
+          </a:ln>
+          <a:effectLst/>
+        </p:spPr>
+        <p:style>
+          <a:lnRef idx="1">
+            <a:schemeClr val="accent1"/>
+          </a:lnRef>
+          <a:fillRef idx="3">
+            <a:schemeClr val="accent1"/>
+          </a:fillRef>
+          <a:effectRef idx="2">
+            <a:schemeClr val="accent1"/>
+          </a:effectRef>
+          <a:fontRef idx="minor">
+            <a:schemeClr val="lt1"/>
+          </a:fontRef>
+        </p:style>
+        <p:txBody>
+          <a:bodyPr rtlCol="0" anchor="ctr"/>
+          <a:lstStyle/>
+          <a:p>
+            <a:pPr algn="ctr"/>
+          </a:p>
+        </p:txBody>
+      </p:sp>
+      <p:sp>
+        <p:nvSpPr>
+          <p:cNvPr id="5" name="TextBox 4"/>
+          <p:cNvSpPr txBox="1"/>
+          <p:nvPr/>
+        </p:nvSpPr>
+        <p:spPr>
+          <a:xfrm>
+            <a:off x="6380000" y="6558000"/>
+            <a:ext cx="5732000" cy="300000"/>
+          </a:xfrm>
+          <a:prstGeom prst="rect">
+            <a:avLst/>
+          </a:prstGeom>
+          <a:noFill/>
+        </p:spPr>
+        <p:txBody>
+          <a:bodyPr wrap="square" anchor="ctr" lIns="50800" rIns="50800">
+            <a:spAutoFit/>
+          </a:bodyPr>
+          <a:lstStyle/>
+          <a:p>
+            <a:pPr algn="l"/>
+            <a:r>
+              <a:rPr sz="900" b="0">
+                <a:solidFill>
+                  <a:srgbClr val="D7E3F4"/>
+                </a:solidFill>
+                <a:latin typeface="Calibri"/>
+              </a:rPr>
+              <a:t>Rasm: Julian Herzog (Website) · Wikimedia Commons · CC BY 4.0</a:t>
+            </a:r>
+          </a:p>
+        </p:txBody>
+      </p:sp>
+      <p:sp>
+        <p:nvSpPr>
+          <p:cNvPr id="6" name="Rectangle 5"/>
+          <p:cNvSpPr/>
+          <p:nvPr/>
+        </p:nvSpPr>
+        <p:spPr>
+          <a:xfrm>
+            <a:off x="6240000" y="0"/>
+            <a:ext cx="60000" cy="6858000"/>
+          </a:xfrm>
+          <a:prstGeom prst="rect">
+            <a:avLst/>
+          </a:prstGeom>
+          <a:solidFill>
+            <a:srgbClr val="0F8B8D"/>
+          </a:solidFill>
+          <a:ln>
+            <a:noFill/>
+          </a:ln>
+          <a:effectLst/>
+        </p:spPr>
+        <p:style>
+          <a:lnRef idx="1">
+            <a:schemeClr val="accent1"/>
+          </a:lnRef>
+          <a:fillRef idx="3">
+            <a:schemeClr val="accent1"/>
+          </a:fillRef>
+          <a:effectRef idx="2">
+            <a:schemeClr val="accent1"/>
+          </a:effectRef>
+          <a:fontRef idx="minor">
+            <a:schemeClr val="lt1"/>
+          </a:fontRef>
+        </p:style>
+        <p:txBody>
+          <a:bodyPr rtlCol="0" anchor="ctr"/>
+          <a:lstStyle/>
+          <a:p>
+            <a:pPr algn="ctr"/>
+          </a:p>
+        </p:txBody>
+      </p:sp>
+      <p:sp>
+        <p:nvSpPr>
+          <p:cNvPr id="7" name="Oval 6"/>
+          <p:cNvSpPr/>
+          <p:nvPr/>
+        </p:nvSpPr>
+        <p:spPr>
+          <a:xfrm>
+            <a:off x="800000" y="900000"/>
+            <a:ext cx="2300000" cy="2300000"/>
+          </a:xfrm>
+          <a:prstGeom prst="ellipse">
+            <a:avLst/>
+          </a:prstGeom>
+          <a:noFill/>
+          <a:ln w="76200">
+            <a:solidFill>
+              <a:srgbClr val="7FD6D7"/>
+            </a:solidFill>
+          </a:ln>
+          <a:effectLst/>
+        </p:spPr>
+        <p:style>
+          <a:lnRef idx="1">
+            <a:schemeClr val="accent1"/>
+          </a:lnRef>
+          <a:fillRef idx="3">
+            <a:schemeClr val="accent1"/>
+          </a:fillRef>
+          <a:effectRef idx="2">
+            <a:schemeClr val="accent1"/>
+          </a:effectRef>
+          <a:fontRef idx="minor">
+            <a:schemeClr val="lt1"/>
+          </a:fontRef>
+        </p:style>
+        <p:txBody>
+          <a:bodyPr rtlCol="0" anchor="ctr"/>
+          <a:lstStyle/>
+          <a:p>
+            <a:pPr algn="ctr"/>
+          </a:p>
+        </p:txBody>
+      </p:sp>
+      <p:sp>
+        <p:nvSpPr>
+          <p:cNvPr id="8" name="TextBox 7"/>
+          <p:cNvSpPr txBox="1"/>
+          <p:nvPr/>
+        </p:nvSpPr>
+        <p:spPr>
+          <a:xfrm>
+            <a:off x="800000" y="900000"/>
+            <a:ext cx="2300000" cy="2300000"/>
+          </a:xfrm>
+          <a:prstGeom prst="rect">
+            <a:avLst/>
+          </a:prstGeom>
+          <a:noFill/>
+        </p:spPr>
+        <p:txBody>
+          <a:bodyPr wrap="square" anchor="ctr" lIns="50800" rIns="50800">
+            <a:spAutoFit/>
+          </a:bodyPr>
+          <a:lstStyle/>
+          <a:p>
+            <a:pPr algn="ctr"/>
+            <a:r>
+              <a:rPr sz="6400" b="1">
+                <a:solidFill>
+                  <a:srgbClr val="FFFFFF"/>
+                </a:solidFill>
+                <a:latin typeface="Calibri"/>
+              </a:rPr>
+              <a:t>07</a:t>
+            </a:r>
+          </a:p>
+        </p:txBody>
+      </p:sp>
+      <p:sp>
+        <p:nvSpPr>
+          <p:cNvPr id="9" name="TextBox 8"/>
+          <p:cNvSpPr txBox="1"/>
+          <p:nvPr/>
+        </p:nvSpPr>
+        <p:spPr>
+          <a:xfrm>
+            <a:off x="800000" y="3500000"/>
+            <a:ext cx="5200000" cy="1600000"/>
+          </a:xfrm>
+          <a:prstGeom prst="rect">
+            <a:avLst/>
+          </a:prstGeom>
+          <a:noFill/>
+        </p:spPr>
+        <p:txBody>
+          <a:bodyPr wrap="square" anchor="t" lIns="50800" rIns="50800">
+            <a:spAutoFit/>
+          </a:bodyPr>
+          <a:lstStyle/>
+          <a:p>
+            <a:pPr algn="l"/>
+            <a:r>
+              <a:rPr sz="2400" b="1">
+                <a:solidFill>
+                  <a:srgbClr val="FFFFFF"/>
+                </a:solidFill>
+                <a:latin typeface="Calibri"/>
+              </a:rPr>
+              <a:t>Taqsimlangan AI hisoblash muhitlari va yuqori unumdor tizimlarni tashkil etish</a:t>
+            </a:r>
+          </a:p>
+        </p:txBody>
+      </p:sp>
+      <p:sp>
+        <p:nvSpPr>
+          <p:cNvPr id="10" name="Rectangle 9"/>
+          <p:cNvSpPr/>
+          <p:nvPr/>
+        </p:nvSpPr>
+        <p:spPr>
+          <a:xfrm>
+            <a:off x="850000" y="5200000"/>
+            <a:ext cx="2200000" cy="60000"/>
+          </a:xfrm>
+          <a:prstGeom prst="rect">
+            <a:avLst/>
+          </a:prstGeom>
+          <a:solidFill>
+            <a:srgbClr val="0F8B8D"/>
+          </a:solidFill>
+          <a:ln>
+            <a:noFill/>
+          </a:ln>
+          <a:effectLst/>
+        </p:spPr>
+        <p:style>
+          <a:lnRef idx="1">
+            <a:schemeClr val="accent1"/>
+          </a:lnRef>
+          <a:fillRef idx="3">
+            <a:schemeClr val="accent1"/>
+          </a:fillRef>
+          <a:effectRef idx="2">
+            <a:schemeClr val="accent1"/>
+          </a:effectRef>
+          <a:fontRef idx="minor">
+            <a:schemeClr val="lt1"/>
+          </a:fontRef>
+        </p:style>
+        <p:txBody>
+          <a:bodyPr rtlCol="0" anchor="ctr"/>
+          <a:lstStyle/>
+          <a:p>
+            <a:pPr algn="ctr"/>
+          </a:p>
+        </p:txBody>
+      </p:sp>
+    </p:spTree>
+  </p:cSld>
+  <p:clrMapOvr>
+    <a:masterClrMapping/>
+  </p:clrMapOvr>
+  <p:transition spd="med">
+    <p:push dir="u"/>
+  </p:transition>
+  <p:timing>
+    <p:tnLst>
+      <p:par>
+        <p:cTn id="1" dur="indefinite" restart="never" nodeType="tmRoot">
+          <p:childTnLst>
+            <p:seq concurrent="1" nextAc="seek">
+              <p:cTn id="2" dur="indefinite" nodeType="mainSeq">
+                <p:childTnLst>
+                  <p:par>
+                    <p:cTn id="43" fill="hold">
+                      <p:stCondLst>
+                        <p:cond delay="indefinite"/>
+                        <p:cond evt="onBegin" delay="0">
+                          <p:tn val="2"/>
+                        </p:cond>
+                      </p:stCondLst>
+                      <p:childTnLst>
+                        <p:par>
+                          <p:cTn id="3" fill="hold">
+                            <p:stCondLst>
+                              <p:cond delay="0"/>
+                            </p:stCondLst>
+                            <p:childTnLst>
+                              <p:par>
+                                <p:cTn id="4" presetID="10" presetClass="entr" presetSubtype="0" fill="hold" grpId="0" nodeType="withEffect">
+                                  <p:stCondLst>
+                                    <p:cond delay="0"/>
+                                  </p:stCondLst>
+                                  <p:childTnLst>
+                                    <p:set>
+                                      <p:cBhvr>
+                                        <p:cTn id="5" dur="1" fill="hold">
+                                          <p:stCondLst>
+                                            <p:cond delay="0"/>
+                                          </p:stCondLst>
+                                        </p:cTn>
+                                        <p:tgtEl>
+                                          <p:spTgt spid="3"/>
+                                        </p:tgtEl>
+                                        <p:attrNameLst>
+                                          <p:attrName>style.visibility</p:attrName>
+                                        </p:attrNameLst>
+                                      </p:cBhvr>
+                                      <p:to>
+                                        <p:strVal val="visible"/>
+                                      </p:to>
+                                    </p:set>
+                                    <p:animEffect transition="in" filter="fade">
+                                      <p:cBhvr>
+                                        <p:cTn id="6" dur="550"/>
+                                        <p:tgtEl>
+                                          <p:spTgt spid="3"/>
+                                        </p:tgtEl>
+                                      </p:cBhvr>
+                                    </p:animEffect>
+                                  </p:childTnLst>
+                                </p:cTn>
+                              </p:par>
+                            </p:childTnLst>
+                          </p:cTn>
+                        </p:par>
+                        <p:par>
+                          <p:cTn id="7" fill="hold">
+                            <p:stCondLst>
+                              <p:cond delay="0"/>
+                            </p:stCondLst>
+                            <p:childTnLst>
+                              <p:par>
+                                <p:cTn id="8" presetID="22" presetClass="entr" presetSubtype="8" fill="hold" grpId="0" nodeType="afterEffect">
+                                  <p:stCondLst>
+                                    <p:cond delay="0"/>
+                                  </p:stCondLst>
+                                  <p:childTnLst>
+                                    <p:set>
+                                      <p:cBhvr>
+                                        <p:cTn id="9" dur="1" fill="hold">
+                                          <p:stCondLst>
+                                            <p:cond delay="0"/>
+                                          </p:stCondLst>
+                                        </p:cTn>
+                                        <p:tgtEl>
+                                          <p:spTgt spid="6"/>
+                                        </p:tgtEl>
+                                        <p:attrNameLst>
+                                          <p:attrName>style.visibility</p:attrName>
+                                        </p:attrNameLst>
+                                      </p:cBhvr>
+                                      <p:to>
+                                        <p:strVal val="visible"/>
+                                      </p:to>
+                                    </p:set>
+                                    <p:animEffect transition="in" filter="wipe(left)">
+                                      <p:cBhvr>
+                                        <p:cTn id="11" dur="800"/>
+                                        <p:tgtEl>
+                                          <p:spTgt spid="6"/>
+                                        </p:tgtEl>
+                                      </p:cBhvr>
+                                    </p:animEffect>
+                                  </p:childTnLst>
+                                </p:cTn>
+                              </p:par>
+                            </p:childTnLst>
+                          </p:cTn>
+                        </p:par>
+                        <p:par>
+                          <p:cTn id="12" fill="hold">
+                            <p:stCondLst>
+                              <p:cond delay="0"/>
+                            </p:stCondLst>
+                            <p:childTnLst>
+                              <p:par>
+                                <p:cTn id="13" presetID="10" presetClass="entr" presetSubtype="0" fill="hold" grpId="0" nodeType="afterEffect">
+                                  <p:stCondLst>
+                                    <p:cond delay="0"/>
+                                  </p:stCondLst>
+                                  <p:childTnLst>
+                                    <p:set>
+                                      <p:cBhvr>
+                                        <p:cTn id="14" dur="1" fill="hold">
+                                          <p:stCondLst>
+                                            <p:cond delay="0"/>
+                                          </p:stCondLst>
+                                        </p:cTn>
+                                        <p:tgtEl>
+                                          <p:spTgt spid="4"/>
+                                        </p:tgtEl>
+                                        <p:attrNameLst>
+                                          <p:attrName>style.visibility</p:attrName>
+                                        </p:attrNameLst>
+                                      </p:cBhvr>
+                                      <p:to>
+                                        <p:strVal val="visible"/>
+                                      </p:to>
+                                    </p:set>
+                                    <p:animEffect transition="in" filter="fade">
+                                      <p:cBhvr>
+                                        <p:cTn id="15" dur="550"/>
+                                        <p:tgtEl>
+                                          <p:spTgt spid="4"/>
+                                        </p:tgtEl>
+                                      </p:cBhvr>
+                                    </p:animEffect>
+                                  </p:childTnLst>
+                                </p:cTn>
+                              </p:par>
+                            </p:childTnLst>
+                          </p:cTn>
+                        </p:par>
+                        <p:par>
+                          <p:cTn id="16" fill="hold">
+                            <p:stCondLst>
+                              <p:cond delay="0"/>
+                            </p:stCondLst>
+                            <p:childTnLst>
+                              <p:par>
+                                <p:cTn id="17" presetID="10" presetClass="entr" presetSubtype="0" fill="hold" grpId="0" nodeType="afterEffect">
+                                  <p:stCondLst>
+                                    <p:cond delay="0"/>
+                                  </p:stCondLst>
+                                  <p:childTnLst>
+                                    <p:set>
+                                      <p:cBhvr>
+                                        <p:cTn id="18" dur="1" fill="hold">
+                                          <p:stCondLst>
+                                            <p:cond delay="0"/>
+                                          </p:stCondLst>
+                                        </p:cTn>
+                                        <p:tgtEl>
+                                          <p:spTgt spid="5"/>
+                                        </p:tgtEl>
+                                        <p:attrNameLst>
+                                          <p:attrName>style.visibility</p:attrName>
+                                        </p:attrNameLst>
+                                      </p:cBhvr>
+                                      <p:to>
+                                        <p:strVal val="visible"/>
+                                      </p:to>
+                                    </p:set>
+                                    <p:animEffect transition="in" filter="fade">
+                                      <p:cBhvr>
+                                        <p:cTn id="19" dur="550"/>
+                                        <p:tgtEl>
+                                          <p:spTgt spid="5"/>
+                                        </p:tgtEl>
+                                      </p:cBhvr>
+                                    </p:animEffect>
+                                  </p:childTnLst>
+                                </p:cTn>
+                              </p:par>
+                            </p:childTnLst>
+                          </p:cTn>
+                        </p:par>
+                        <p:par>
+                          <p:cTn id="20" fill="hold">
+                            <p:stCondLst>
+                              <p:cond delay="200"/>
+                            </p:stCondLst>
+                            <p:childTnLst>
+                              <p:par>
+                                <p:cTn id="21" presetID="53" presetClass="entr" presetSubtype="16" fill="hold" grpId="0" nodeType="afterEffect">
+                                  <p:stCondLst>
+                                    <p:cond delay="0"/>
+                                  </p:stCondLst>
+                                  <p:childTnLst>
+                                    <p:set>
+                                      <p:cBhvr>
+                                        <p:cTn id="22" dur="1" fill="hold">
+                                          <p:stCondLst>
+                                            <p:cond delay="0"/>
+                                          </p:stCondLst>
+                                        </p:cTn>
+                                        <p:tgtEl>
+                                          <p:spTgt spid="7"/>
+                                        </p:tgtEl>
+                                        <p:attrNameLst>
+                                          <p:attrName>style.visibility</p:attrName>
+                                        </p:attrNameLst>
+                                      </p:cBhvr>
+                                      <p:to>
+                                        <p:strVal val="visible"/>
+                                      </p:to>
+                                    </p:set>
+                                    <p:animEffect transition="in" filter="fade">
+                                      <p:cBhvr>
+                                        <p:cTn id="23" dur="550"/>
+                                        <p:tgtEl>
+                                          <p:spTgt spid="7"/>
+                                        </p:tgtEl>
+                                      </p:cBhvr>
+                                    </p:animEffect>
+                                    <p:anim calcmode="lin" valueType="num">
+                                      <p:cBhvr additive="base">
+                                        <p:cTn id="24" dur="550" fill="hold"/>
+                                        <p:tgtEl>
+                                          <p:spTgt spid="7"/>
+                                        </p:tgtEl>
+                                        <p:attrNameLst>
+                                          <p:attrName>ppt_w</p:attrName>
+                                        </p:attrNameLst>
+                                      </p:cBhvr>
+                                      <p:tavLst>
+                                        <p:tav tm="0">
+                                          <p:val>
+                                            <p:strVal val="0"/>
+                                          </p:val>
+                                        </p:tav>
+                                        <p:tav tm="100000">
+                                          <p:val>
+                                            <p:strVal val="#ppt_w"/>
+                                          </p:val>
+                                        </p:tav>
+                                      </p:tavLst>
+                                    </p:anim>
+                                    <p:anim calcmode="lin" valueType="num">
+                                      <p:cBhvr additive="base">
+                                        <p:cTn id="25" dur="550" fill="hold"/>
+                                        <p:tgtEl>
+                                          <p:spTgt spid="7"/>
+                                        </p:tgtEl>
+                                        <p:attrNameLst>
+                                          <p:attrName>ppt_h</p:attrName>
+                                        </p:attrNameLst>
+                                      </p:cBhvr>
+                                      <p:tavLst>
+                                        <p:tav tm="0">
+                                          <p:val>
+                                            <p:strVal val="0"/>
+                                          </p:val>
+                                        </p:tav>
+                                        <p:tav tm="100000">
+                                          <p:val>
+                                            <p:strVal val="#ppt_h"/>
+                                          </p:val>
+                                        </p:tav>
+                                      </p:tavLst>
+                                    </p:anim>
+                                  </p:childTnLst>
+                                </p:cTn>
+                              </p:par>
+                            </p:childTnLst>
+                          </p:cTn>
+                        </p:par>
+                        <p:par>
+                          <p:cTn id="26" fill="hold">
+                            <p:stCondLst>
+                              <p:cond delay="300"/>
+                            </p:stCondLst>
+                            <p:childTnLst>
+                              <p:par>
+                                <p:cTn id="27" presetID="53" presetClass="entr" presetSubtype="16" fill="hold" grpId="0" nodeType="afterEffect">
+                                  <p:stCondLst>
+                                    <p:cond delay="0"/>
+                                  </p:stCondLst>
+                                  <p:childTnLst>
+                                    <p:set>
+                                      <p:cBhvr>
+                                        <p:cTn id="28" dur="1" fill="hold">
+                                          <p:stCondLst>
+                                            <p:cond delay="0"/>
+                                          </p:stCondLst>
+                                        </p:cTn>
+                                        <p:tgtEl>
+                                          <p:spTgt spid="8"/>
+                                        </p:tgtEl>
+                                        <p:attrNameLst>
+                                          <p:attrName>style.visibility</p:attrName>
+                                        </p:attrNameLst>
+                                      </p:cBhvr>
+                                      <p:to>
+                                        <p:strVal val="visible"/>
+                                      </p:to>
+                                    </p:set>
+                                    <p:animEffect transition="in" filter="fade">
+                                      <p:cBhvr>
+                                        <p:cTn id="29" dur="550"/>
+                                        <p:tgtEl>
+                                          <p:spTgt spid="8"/>
+                                        </p:tgtEl>
+                                      </p:cBhvr>
+                                    </p:animEffect>
+                                    <p:anim calcmode="lin" valueType="num">
+                                      <p:cBhvr additive="base">
+                                        <p:cTn id="30" dur="550" fill="hold"/>
+                                        <p:tgtEl>
+                                          <p:spTgt spid="8"/>
+                                        </p:tgtEl>
+                                        <p:attrNameLst>
+                                          <p:attrName>ppt_w</p:attrName>
+                                        </p:attrNameLst>
+                                      </p:cBhvr>
+                                      <p:tavLst>
+                                        <p:tav tm="0">
+                                          <p:val>
+                                            <p:strVal val="0"/>
+                                          </p:val>
+                                        </p:tav>
+                                        <p:tav tm="100000">
+                                          <p:val>
+                                            <p:strVal val="#ppt_w"/>
+                                          </p:val>
+                                        </p:tav>
+                                      </p:tavLst>
+                                    </p:anim>
+                                    <p:anim calcmode="lin" valueType="num">
+                                      <p:cBhvr additive="base">
+                                        <p:cTn id="31" dur="550" fill="hold"/>
+                                        <p:tgtEl>
+                                          <p:spTgt spid="8"/>
+                                        </p:tgtEl>
+                                        <p:attrNameLst>
+                                          <p:attrName>ppt_h</p:attrName>
+                                        </p:attrNameLst>
+                                      </p:cBhvr>
+                                      <p:tavLst>
+                                        <p:tav tm="0">
+                                          <p:val>
+                                            <p:strVal val="0"/>
+                                          </p:val>
+                                        </p:tav>
+                                        <p:tav tm="100000">
+                                          <p:val>
+                                            <p:strVal val="#ppt_h"/>
+                                          </p:val>
+                                        </p:tav>
+                                      </p:tavLst>
+                                    </p:anim>
+                                  </p:childTnLst>
+                                </p:cTn>
+                              </p:par>
+                            </p:childTnLst>
+                          </p:cTn>
+                        </p:par>
+                        <p:par>
+                          <p:cTn id="32" fill="hold">
+                            <p:stCondLst>
+                              <p:cond delay="450"/>
+                            </p:stCondLst>
+                            <p:childTnLst>
+                              <p:par>
+                                <p:cTn id="33" presetID="2" presetClass="entr" presetSubtype="8" fill="hold" grpId="0" nodeType="afterEffect">
+                                  <p:stCondLst>
+                                    <p:cond delay="0"/>
+                                  </p:stCondLst>
+                                  <p:childTnLst>
+                                    <p:set>
+                                      <p:cBhvr>
+                                        <p:cTn id="34" dur="1" fill="hold">
+                                          <p:stCondLst>
+                                            <p:cond delay="0"/>
+                                          </p:stCondLst>
+                                        </p:cTn>
+                                        <p:tgtEl>
+                                          <p:spTgt spid="9"/>
+                                        </p:tgtEl>
+                                        <p:attrNameLst>
+                                          <p:attrName>style.visibility</p:attrName>
+                                        </p:attrNameLst>
+                                      </p:cBhvr>
+                                      <p:to>
+                                        <p:strVal val="visible"/>
+                                      </p:to>
+                                    </p:set>
+                                    <p:anim calcmode="lin" valueType="num">
+                                      <p:cBhvr additive="base">
+                                        <p:cTn id="36" dur="550" fill="hold"/>
+                                        <p:tgtEl>
+                                          <p:spTgt spid="9"/>
+                                        </p:tgtEl>
+                                        <p:attrNameLst>
+                                          <p:attrName>ppt_x</p:attrName>
+                                        </p:attrNameLst>
+                                      </p:cBhvr>
+                                      <p:tavLst>
+                                        <p:tav tm="0">
+                                          <p:val>
+                                            <p:strVal val="0-#ppt_w/2"/>
+                                          </p:val>
+                                        </p:tav>
+                                        <p:tav tm="100000">
+                                          <p:val>
+                                            <p:strVal val="#ppt_x"/>
+                                          </p:val>
+                                        </p:tav>
+                                      </p:tavLst>
+                                    </p:anim>
+                                    <p:anim calcmode="lin" valueType="num">
+                                      <p:cBhvr additive="base">
+                                        <p:cTn id="37" dur="550" fill="hold"/>
+                                        <p:tgtEl>
+                                          <p:spTgt spid="9"/>
+                                        </p:tgtEl>
+                                        <p:attrNameLst>
+                                          <p:attrName>ppt_y</p:attrName>
+                                        </p:attrNameLst>
+                                      </p:cBhvr>
+                                      <p:tavLst>
+                                        <p:tav tm="0">
+                                          <p:val>
+                                            <p:strVal val="#ppt_y"/>
+                                          </p:val>
+                                        </p:tav>
+                                        <p:tav tm="100000">
+                                          <p:val>
+                                            <p:strVal val="#ppt_y"/>
+                                          </p:val>
+                                        </p:tav>
+                                      </p:tavLst>
+                                    </p:anim>
+                                  </p:childTnLst>
+                                </p:cTn>
+                              </p:par>
+                            </p:childTnLst>
+                          </p:cTn>
+                        </p:par>
+                        <p:par>
+                          <p:cTn id="38" fill="hold">
+                            <p:stCondLst>
+                              <p:cond delay="550"/>
+                            </p:stCondLst>
+                            <p:childTnLst>
+                              <p:par>
+                                <p:cTn id="39" presetID="22" presetClass="entr" presetSubtype="8" fill="hold" grpId="0" nodeType="afterEffect">
+                                  <p:stCondLst>
+                                    <p:cond delay="0"/>
+                                  </p:stCondLst>
+                                  <p:childTnLst>
+                                    <p:set>
+                                      <p:cBhvr>
+                                        <p:cTn id="40" dur="1" fill="hold">
+                                          <p:stCondLst>
+                                            <p:cond delay="0"/>
+                                          </p:stCondLst>
+                                        </p:cTn>
+                                        <p:tgtEl>
+                                          <p:spTgt spid="10"/>
+                                        </p:tgtEl>
+                                        <p:attrNameLst>
+                                          <p:attrName>style.visibility</p:attrName>
+                                        </p:attrNameLst>
+                                      </p:cBhvr>
+                                      <p:to>
+                                        <p:strVal val="visible"/>
+                                      </p:to>
+                                    </p:set>
+                                    <p:animEffect transition="in" filter="wipe(left)">
+                                      <p:cBhvr>
+                                        <p:cTn id="42" dur="800"/>
+                                        <p:tgtEl>
+                                          <p:spTgt spid="10"/>
+                                        </p:tgtEl>
+                                      </p:cBhvr>
+                                    </p:animEffect>
+                                  </p:childTnLst>
+                                </p:cTn>
+                              </p:par>
+                            </p:childTnLst>
+                          </p:cTn>
+                        </p:par>
+                      </p:childTnLst>
+                    </p:cTn>
+                  </p:par>
+                </p:childTnLst>
+              </p:cTn>
+              <p:prevCondLst>
+                <p:cond evt="onPrev" delay="0">
+                  <p:tgtEl>
+                    <p:sldTgt/>
+                  </p:tgtEl>
+                </p:cond>
+              </p:prevCondLst>
+              <p:nextCondLst>
+                <p:cond evt="onNext" delay="0">
+                  <p:tgtEl>
+                    <p:sldTgt/>
+                  </p:tgtEl>
+                </p:cond>
+              </p:nextCondLst>
+            </p:seq>
+          </p:childTnLst>
+        </p:cTn>
+      </p:par>
+    </p:tnLst>
+    <p:bldLst>
+      <p:bldP spid="6" grpId="0" animBg="1"/>
+      <p:bldP spid="4" grpId="0" animBg="1"/>
+      <p:bldP spid="5" grpId="0" animBg="1"/>
+      <p:bldP spid="7" grpId="0" animBg="1"/>
+      <p:bldP spid="8" grpId="0" animBg="1"/>
+      <p:bldP spid="9" grpId="0" animBg="1"/>
+      <p:bldP spid="10" grpId="0" animBg="1"/>
+    </p:bldLst>
+  </p:timing>
+</p:sld>
+</file>
+
+<file path=ppt/slides/slide21.xml><?xml version="1.0" encoding="utf-8"?>
+<p:sld xmlns:a="http://schemas.openxmlformats.org/drawingml/2006/main" xmlns:p="http://schemas.openxmlformats.org/presentationml/2006/main" xmlns:r="http://schemas.openxmlformats.org/officeDocument/2006/relationships">
+  <p:cSld>
+    <p:spTree>
+      <p:nvGrpSpPr>
+        <p:cNvPr id="1" name=""/>
+        <p:cNvGrpSpPr/>
+        <p:nvPr/>
+      </p:nvGrpSpPr>
+      <p:grpSpPr/>
+      <p:sp>
+        <p:nvSpPr>
+          <p:cNvPr id="2" name="Rectangle 1"/>
+          <p:cNvSpPr/>
+          <p:nvPr/>
+        </p:nvSpPr>
+        <p:spPr>
+          <a:xfrm>
+            <a:off x="0" y="0"/>
             <a:ext cx="12192000" cy="1000000"/>
           </a:xfrm>
           <a:prstGeom prst="rect">
@@ -23773,7 +25505,7 @@
                 </a:solidFill>
                 <a:latin typeface="Calibri"/>
               </a:rPr>
-              <a:t>20</a:t>
+              <a:t>21</a:t>
             </a:r>
           </a:p>
         </p:txBody>
@@ -23786,12 +25518,12 @@
         </p:nvSpPr>
         <p:spPr>
           <a:xfrm>
-            <a:off x="550000" y="1620000"/>
-            <a:ext cx="11100000" cy="1250000"/>
+            <a:off x="550000" y="1761824"/>
+            <a:ext cx="11100000" cy="1268784"/>
           </a:xfrm>
           <a:prstGeom prst="roundRect">
             <a:avLst>
-              <a:gd name="adj" fmla="val 18000"/>
+              <a:gd name="adj" fmla="val 8000"/>
             </a:avLst>
           </a:prstGeom>
           <a:solidFill>
@@ -23832,8 +25564,8 @@
         </p:nvSpPr>
         <p:spPr>
           <a:xfrm>
-            <a:off x="550000" y="1620000"/>
-            <a:ext cx="70000" cy="1250000"/>
+            <a:off x="550000" y="1761824"/>
+            <a:ext cx="70000" cy="1268784"/>
           </a:xfrm>
           <a:prstGeom prst="rect">
             <a:avLst/>
@@ -23876,8 +25608,8 @@
         </p:nvSpPr>
         <p:spPr>
           <a:xfrm>
-            <a:off x="800000" y="2015000"/>
-            <a:ext cx="460000" cy="460000"/>
+            <a:off x="780000" y="2186216"/>
+            <a:ext cx="420000" cy="420000"/>
           </a:xfrm>
           <a:prstGeom prst="ellipse">
             <a:avLst/>
@@ -23910,7 +25642,7 @@
           <a:p>
             <a:pPr algn="ctr"/>
             <a:r>
-              <a:rPr sz="1600" b="1">
+              <a:rPr sz="1400" b="1">
                 <a:solidFill>
                   <a:srgbClr val="FFFFFF"/>
                 </a:solidFill>
@@ -23929,8 +25661,8 @@
         </p:nvSpPr>
         <p:spPr>
           <a:xfrm>
-            <a:off x="1450000" y="1620000"/>
-            <a:ext cx="10050000" cy="1250000"/>
+            <a:off x="1380000" y="1801824"/>
+            <a:ext cx="10150000" cy="1188784"/>
           </a:xfrm>
           <a:prstGeom prst="rect">
             <a:avLst/>
@@ -23938,20 +25670,35 @@
           <a:noFill/>
         </p:spPr>
         <p:txBody>
-          <a:bodyPr wrap="square" anchor="ctr" lIns="50800" rIns="50800">
+          <a:bodyPr wrap="square" anchor="ctr">
             <a:spAutoFit/>
           </a:bodyPr>
           <a:lstStyle/>
           <a:p>
-            <a:pPr algn="l"/>
             <a:r>
-              <a:rPr sz="1600" b="0">
+              <a:rPr sz="1500" b="1">
                 <a:solidFill>
-                  <a:srgbClr val="1B2430"/>
+                  <a:srgbClr val="1F3A5F"/>
                 </a:solidFill>
                 <a:latin typeface="Calibri"/>
               </a:rPr>
-              <a:t>Taqsimlangan SI muhiti bir necha qatlamdan iborat. Kollektiv aloqa qatlami: NCCL (NVIDIA), RCCL (AMD), oneCCL (Intel), Gloo (CPU) — topologiyani aniqlab, optimal algoritmni tanlaydi.</a:t>
+              <a:t>Taqsimlangan SI muhiti bir necha qatlamdan iborat.</a:t>
+            </a:r>
+          </a:p>
+          <a:p>
+            <a:pPr>
+              <a:spcBef>
+                <a:spcPts val="400"/>
+              </a:spcBef>
+            </a:pPr>
+            <a:r>
+              <a:rPr sz="1400">
+                <a:solidFill>
+                  <a:srgbClr val="334055"/>
+                </a:solidFill>
+                <a:latin typeface="Calibri"/>
+              </a:rPr>
+              <a:t>Kollektiv aloqa qatlami: NCCL (NVIDIA), RCCL (AMD), oneCCL (Intel), Gloo (CPU) — topologiyani aniqlab, optimal algoritmni tanlaydi. Ramka qatlami: PyTorch Distributed (torch.distributed, DDP, FSDP, torchrun ishga tushiruvchi), TensorFlow tf.distribute, JAX pjit/sharding.</a:t>
             </a:r>
           </a:p>
         </p:txBody>
@@ -23964,12 +25711,12 @@
         </p:nvSpPr>
         <p:spPr>
           <a:xfrm>
-            <a:off x="550000" y="2990000"/>
-            <a:ext cx="11100000" cy="1250000"/>
+            <a:off x="550000" y="3140608"/>
+            <a:ext cx="11100000" cy="1268784"/>
           </a:xfrm>
           <a:prstGeom prst="roundRect">
             <a:avLst>
-              <a:gd name="adj" fmla="val 18000"/>
+              <a:gd name="adj" fmla="val 8000"/>
             </a:avLst>
           </a:prstGeom>
           <a:solidFill>
@@ -24010,8 +25757,8 @@
         </p:nvSpPr>
         <p:spPr>
           <a:xfrm>
-            <a:off x="550000" y="2990000"/>
-            <a:ext cx="70000" cy="1250000"/>
+            <a:off x="550000" y="3140608"/>
+            <a:ext cx="70000" cy="1268784"/>
           </a:xfrm>
           <a:prstGeom prst="rect">
             <a:avLst/>
@@ -24054,8 +25801,8 @@
         </p:nvSpPr>
         <p:spPr>
           <a:xfrm>
-            <a:off x="800000" y="3385000"/>
-            <a:ext cx="460000" cy="460000"/>
+            <a:off x="780000" y="3565000"/>
+            <a:ext cx="420000" cy="420000"/>
           </a:xfrm>
           <a:prstGeom prst="ellipse">
             <a:avLst/>
@@ -24088,7 +25835,7 @@
           <a:p>
             <a:pPr algn="ctr"/>
             <a:r>
-              <a:rPr sz="1600" b="1">
+              <a:rPr sz="1400" b="1">
                 <a:solidFill>
                   <a:srgbClr val="FFFFFF"/>
                 </a:solidFill>
@@ -24107,8 +25854,8 @@
         </p:nvSpPr>
         <p:spPr>
           <a:xfrm>
-            <a:off x="1450000" y="2990000"/>
-            <a:ext cx="10050000" cy="1250000"/>
+            <a:off x="1380000" y="3180608"/>
+            <a:ext cx="10150000" cy="1188784"/>
           </a:xfrm>
           <a:prstGeom prst="rect">
             <a:avLst/>
@@ -24116,20 +25863,35 @@
           <a:noFill/>
         </p:spPr>
         <p:txBody>
-          <a:bodyPr wrap="square" anchor="ctr" lIns="50800" rIns="50800">
+          <a:bodyPr wrap="square" anchor="ctr">
             <a:spAutoFit/>
           </a:bodyPr>
           <a:lstStyle/>
           <a:p>
-            <a:pPr algn="l"/>
             <a:r>
-              <a:rPr sz="1600" b="0">
+              <a:rPr sz="1500" b="1">
                 <a:solidFill>
-                  <a:srgbClr val="1B2430"/>
+                  <a:srgbClr val="1F3A5F"/>
                 </a:solidFill>
                 <a:latin typeface="Calibri"/>
               </a:rPr>
-              <a:t>Yuqori unumdor AI tizimini tashkil etishda apparat tomonida to'rt qaror hal qiluvchi. Interkonnekt topologiyasi: server ichida NVSwitch (har GPU juftligi to'liq tezlikda), serverlar orasida InfiniBand NDR 400 Gbit/s yoki RoCE Ethernet, «fat-tree» yoki…</a:t>
+              <a:t>Yuqori unumdor AI tizimini tashkil etishda apparat tomonida to'rt qaror hal qiluvchi.</a:t>
+            </a:r>
+          </a:p>
+          <a:p>
+            <a:pPr>
+              <a:spcBef>
+                <a:spcPts val="400"/>
+              </a:spcBef>
+            </a:pPr>
+            <a:r>
+              <a:rPr sz="1400">
+                <a:solidFill>
+                  <a:srgbClr val="334055"/>
+                </a:solidFill>
+                <a:latin typeface="Calibri"/>
+              </a:rPr>
+              <a:t>Interkonnekt topologiyasi: server ichida NVSwitch (har GPU juftligi to'liq tezlikda), serverlar orasida InfiniBand NDR 400 Gbit/s yoki RoCE Ethernet, «fat-tree» yoki «rail-optimized» topologiya (har GPU ning o'z tarmoq kartasi alohida kommutatorga ulanadi).</a:t>
             </a:r>
           </a:p>
         </p:txBody>
@@ -24142,12 +25904,12 @@
         </p:nvSpPr>
         <p:spPr>
           <a:xfrm>
-            <a:off x="550000" y="4360000"/>
-            <a:ext cx="11100000" cy="1250000"/>
+            <a:off x="550000" y="4519392"/>
+            <a:ext cx="11100000" cy="1268784"/>
           </a:xfrm>
           <a:prstGeom prst="roundRect">
             <a:avLst>
-              <a:gd name="adj" fmla="val 18000"/>
+              <a:gd name="adj" fmla="val 8000"/>
             </a:avLst>
           </a:prstGeom>
           <a:solidFill>
@@ -24188,8 +25950,8 @@
         </p:nvSpPr>
         <p:spPr>
           <a:xfrm>
-            <a:off x="550000" y="4360000"/>
-            <a:ext cx="70000" cy="1250000"/>
+            <a:off x="550000" y="4519392"/>
+            <a:ext cx="70000" cy="1268784"/>
           </a:xfrm>
           <a:prstGeom prst="rect">
             <a:avLst/>
@@ -24232,8 +25994,8 @@
         </p:nvSpPr>
         <p:spPr>
           <a:xfrm>
-            <a:off x="800000" y="4755000"/>
-            <a:ext cx="460000" cy="460000"/>
+            <a:off x="780000" y="4943784"/>
+            <a:ext cx="420000" cy="420000"/>
           </a:xfrm>
           <a:prstGeom prst="ellipse">
             <a:avLst/>
@@ -24266,7 +26028,7 @@
           <a:p>
             <a:pPr algn="ctr"/>
             <a:r>
-              <a:rPr sz="1600" b="1">
+              <a:rPr sz="1400" b="1">
                 <a:solidFill>
                   <a:srgbClr val="FFFFFF"/>
                 </a:solidFill>
@@ -24285,8 +26047,8 @@
         </p:nvSpPr>
         <p:spPr>
           <a:xfrm>
-            <a:off x="1450000" y="4360000"/>
-            <a:ext cx="10050000" cy="1250000"/>
+            <a:off x="1380000" y="4559392"/>
+            <a:ext cx="10150000" cy="1188784"/>
           </a:xfrm>
           <a:prstGeom prst="rect">
             <a:avLst/>
@@ -24294,14 +26056,13 @@
           <a:noFill/>
         </p:spPr>
         <p:txBody>
-          <a:bodyPr wrap="square" anchor="ctr" lIns="50800" rIns="50800">
+          <a:bodyPr wrap="square" anchor="ctr">
             <a:spAutoFit/>
           </a:bodyPr>
           <a:lstStyle/>
           <a:p>
-            <a:pPr algn="l"/>
             <a:r>
-              <a:rPr sz="1600" b="0">
+              <a:rPr sz="1400" b="0">
                 <a:solidFill>
                   <a:srgbClr val="1B2430"/>
                 </a:solidFill>
@@ -25504,7 +27265,7 @@
 </p:sld>
 </file>
 
-<file path=ppt/slides/slide21.xml><?xml version="1.0" encoding="utf-8"?>
+<file path=ppt/slides/slide22.xml><?xml version="1.0" encoding="utf-8"?>
 <p:sld xmlns:a="http://schemas.openxmlformats.org/drawingml/2006/main" xmlns:p="http://schemas.openxmlformats.org/presentationml/2006/main" xmlns:r="http://schemas.openxmlformats.org/officeDocument/2006/relationships">
   <p:cSld>
     <p:spTree>
@@ -27342,12 +29103,12 @@
         </p:nvSpPr>
         <p:spPr>
           <a:xfrm>
-            <a:off x="550000" y="1300000"/>
-            <a:ext cx="11100000" cy="1147500"/>
+            <a:off x="550000" y="1409780"/>
+            <a:ext cx="11100000" cy="1503480"/>
           </a:xfrm>
           <a:prstGeom prst="roundRect">
             <a:avLst>
-              <a:gd name="adj" fmla="val 18000"/>
+              <a:gd name="adj" fmla="val 8000"/>
             </a:avLst>
           </a:prstGeom>
           <a:solidFill>
@@ -27388,8 +29149,8 @@
         </p:nvSpPr>
         <p:spPr>
           <a:xfrm>
-            <a:off x="550000" y="1300000"/>
-            <a:ext cx="70000" cy="1147500"/>
+            <a:off x="550000" y="1409780"/>
+            <a:ext cx="70000" cy="1503480"/>
           </a:xfrm>
           <a:prstGeom prst="rect">
             <a:avLst/>
@@ -27432,8 +29193,8 @@
         </p:nvSpPr>
         <p:spPr>
           <a:xfrm>
-            <a:off x="800000" y="1643750"/>
-            <a:ext cx="460000" cy="460000"/>
+            <a:off x="780000" y="1951520"/>
+            <a:ext cx="420000" cy="420000"/>
           </a:xfrm>
           <a:prstGeom prst="ellipse">
             <a:avLst/>
@@ -27466,7 +29227,7 @@
           <a:p>
             <a:pPr algn="ctr"/>
             <a:r>
-              <a:rPr sz="1600" b="1">
+              <a:rPr sz="1400" b="1">
                 <a:solidFill>
                   <a:srgbClr val="FFFFFF"/>
                 </a:solidFill>
@@ -27485,8 +29246,8 @@
         </p:nvSpPr>
         <p:spPr>
           <a:xfrm>
-            <a:off x="1450000" y="1300000"/>
-            <a:ext cx="10050000" cy="1147500"/>
+            <a:off x="1380000" y="1449780"/>
+            <a:ext cx="10150000" cy="1423480"/>
           </a:xfrm>
           <a:prstGeom prst="rect">
             <a:avLst/>
@@ -27494,12 +29255,11 @@
           <a:noFill/>
         </p:spPr>
         <p:txBody>
-          <a:bodyPr wrap="square" anchor="ctr" lIns="50800" rIns="50800">
+          <a:bodyPr wrap="square" anchor="ctr">
             <a:spAutoFit/>
           </a:bodyPr>
           <a:lstStyle/>
           <a:p>
-            <a:pPr algn="l"/>
             <a:r>
               <a:rPr sz="1400" b="0">
                 <a:solidFill>
@@ -27507,7 +29267,7 @@
                 </a:solidFill>
                 <a:latin typeface="Calibri"/>
               </a:rPr>
-              <a:t>Flinn tasnifi (Flynn's taxonomy) hisoblash tizimlarini buyruq va ma'lumot oqimlari soniga ko'ra to'rt sinfga ajratadi: SISD (bitta buyruq, bitta ma'lumot — klassik skalyar protsessor), SIMD…</a:t>
+              <a:t>Flinn tasnifi (Flynn's taxonomy) hisoblash tizimlarini buyruq va ma'lumot oqimlari soniga ko'ra to'rt sinfga ajratadi: SISD (bitta buyruq, bitta ma'lumot — klassik skalyar protsessor), SIMD (bitta buyruq, ko'p ma'lumot — vektor bloklar, GPU warp), MISD…</a:t>
             </a:r>
           </a:p>
         </p:txBody>
@@ -27520,12 +29280,12 @@
         </p:nvSpPr>
         <p:spPr>
           <a:xfrm>
-            <a:off x="550000" y="2567500"/>
-            <a:ext cx="11100000" cy="1147500"/>
+            <a:off x="550000" y="3023260"/>
+            <a:ext cx="11100000" cy="1503480"/>
           </a:xfrm>
           <a:prstGeom prst="roundRect">
             <a:avLst>
-              <a:gd name="adj" fmla="val 18000"/>
+              <a:gd name="adj" fmla="val 8000"/>
             </a:avLst>
           </a:prstGeom>
           <a:solidFill>
@@ -27566,8 +29326,8 @@
         </p:nvSpPr>
         <p:spPr>
           <a:xfrm>
-            <a:off x="550000" y="2567500"/>
-            <a:ext cx="70000" cy="1147500"/>
+            <a:off x="550000" y="3023260"/>
+            <a:ext cx="70000" cy="1503480"/>
           </a:xfrm>
           <a:prstGeom prst="rect">
             <a:avLst/>
@@ -27610,8 +29370,8 @@
         </p:nvSpPr>
         <p:spPr>
           <a:xfrm>
-            <a:off x="800000" y="2911250"/>
-            <a:ext cx="460000" cy="460000"/>
+            <a:off x="780000" y="3565000"/>
+            <a:ext cx="420000" cy="420000"/>
           </a:xfrm>
           <a:prstGeom prst="ellipse">
             <a:avLst/>
@@ -27644,7 +29404,7 @@
           <a:p>
             <a:pPr algn="ctr"/>
             <a:r>
-              <a:rPr sz="1600" b="1">
+              <a:rPr sz="1400" b="1">
                 <a:solidFill>
                   <a:srgbClr val="FFFFFF"/>
                 </a:solidFill>
@@ -27663,8 +29423,8 @@
         </p:nvSpPr>
         <p:spPr>
           <a:xfrm>
-            <a:off x="1450000" y="2567500"/>
-            <a:ext cx="10050000" cy="1147500"/>
+            <a:off x="1380000" y="3063260"/>
+            <a:ext cx="10150000" cy="1423480"/>
           </a:xfrm>
           <a:prstGeom prst="rect">
             <a:avLst/>
@@ -27672,20 +29432,35 @@
           <a:noFill/>
         </p:spPr>
         <p:txBody>
-          <a:bodyPr wrap="square" anchor="ctr" lIns="50800" rIns="50800">
+          <a:bodyPr wrap="square" anchor="ctr">
             <a:spAutoFit/>
           </a:bodyPr>
           <a:lstStyle/>
           <a:p>
-            <a:pPr algn="l"/>
             <a:r>
-              <a:rPr sz="1400" b="0">
+              <a:rPr sz="1500" b="1">
                 <a:solidFill>
-                  <a:srgbClr val="1B2430"/>
+                  <a:srgbClr val="1F3A5F"/>
                 </a:solidFill>
                 <a:latin typeface="Calibri"/>
               </a:rPr>
-              <a:t>Parallel dasturning sifatini ikki ko'rsatkich belgilaydi: tezlashuv S(p) = T(1) / T(p) — p protsessorda bajarish vaqtining bitta protsessordagi vaqtga nisbati, va samaradorlik E(p) = S(p) /…</a:t>
+              <a:t>Parallel dasturning sifatini ikki ko'rsatkich belgilaydi: tezlashuv S(p) = T(1) / T(p) — p protsessorda bajarish vaqtining bitta protsessordagi vaqtga nisbati, va samaradorlik E(p) = S(p) / p — ideal chiziqli tezlashuvga nisbatan ulush.</a:t>
+            </a:r>
+          </a:p>
+          <a:p>
+            <a:pPr>
+              <a:spcBef>
+                <a:spcPts val="400"/>
+              </a:spcBef>
+            </a:pPr>
+            <a:r>
+              <a:rPr sz="1400">
+                <a:solidFill>
+                  <a:srgbClr val="334055"/>
+                </a:solidFill>
+                <a:latin typeface="Calibri"/>
+              </a:rPr>
+              <a:t>Amdal qonuni tezlashuvning yuqori chegarasini beradi: agar ishning f ulushi ketma-ket bo'lsa, S(p) ≤ 1 / (f + (1 − f)/p), va p → ∞ da S ≤ 1/f.</a:t>
             </a:r>
           </a:p>
         </p:txBody>
@@ -27698,12 +29473,12 @@
         </p:nvSpPr>
         <p:spPr>
           <a:xfrm>
-            <a:off x="550000" y="3835000"/>
-            <a:ext cx="11100000" cy="1147500"/>
+            <a:off x="550000" y="4636740"/>
+            <a:ext cx="11100000" cy="1503480"/>
           </a:xfrm>
           <a:prstGeom prst="roundRect">
             <a:avLst>
-              <a:gd name="adj" fmla="val 18000"/>
+              <a:gd name="adj" fmla="val 8000"/>
             </a:avLst>
           </a:prstGeom>
           <a:solidFill>
@@ -27744,8 +29519,8 @@
         </p:nvSpPr>
         <p:spPr>
           <a:xfrm>
-            <a:off x="550000" y="3835000"/>
-            <a:ext cx="70000" cy="1147500"/>
+            <a:off x="550000" y="4636740"/>
+            <a:ext cx="70000" cy="1503480"/>
           </a:xfrm>
           <a:prstGeom prst="rect">
             <a:avLst/>
@@ -27788,8 +29563,8 @@
         </p:nvSpPr>
         <p:spPr>
           <a:xfrm>
-            <a:off x="800000" y="4178750"/>
-            <a:ext cx="460000" cy="460000"/>
+            <a:off x="780000" y="5178480"/>
+            <a:ext cx="420000" cy="420000"/>
           </a:xfrm>
           <a:prstGeom prst="ellipse">
             <a:avLst/>
@@ -27822,7 +29597,7 @@
           <a:p>
             <a:pPr algn="ctr"/>
             <a:r>
-              <a:rPr sz="1600" b="1">
+              <a:rPr sz="1400" b="1">
                 <a:solidFill>
                   <a:srgbClr val="FFFFFF"/>
                 </a:solidFill>
@@ -27841,8 +29616,8 @@
         </p:nvSpPr>
         <p:spPr>
           <a:xfrm>
-            <a:off x="1450000" y="3835000"/>
-            <a:ext cx="10050000" cy="1147500"/>
+            <a:off x="1380000" y="4676740"/>
+            <a:ext cx="10150000" cy="1423480"/>
           </a:xfrm>
           <a:prstGeom prst="rect">
             <a:avLst/>
@@ -27850,198 +29625,35 @@
           <a:noFill/>
         </p:spPr>
         <p:txBody>
-          <a:bodyPr wrap="square" anchor="ctr" lIns="50800" rIns="50800">
+          <a:bodyPr wrap="square" anchor="ctr">
             <a:spAutoFit/>
           </a:bodyPr>
           <a:lstStyle/>
           <a:p>
-            <a:pPr algn="l"/>
             <a:r>
-              <a:rPr sz="1400" b="0">
+              <a:rPr sz="1500" b="1">
                 <a:solidFill>
-                  <a:srgbClr val="1B2430"/>
+                  <a:srgbClr val="1F3A5F"/>
                 </a:solidFill>
                 <a:latin typeface="Calibri"/>
               </a:rPr>
               <a:t>Gustafson qonuni boshqa nuqtai nazarni beradi: amalda protsessorlar ko'paysa, muhandis masalani kattalashtiradi (ko'proq ma'lumot, kattaroq model).</a:t>
             </a:r>
           </a:p>
-        </p:txBody>
-      </p:sp>
-      <p:sp>
-        <p:nvSpPr>
-          <p:cNvPr id="22" name="Rounded Rectangle 21"/>
-          <p:cNvSpPr/>
-          <p:nvPr/>
-        </p:nvSpPr>
-        <p:spPr>
-          <a:xfrm>
-            <a:off x="550000" y="5102500"/>
-            <a:ext cx="11100000" cy="1147500"/>
-          </a:xfrm>
-          <a:prstGeom prst="roundRect">
-            <a:avLst>
-              <a:gd name="adj" fmla="val 18000"/>
-            </a:avLst>
-          </a:prstGeom>
-          <a:solidFill>
-            <a:srgbClr val="F5F8FC"/>
-          </a:solidFill>
-          <a:ln>
-            <a:noFill/>
-          </a:ln>
-          <a:effectLst/>
-        </p:spPr>
-        <p:style>
-          <a:lnRef idx="1">
-            <a:schemeClr val="accent1"/>
-          </a:lnRef>
-          <a:fillRef idx="3">
-            <a:schemeClr val="accent1"/>
-          </a:fillRef>
-          <a:effectRef idx="2">
-            <a:schemeClr val="accent1"/>
-          </a:effectRef>
-          <a:fontRef idx="minor">
-            <a:schemeClr val="lt1"/>
-          </a:fontRef>
-        </p:style>
-        <p:txBody>
-          <a:bodyPr rtlCol="0" anchor="ctr"/>
-          <a:lstStyle/>
-          <a:p>
-            <a:pPr algn="ctr"/>
-          </a:p>
-        </p:txBody>
-      </p:sp>
-      <p:sp>
-        <p:nvSpPr>
-          <p:cNvPr id="23" name="Rectangle 22"/>
-          <p:cNvSpPr/>
-          <p:nvPr/>
-        </p:nvSpPr>
-        <p:spPr>
-          <a:xfrm>
-            <a:off x="550000" y="5102500"/>
-            <a:ext cx="70000" cy="1147500"/>
-          </a:xfrm>
-          <a:prstGeom prst="rect">
-            <a:avLst/>
-          </a:prstGeom>
-          <a:solidFill>
-            <a:srgbClr val="B7791F"/>
-          </a:solidFill>
-          <a:ln>
-            <a:noFill/>
-          </a:ln>
-          <a:effectLst/>
-        </p:spPr>
-        <p:style>
-          <a:lnRef idx="1">
-            <a:schemeClr val="accent1"/>
-          </a:lnRef>
-          <a:fillRef idx="3">
-            <a:schemeClr val="accent1"/>
-          </a:fillRef>
-          <a:effectRef idx="2">
-            <a:schemeClr val="accent1"/>
-          </a:effectRef>
-          <a:fontRef idx="minor">
-            <a:schemeClr val="lt1"/>
-          </a:fontRef>
-        </p:style>
-        <p:txBody>
-          <a:bodyPr rtlCol="0" anchor="ctr"/>
-          <a:lstStyle/>
-          <a:p>
-            <a:pPr algn="ctr"/>
-          </a:p>
-        </p:txBody>
-      </p:sp>
-      <p:sp>
-        <p:nvSpPr>
-          <p:cNvPr id="24" name="Oval 23"/>
-          <p:cNvSpPr/>
-          <p:nvPr/>
-        </p:nvSpPr>
-        <p:spPr>
-          <a:xfrm>
-            <a:off x="800000" y="5446250"/>
-            <a:ext cx="460000" cy="460000"/>
-          </a:xfrm>
-          <a:prstGeom prst="ellipse">
-            <a:avLst/>
-          </a:prstGeom>
-          <a:solidFill>
-            <a:srgbClr val="B7791F"/>
-          </a:solidFill>
-          <a:ln>
-            <a:noFill/>
-          </a:ln>
-          <a:effectLst/>
-        </p:spPr>
-        <p:style>
-          <a:lnRef idx="1">
-            <a:schemeClr val="accent1"/>
-          </a:lnRef>
-          <a:fillRef idx="3">
-            <a:schemeClr val="accent1"/>
-          </a:fillRef>
-          <a:effectRef idx="2">
-            <a:schemeClr val="accent1"/>
-          </a:effectRef>
-          <a:fontRef idx="minor">
-            <a:schemeClr val="lt1"/>
-          </a:fontRef>
-        </p:style>
-        <p:txBody>
-          <a:bodyPr rtlCol="0" anchor="ctr" lIns="0" rIns="0"/>
-          <a:lstStyle/>
-          <a:p>
-            <a:pPr algn="ctr"/>
+          <a:p>
+            <a:pPr>
+              <a:spcBef>
+                <a:spcPts val="400"/>
+              </a:spcBef>
+            </a:pPr>
             <a:r>
-              <a:rPr sz="1600" b="1">
+              <a:rPr sz="1400">
                 <a:solidFill>
-                  <a:srgbClr val="FFFFFF"/>
+                  <a:srgbClr val="334055"/>
                 </a:solidFill>
                 <a:latin typeface="Calibri"/>
               </a:rPr>
-              <a:t>4</a:t>
-            </a:r>
-          </a:p>
-        </p:txBody>
-      </p:sp>
-      <p:sp>
-        <p:nvSpPr>
-          <p:cNvPr id="25" name="TextBox 24"/>
-          <p:cNvSpPr txBox="1"/>
-          <p:nvPr/>
-        </p:nvSpPr>
-        <p:spPr>
-          <a:xfrm>
-            <a:off x="1450000" y="5102500"/>
-            <a:ext cx="10050000" cy="1147500"/>
-          </a:xfrm>
-          <a:prstGeom prst="rect">
-            <a:avLst/>
-          </a:prstGeom>
-          <a:noFill/>
-        </p:spPr>
-        <p:txBody>
-          <a:bodyPr wrap="square" anchor="ctr" lIns="50800" rIns="50800">
-            <a:spAutoFit/>
-          </a:bodyPr>
-          <a:lstStyle/>
-          <a:p>
-            <a:pPr algn="l"/>
-            <a:r>
-              <a:rPr sz="1400" b="0">
-                <a:solidFill>
-                  <a:srgbClr val="1B2430"/>
-                </a:solidFill>
-                <a:latin typeface="Calibri"/>
-              </a:rPr>
-              <a:t>Aloqa narxini baholash uchun oddiy model foydali: M baytli xabarni uzatish vaqti t = α + M / β, bu yerda α — kechikish (latency, InfiniBand da 1–2 mks, PCIe da 5–10 mks, Ethernet TCP da…</a:t>
+              <a:t>Agar ketma-ket qism vaqti o'zgarmas va parallel qism protsessorlar soniga proporsional o'ssa, masshtablangan tezlashuv S(p) = f + (1 − f) × p — deyarli chiziqli.</a:t>
             </a:r>
           </a:p>
         </p:txBody>
@@ -28063,7 +29675,7 @@
               <p:cTn id="2" dur="indefinite" nodeType="mainSeq">
                 <p:childTnLst>
                   <p:par>
-                    <p:cTn id="103" fill="hold">
+                    <p:cTn id="79" fill="hold">
                       <p:stCondLst>
                         <p:cond delay="indefinite"/>
                         <p:cond evt="onBegin" delay="0">
@@ -29171,366 +30783,6 @@
                                         <p:cTn id="78" dur="550" fill="hold"/>
                                         <p:tgtEl>
                                           <p:spTgt spid="21"/>
-                                        </p:tgtEl>
-                                        <p:attrNameLst>
-                                          <p:attrName>ppt_y</p:attrName>
-                                        </p:attrNameLst>
-                                      </p:cBhvr>
-                                      <p:tavLst>
-                                        <p:tav tm="0">
-                                          <p:val>
-                                            <p:strVal val="#ppt_y+.08"/>
-                                          </p:val>
-                                        </p:tav>
-                                        <p:tav tm="100000">
-                                          <p:val>
-                                            <p:strVal val="#ppt_y"/>
-                                          </p:val>
-                                        </p:tav>
-                                      </p:tavLst>
-                                    </p:anim>
-                                  </p:childTnLst>
-                                </p:cTn>
-                              </p:par>
-                            </p:childTnLst>
-                          </p:cTn>
-                        </p:par>
-                        <p:par>
-                          <p:cTn id="79" fill="hold">
-                            <p:stCondLst>
-                              <p:cond delay="880"/>
-                            </p:stCondLst>
-                            <p:childTnLst>
-                              <p:par>
-                                <p:cTn id="80" presetID="42" presetClass="entr" presetSubtype="0" fill="hold" grpId="0" nodeType="afterEffect">
-                                  <p:stCondLst>
-                                    <p:cond delay="0"/>
-                                  </p:stCondLst>
-                                  <p:childTnLst>
-                                    <p:set>
-                                      <p:cBhvr>
-                                        <p:cTn id="81" dur="1" fill="hold">
-                                          <p:stCondLst>
-                                            <p:cond delay="0"/>
-                                          </p:stCondLst>
-                                        </p:cTn>
-                                        <p:tgtEl>
-                                          <p:spTgt spid="22"/>
-                                        </p:tgtEl>
-                                        <p:attrNameLst>
-                                          <p:attrName>style.visibility</p:attrName>
-                                        </p:attrNameLst>
-                                      </p:cBhvr>
-                                      <p:to>
-                                        <p:strVal val="visible"/>
-                                      </p:to>
-                                    </p:set>
-                                    <p:animEffect transition="in" filter="fade">
-                                      <p:cBhvr>
-                                        <p:cTn id="82" dur="550"/>
-                                        <p:tgtEl>
-                                          <p:spTgt spid="22"/>
-                                        </p:tgtEl>
-                                      </p:cBhvr>
-                                    </p:animEffect>
-                                    <p:anim calcmode="lin" valueType="num">
-                                      <p:cBhvr additive="base">
-                                        <p:cTn id="83" dur="550" fill="hold"/>
-                                        <p:tgtEl>
-                                          <p:spTgt spid="22"/>
-                                        </p:tgtEl>
-                                        <p:attrNameLst>
-                                          <p:attrName>ppt_x</p:attrName>
-                                        </p:attrNameLst>
-                                      </p:cBhvr>
-                                      <p:tavLst>
-                                        <p:tav tm="0">
-                                          <p:val>
-                                            <p:strVal val="#ppt_x"/>
-                                          </p:val>
-                                        </p:tav>
-                                        <p:tav tm="100000">
-                                          <p:val>
-                                            <p:strVal val="#ppt_x"/>
-                                          </p:val>
-                                        </p:tav>
-                                      </p:tavLst>
-                                    </p:anim>
-                                    <p:anim calcmode="lin" valueType="num">
-                                      <p:cBhvr additive="base">
-                                        <p:cTn id="84" dur="550" fill="hold"/>
-                                        <p:tgtEl>
-                                          <p:spTgt spid="22"/>
-                                        </p:tgtEl>
-                                        <p:attrNameLst>
-                                          <p:attrName>ppt_y</p:attrName>
-                                        </p:attrNameLst>
-                                      </p:cBhvr>
-                                      <p:tavLst>
-                                        <p:tav tm="0">
-                                          <p:val>
-                                            <p:strVal val="#ppt_y+.08"/>
-                                          </p:val>
-                                        </p:tav>
-                                        <p:tav tm="100000">
-                                          <p:val>
-                                            <p:strVal val="#ppt_y"/>
-                                          </p:val>
-                                        </p:tav>
-                                      </p:tavLst>
-                                    </p:anim>
-                                  </p:childTnLst>
-                                </p:cTn>
-                              </p:par>
-                            </p:childTnLst>
-                          </p:cTn>
-                        </p:par>
-                        <p:par>
-                          <p:cTn id="85" fill="hold">
-                            <p:stCondLst>
-                              <p:cond delay="880"/>
-                            </p:stCondLst>
-                            <p:childTnLst>
-                              <p:par>
-                                <p:cTn id="86" presetID="42" presetClass="entr" presetSubtype="0" fill="hold" grpId="0" nodeType="afterEffect">
-                                  <p:stCondLst>
-                                    <p:cond delay="0"/>
-                                  </p:stCondLst>
-                                  <p:childTnLst>
-                                    <p:set>
-                                      <p:cBhvr>
-                                        <p:cTn id="87" dur="1" fill="hold">
-                                          <p:stCondLst>
-                                            <p:cond delay="0"/>
-                                          </p:stCondLst>
-                                        </p:cTn>
-                                        <p:tgtEl>
-                                          <p:spTgt spid="23"/>
-                                        </p:tgtEl>
-                                        <p:attrNameLst>
-                                          <p:attrName>style.visibility</p:attrName>
-                                        </p:attrNameLst>
-                                      </p:cBhvr>
-                                      <p:to>
-                                        <p:strVal val="visible"/>
-                                      </p:to>
-                                    </p:set>
-                                    <p:animEffect transition="in" filter="fade">
-                                      <p:cBhvr>
-                                        <p:cTn id="88" dur="550"/>
-                                        <p:tgtEl>
-                                          <p:spTgt spid="23"/>
-                                        </p:tgtEl>
-                                      </p:cBhvr>
-                                    </p:animEffect>
-                                    <p:anim calcmode="lin" valueType="num">
-                                      <p:cBhvr additive="base">
-                                        <p:cTn id="89" dur="550" fill="hold"/>
-                                        <p:tgtEl>
-                                          <p:spTgt spid="23"/>
-                                        </p:tgtEl>
-                                        <p:attrNameLst>
-                                          <p:attrName>ppt_x</p:attrName>
-                                        </p:attrNameLst>
-                                      </p:cBhvr>
-                                      <p:tavLst>
-                                        <p:tav tm="0">
-                                          <p:val>
-                                            <p:strVal val="#ppt_x"/>
-                                          </p:val>
-                                        </p:tav>
-                                        <p:tav tm="100000">
-                                          <p:val>
-                                            <p:strVal val="#ppt_x"/>
-                                          </p:val>
-                                        </p:tav>
-                                      </p:tavLst>
-                                    </p:anim>
-                                    <p:anim calcmode="lin" valueType="num">
-                                      <p:cBhvr additive="base">
-                                        <p:cTn id="90" dur="550" fill="hold"/>
-                                        <p:tgtEl>
-                                          <p:spTgt spid="23"/>
-                                        </p:tgtEl>
-                                        <p:attrNameLst>
-                                          <p:attrName>ppt_y</p:attrName>
-                                        </p:attrNameLst>
-                                      </p:cBhvr>
-                                      <p:tavLst>
-                                        <p:tav tm="0">
-                                          <p:val>
-                                            <p:strVal val="#ppt_y+.08"/>
-                                          </p:val>
-                                        </p:tav>
-                                        <p:tav tm="100000">
-                                          <p:val>
-                                            <p:strVal val="#ppt_y"/>
-                                          </p:val>
-                                        </p:tav>
-                                      </p:tavLst>
-                                    </p:anim>
-                                  </p:childTnLst>
-                                </p:cTn>
-                              </p:par>
-                            </p:childTnLst>
-                          </p:cTn>
-                        </p:par>
-                        <p:par>
-                          <p:cTn id="91" fill="hold">
-                            <p:stCondLst>
-                              <p:cond delay="880"/>
-                            </p:stCondLst>
-                            <p:childTnLst>
-                              <p:par>
-                                <p:cTn id="92" presetID="53" presetClass="entr" presetSubtype="16" fill="hold" grpId="0" nodeType="afterEffect">
-                                  <p:stCondLst>
-                                    <p:cond delay="0"/>
-                                  </p:stCondLst>
-                                  <p:childTnLst>
-                                    <p:set>
-                                      <p:cBhvr>
-                                        <p:cTn id="93" dur="1" fill="hold">
-                                          <p:stCondLst>
-                                            <p:cond delay="0"/>
-                                          </p:stCondLst>
-                                        </p:cTn>
-                                        <p:tgtEl>
-                                          <p:spTgt spid="24"/>
-                                        </p:tgtEl>
-                                        <p:attrNameLst>
-                                          <p:attrName>style.visibility</p:attrName>
-                                        </p:attrNameLst>
-                                      </p:cBhvr>
-                                      <p:to>
-                                        <p:strVal val="visible"/>
-                                      </p:to>
-                                    </p:set>
-                                    <p:animEffect transition="in" filter="fade">
-                                      <p:cBhvr>
-                                        <p:cTn id="94" dur="550"/>
-                                        <p:tgtEl>
-                                          <p:spTgt spid="24"/>
-                                        </p:tgtEl>
-                                      </p:cBhvr>
-                                    </p:animEffect>
-                                    <p:anim calcmode="lin" valueType="num">
-                                      <p:cBhvr additive="base">
-                                        <p:cTn id="95" dur="550" fill="hold"/>
-                                        <p:tgtEl>
-                                          <p:spTgt spid="24"/>
-                                        </p:tgtEl>
-                                        <p:attrNameLst>
-                                          <p:attrName>ppt_w</p:attrName>
-                                        </p:attrNameLst>
-                                      </p:cBhvr>
-                                      <p:tavLst>
-                                        <p:tav tm="0">
-                                          <p:val>
-                                            <p:strVal val="0"/>
-                                          </p:val>
-                                        </p:tav>
-                                        <p:tav tm="100000">
-                                          <p:val>
-                                            <p:strVal val="#ppt_w"/>
-                                          </p:val>
-                                        </p:tav>
-                                      </p:tavLst>
-                                    </p:anim>
-                                    <p:anim calcmode="lin" valueType="num">
-                                      <p:cBhvr additive="base">
-                                        <p:cTn id="96" dur="550" fill="hold"/>
-                                        <p:tgtEl>
-                                          <p:spTgt spid="24"/>
-                                        </p:tgtEl>
-                                        <p:attrNameLst>
-                                          <p:attrName>ppt_h</p:attrName>
-                                        </p:attrNameLst>
-                                      </p:cBhvr>
-                                      <p:tavLst>
-                                        <p:tav tm="0">
-                                          <p:val>
-                                            <p:strVal val="0"/>
-                                          </p:val>
-                                        </p:tav>
-                                        <p:tav tm="100000">
-                                          <p:val>
-                                            <p:strVal val="#ppt_h"/>
-                                          </p:val>
-                                        </p:tav>
-                                      </p:tavLst>
-                                    </p:anim>
-                                  </p:childTnLst>
-                                </p:cTn>
-                              </p:par>
-                            </p:childTnLst>
-                          </p:cTn>
-                        </p:par>
-                        <p:par>
-                          <p:cTn id="97" fill="hold">
-                            <p:stCondLst>
-                              <p:cond delay="880"/>
-                            </p:stCondLst>
-                            <p:childTnLst>
-                              <p:par>
-                                <p:cTn id="98" presetID="42" presetClass="entr" presetSubtype="0" fill="hold" grpId="0" nodeType="afterEffect">
-                                  <p:stCondLst>
-                                    <p:cond delay="0"/>
-                                  </p:stCondLst>
-                                  <p:childTnLst>
-                                    <p:set>
-                                      <p:cBhvr>
-                                        <p:cTn id="99" dur="1" fill="hold">
-                                          <p:stCondLst>
-                                            <p:cond delay="0"/>
-                                          </p:stCondLst>
-                                        </p:cTn>
-                                        <p:tgtEl>
-                                          <p:spTgt spid="25"/>
-                                        </p:tgtEl>
-                                        <p:attrNameLst>
-                                          <p:attrName>style.visibility</p:attrName>
-                                        </p:attrNameLst>
-                                      </p:cBhvr>
-                                      <p:to>
-                                        <p:strVal val="visible"/>
-                                      </p:to>
-                                    </p:set>
-                                    <p:animEffect transition="in" filter="fade">
-                                      <p:cBhvr>
-                                        <p:cTn id="100" dur="550"/>
-                                        <p:tgtEl>
-                                          <p:spTgt spid="25"/>
-                                        </p:tgtEl>
-                                      </p:cBhvr>
-                                    </p:animEffect>
-                                    <p:anim calcmode="lin" valueType="num">
-                                      <p:cBhvr additive="base">
-                                        <p:cTn id="101" dur="550" fill="hold"/>
-                                        <p:tgtEl>
-                                          <p:spTgt spid="25"/>
-                                        </p:tgtEl>
-                                        <p:attrNameLst>
-                                          <p:attrName>ppt_x</p:attrName>
-                                        </p:attrNameLst>
-                                      </p:cBhvr>
-                                      <p:tavLst>
-                                        <p:tav tm="0">
-                                          <p:val>
-                                            <p:strVal val="#ppt_x"/>
-                                          </p:val>
-                                        </p:tav>
-                                        <p:tav tm="100000">
-                                          <p:val>
-                                            <p:strVal val="#ppt_x"/>
-                                          </p:val>
-                                        </p:tav>
-                                      </p:tavLst>
-                                    </p:anim>
-                                    <p:anim calcmode="lin" valueType="num">
-                                      <p:cBhvr additive="base">
-                                        <p:cTn id="102" dur="550" fill="hold"/>
-                                        <p:tgtEl>
-                                          <p:spTgt spid="25"/>
                                         </p:tgtEl>
                                         <p:attrNameLst>
                                           <p:attrName>ppt_y</p:attrName>
@@ -29593,16 +30845,1003 @@
       <p:bldP spid="19" grpId="0" animBg="1"/>
       <p:bldP spid="20" grpId="0" animBg="1"/>
       <p:bldP spid="21" grpId="0" animBg="1"/>
-      <p:bldP spid="22" grpId="0" animBg="1"/>
-      <p:bldP spid="23" grpId="0" animBg="1"/>
-      <p:bldP spid="24" grpId="0" animBg="1"/>
-      <p:bldP spid="25" grpId="0" animBg="1"/>
     </p:bldLst>
   </p:timing>
 </p:sld>
 </file>
 
 <file path=ppt/slides/slide5.xml><?xml version="1.0" encoding="utf-8"?>
+<p:sld xmlns:a="http://schemas.openxmlformats.org/drawingml/2006/main" xmlns:p="http://schemas.openxmlformats.org/presentationml/2006/main" xmlns:r="http://schemas.openxmlformats.org/officeDocument/2006/relationships">
+  <p:cSld>
+    <p:spTree>
+      <p:nvGrpSpPr>
+        <p:cNvPr id="1" name=""/>
+        <p:cNvGrpSpPr/>
+        <p:nvPr/>
+      </p:nvGrpSpPr>
+      <p:grpSpPr/>
+      <p:sp>
+        <p:nvSpPr>
+          <p:cNvPr id="2" name="Rectangle 1"/>
+          <p:cNvSpPr/>
+          <p:nvPr/>
+        </p:nvSpPr>
+        <p:spPr>
+          <a:xfrm>
+            <a:off x="0" y="0"/>
+            <a:ext cx="12192000" cy="1000000"/>
+          </a:xfrm>
+          <a:prstGeom prst="rect">
+            <a:avLst/>
+          </a:prstGeom>
+          <a:gradFill rotWithShape="1">
+            <a:gsLst>
+              <a:gs pos="0">
+                <a:srgbClr val="1F3A5F"/>
+              </a:gs>
+              <a:gs pos="100000">
+                <a:srgbClr val="2D5C8F"/>
+              </a:gs>
+            </a:gsLst>
+            <a:lin scaled="0" ang="0"/>
+          </a:gradFill>
+          <a:ln>
+            <a:noFill/>
+          </a:ln>
+          <a:effectLst/>
+        </p:spPr>
+        <p:style>
+          <a:lnRef idx="1">
+            <a:schemeClr val="accent1"/>
+          </a:lnRef>
+          <a:fillRef idx="3">
+            <a:schemeClr val="accent1"/>
+          </a:fillRef>
+          <a:effectRef idx="2">
+            <a:schemeClr val="accent1"/>
+          </a:effectRef>
+          <a:fontRef idx="minor">
+            <a:schemeClr val="lt1"/>
+          </a:fontRef>
+        </p:style>
+        <p:txBody>
+          <a:bodyPr rtlCol="0" anchor="ctr"/>
+          <a:lstStyle/>
+          <a:p>
+            <a:pPr algn="ctr"/>
+          </a:p>
+        </p:txBody>
+      </p:sp>
+      <p:sp>
+        <p:nvSpPr>
+          <p:cNvPr id="3" name="Oval 2"/>
+          <p:cNvSpPr/>
+          <p:nvPr/>
+        </p:nvSpPr>
+        <p:spPr>
+          <a:xfrm>
+            <a:off x="11050000" y="-350000"/>
+            <a:ext cx="900000" cy="900000"/>
+          </a:xfrm>
+          <a:prstGeom prst="ellipse">
+            <a:avLst/>
+          </a:prstGeom>
+          <a:solidFill>
+            <a:srgbClr val="3B6EA5"/>
+          </a:solidFill>
+          <a:ln>
+            <a:noFill/>
+          </a:ln>
+          <a:effectLst/>
+        </p:spPr>
+        <p:style>
+          <a:lnRef idx="1">
+            <a:schemeClr val="accent1"/>
+          </a:lnRef>
+          <a:fillRef idx="3">
+            <a:schemeClr val="accent1"/>
+          </a:fillRef>
+          <a:effectRef idx="2">
+            <a:schemeClr val="accent1"/>
+          </a:effectRef>
+          <a:fontRef idx="minor">
+            <a:schemeClr val="lt1"/>
+          </a:fontRef>
+        </p:style>
+        <p:txBody>
+          <a:bodyPr rtlCol="0" anchor="ctr"/>
+          <a:lstStyle/>
+          <a:p>
+            <a:pPr algn="ctr"/>
+          </a:p>
+        </p:txBody>
+      </p:sp>
+      <p:sp>
+        <p:nvSpPr>
+          <p:cNvPr id="4" name="Oval 3"/>
+          <p:cNvSpPr/>
+          <p:nvPr/>
+        </p:nvSpPr>
+        <p:spPr>
+          <a:xfrm>
+            <a:off x="11550000" y="450000"/>
+            <a:ext cx="420000" cy="420000"/>
+          </a:xfrm>
+          <a:prstGeom prst="ellipse">
+            <a:avLst/>
+          </a:prstGeom>
+          <a:solidFill>
+            <a:srgbClr val="0F8B8D"/>
+          </a:solidFill>
+          <a:ln>
+            <a:noFill/>
+          </a:ln>
+          <a:effectLst/>
+        </p:spPr>
+        <p:style>
+          <a:lnRef idx="1">
+            <a:schemeClr val="accent1"/>
+          </a:lnRef>
+          <a:fillRef idx="3">
+            <a:schemeClr val="accent1"/>
+          </a:fillRef>
+          <a:effectRef idx="2">
+            <a:schemeClr val="accent1"/>
+          </a:effectRef>
+          <a:fontRef idx="minor">
+            <a:schemeClr val="lt1"/>
+          </a:fontRef>
+        </p:style>
+        <p:txBody>
+          <a:bodyPr rtlCol="0" anchor="ctr"/>
+          <a:lstStyle/>
+          <a:p>
+            <a:pPr algn="ctr"/>
+          </a:p>
+        </p:txBody>
+      </p:sp>
+      <p:sp>
+        <p:nvSpPr>
+          <p:cNvPr id="5" name="TextBox 4"/>
+          <p:cNvSpPr txBox="1"/>
+          <p:nvPr/>
+        </p:nvSpPr>
+        <p:spPr>
+          <a:xfrm>
+            <a:off x="500000" y="110000"/>
+            <a:ext cx="10300000" cy="300000"/>
+          </a:xfrm>
+          <a:prstGeom prst="rect">
+            <a:avLst/>
+          </a:prstGeom>
+          <a:noFill/>
+        </p:spPr>
+        <p:txBody>
+          <a:bodyPr wrap="square" anchor="t" lIns="50800" rIns="50800">
+            <a:spAutoFit/>
+          </a:bodyPr>
+          <a:lstStyle/>
+          <a:p>
+            <a:pPr algn="l"/>
+            <a:r>
+              <a:rPr sz="1200" b="1">
+                <a:solidFill>
+                  <a:srgbClr val="A9C4E6"/>
+                </a:solidFill>
+                <a:latin typeface="Calibri"/>
+              </a:rPr>
+              <a:t>1-REJA</a:t>
+            </a:r>
+          </a:p>
+        </p:txBody>
+      </p:sp>
+      <p:sp>
+        <p:nvSpPr>
+          <p:cNvPr id="6" name="TextBox 5"/>
+          <p:cNvSpPr txBox="1"/>
+          <p:nvPr/>
+        </p:nvSpPr>
+        <p:spPr>
+          <a:xfrm>
+            <a:off x="500000" y="330000"/>
+            <a:ext cx="10400000" cy="650000"/>
+          </a:xfrm>
+          <a:prstGeom prst="rect">
+            <a:avLst/>
+          </a:prstGeom>
+          <a:noFill/>
+        </p:spPr>
+        <p:txBody>
+          <a:bodyPr wrap="square" anchor="ctr" lIns="50800" rIns="50800">
+            <a:spAutoFit/>
+          </a:bodyPr>
+          <a:lstStyle/>
+          <a:p>
+            <a:pPr algn="l"/>
+            <a:r>
+              <a:rPr sz="2600" b="1">
+                <a:solidFill>
+                  <a:srgbClr val="FFFFFF"/>
+                </a:solidFill>
+                <a:latin typeface="Calibri"/>
+              </a:rPr>
+              <a:t>Parallel hisoblashning asosiy tamoyillari</a:t>
+            </a:r>
+          </a:p>
+        </p:txBody>
+      </p:sp>
+      <p:sp>
+        <p:nvSpPr>
+          <p:cNvPr id="7" name="Rectangle 6"/>
+          <p:cNvSpPr/>
+          <p:nvPr/>
+        </p:nvSpPr>
+        <p:spPr>
+          <a:xfrm>
+            <a:off x="0" y="1000000"/>
+            <a:ext cx="12192000" cy="45000"/>
+          </a:xfrm>
+          <a:prstGeom prst="rect">
+            <a:avLst/>
+          </a:prstGeom>
+          <a:solidFill>
+            <a:srgbClr val="0F8B8D"/>
+          </a:solidFill>
+          <a:ln>
+            <a:noFill/>
+          </a:ln>
+          <a:effectLst/>
+        </p:spPr>
+        <p:style>
+          <a:lnRef idx="1">
+            <a:schemeClr val="accent1"/>
+          </a:lnRef>
+          <a:fillRef idx="3">
+            <a:schemeClr val="accent1"/>
+          </a:fillRef>
+          <a:effectRef idx="2">
+            <a:schemeClr val="accent1"/>
+          </a:effectRef>
+          <a:fontRef idx="minor">
+            <a:schemeClr val="lt1"/>
+          </a:fontRef>
+        </p:style>
+        <p:txBody>
+          <a:bodyPr rtlCol="0" anchor="ctr"/>
+          <a:lstStyle/>
+          <a:p>
+            <a:pPr algn="ctr"/>
+          </a:p>
+        </p:txBody>
+      </p:sp>
+      <p:sp>
+        <p:nvSpPr>
+          <p:cNvPr id="8" name="TextBox 7"/>
+          <p:cNvSpPr txBox="1"/>
+          <p:nvPr/>
+        </p:nvSpPr>
+        <p:spPr>
+          <a:xfrm>
+            <a:off x="500000" y="6420000"/>
+            <a:ext cx="9500000" cy="300000"/>
+          </a:xfrm>
+          <a:prstGeom prst="rect">
+            <a:avLst/>
+          </a:prstGeom>
+          <a:noFill/>
+        </p:spPr>
+        <p:txBody>
+          <a:bodyPr wrap="square" anchor="t" lIns="50800" rIns="50800">
+            <a:spAutoFit/>
+          </a:bodyPr>
+          <a:lstStyle/>
+          <a:p>
+            <a:pPr algn="l"/>
+            <a:r>
+              <a:rPr sz="1000" b="0">
+                <a:solidFill>
+                  <a:srgbClr val="5B6878"/>
+                </a:solidFill>
+                <a:latin typeface="Calibri"/>
+              </a:rPr>
+              <a:t>M3 · Sun'iy intellekt tizimlarida parallel va taqsimlangan hisoblash texnologiyalari</a:t>
+            </a:r>
+          </a:p>
+        </p:txBody>
+      </p:sp>
+      <p:sp>
+        <p:nvSpPr>
+          <p:cNvPr id="9" name="TextBox 8"/>
+          <p:cNvSpPr txBox="1"/>
+          <p:nvPr/>
+        </p:nvSpPr>
+        <p:spPr>
+          <a:xfrm>
+            <a:off x="10600000" y="6420000"/>
+            <a:ext cx="1100000" cy="300000"/>
+          </a:xfrm>
+          <a:prstGeom prst="rect">
+            <a:avLst/>
+          </a:prstGeom>
+          <a:noFill/>
+        </p:spPr>
+        <p:txBody>
+          <a:bodyPr wrap="square" anchor="t" lIns="50800" rIns="50800">
+            <a:spAutoFit/>
+          </a:bodyPr>
+          <a:lstStyle/>
+          <a:p>
+            <a:pPr algn="r"/>
+            <a:r>
+              <a:rPr sz="1000" b="0">
+                <a:solidFill>
+                  <a:srgbClr val="5B6878"/>
+                </a:solidFill>
+                <a:latin typeface="Calibri"/>
+              </a:rPr>
+              <a:t>5</a:t>
+            </a:r>
+          </a:p>
+        </p:txBody>
+      </p:sp>
+      <p:sp>
+        <p:nvSpPr>
+          <p:cNvPr id="10" name="Rounded Rectangle 9"/>
+          <p:cNvSpPr/>
+          <p:nvPr/>
+        </p:nvSpPr>
+        <p:spPr>
+          <a:xfrm>
+            <a:off x="550000" y="2755036"/>
+            <a:ext cx="11100000" cy="2039928"/>
+          </a:xfrm>
+          <a:prstGeom prst="roundRect">
+            <a:avLst>
+              <a:gd name="adj" fmla="val 8000"/>
+            </a:avLst>
+          </a:prstGeom>
+          <a:solidFill>
+            <a:srgbClr val="F5F8FC"/>
+          </a:solidFill>
+          <a:ln>
+            <a:noFill/>
+          </a:ln>
+          <a:effectLst/>
+        </p:spPr>
+        <p:style>
+          <a:lnRef idx="1">
+            <a:schemeClr val="accent1"/>
+          </a:lnRef>
+          <a:fillRef idx="3">
+            <a:schemeClr val="accent1"/>
+          </a:fillRef>
+          <a:effectRef idx="2">
+            <a:schemeClr val="accent1"/>
+          </a:effectRef>
+          <a:fontRef idx="minor">
+            <a:schemeClr val="lt1"/>
+          </a:fontRef>
+        </p:style>
+        <p:txBody>
+          <a:bodyPr rtlCol="0" anchor="ctr"/>
+          <a:lstStyle/>
+          <a:p>
+            <a:pPr algn="ctr"/>
+          </a:p>
+        </p:txBody>
+      </p:sp>
+      <p:sp>
+        <p:nvSpPr>
+          <p:cNvPr id="11" name="Rectangle 10"/>
+          <p:cNvSpPr/>
+          <p:nvPr/>
+        </p:nvSpPr>
+        <p:spPr>
+          <a:xfrm>
+            <a:off x="550000" y="2755036"/>
+            <a:ext cx="70000" cy="2039928"/>
+          </a:xfrm>
+          <a:prstGeom prst="rect">
+            <a:avLst/>
+          </a:prstGeom>
+          <a:solidFill>
+            <a:srgbClr val="B7791F"/>
+          </a:solidFill>
+          <a:ln>
+            <a:noFill/>
+          </a:ln>
+          <a:effectLst/>
+        </p:spPr>
+        <p:style>
+          <a:lnRef idx="1">
+            <a:schemeClr val="accent1"/>
+          </a:lnRef>
+          <a:fillRef idx="3">
+            <a:schemeClr val="accent1"/>
+          </a:fillRef>
+          <a:effectRef idx="2">
+            <a:schemeClr val="accent1"/>
+          </a:effectRef>
+          <a:fontRef idx="minor">
+            <a:schemeClr val="lt1"/>
+          </a:fontRef>
+        </p:style>
+        <p:txBody>
+          <a:bodyPr rtlCol="0" anchor="ctr"/>
+          <a:lstStyle/>
+          <a:p>
+            <a:pPr algn="ctr"/>
+          </a:p>
+        </p:txBody>
+      </p:sp>
+      <p:sp>
+        <p:nvSpPr>
+          <p:cNvPr id="12" name="Oval 11"/>
+          <p:cNvSpPr/>
+          <p:nvPr/>
+        </p:nvSpPr>
+        <p:spPr>
+          <a:xfrm>
+            <a:off x="780000" y="3565000"/>
+            <a:ext cx="420000" cy="420000"/>
+          </a:xfrm>
+          <a:prstGeom prst="ellipse">
+            <a:avLst/>
+          </a:prstGeom>
+          <a:solidFill>
+            <a:srgbClr val="B7791F"/>
+          </a:solidFill>
+          <a:ln>
+            <a:noFill/>
+          </a:ln>
+          <a:effectLst/>
+        </p:spPr>
+        <p:style>
+          <a:lnRef idx="1">
+            <a:schemeClr val="accent1"/>
+          </a:lnRef>
+          <a:fillRef idx="3">
+            <a:schemeClr val="accent1"/>
+          </a:fillRef>
+          <a:effectRef idx="2">
+            <a:schemeClr val="accent1"/>
+          </a:effectRef>
+          <a:fontRef idx="minor">
+            <a:schemeClr val="lt1"/>
+          </a:fontRef>
+        </p:style>
+        <p:txBody>
+          <a:bodyPr rtlCol="0" anchor="ctr" lIns="0" rIns="0"/>
+          <a:lstStyle/>
+          <a:p>
+            <a:pPr algn="ctr"/>
+            <a:r>
+              <a:rPr sz="1400" b="1">
+                <a:solidFill>
+                  <a:srgbClr val="FFFFFF"/>
+                </a:solidFill>
+                <a:latin typeface="Calibri"/>
+              </a:rPr>
+              <a:t>4</a:t>
+            </a:r>
+          </a:p>
+        </p:txBody>
+      </p:sp>
+      <p:sp>
+        <p:nvSpPr>
+          <p:cNvPr id="13" name="TextBox 12"/>
+          <p:cNvSpPr txBox="1"/>
+          <p:nvPr/>
+        </p:nvSpPr>
+        <p:spPr>
+          <a:xfrm>
+            <a:off x="1380000" y="2795036"/>
+            <a:ext cx="10150000" cy="1959928"/>
+          </a:xfrm>
+          <a:prstGeom prst="rect">
+            <a:avLst/>
+          </a:prstGeom>
+          <a:noFill/>
+        </p:spPr>
+        <p:txBody>
+          <a:bodyPr wrap="square" anchor="ctr">
+            <a:spAutoFit/>
+          </a:bodyPr>
+          <a:lstStyle/>
+          <a:p>
+            <a:r>
+              <a:rPr sz="1800" b="1">
+                <a:solidFill>
+                  <a:srgbClr val="1F3A5F"/>
+                </a:solidFill>
+                <a:latin typeface="Calibri"/>
+              </a:rPr>
+              <a:t>Aloqa narxini baholash uchun oddiy model foydali: M baytli xabarni uzatish vaqti t = α + M / β, bu yerda α — kechikish (latency, InfiniBand da 1–2 mks, PCIe da 5–10 mks, Ethernet TCP da 20–50 mks), β — o'tkazuvchanlik.</a:t>
+            </a:r>
+          </a:p>
+          <a:p>
+            <a:pPr>
+              <a:spcBef>
+                <a:spcPts val="400"/>
+              </a:spcBef>
+            </a:pPr>
+            <a:r>
+              <a:rPr sz="1700">
+                <a:solidFill>
+                  <a:srgbClr val="334055"/>
+                </a:solidFill>
+                <a:latin typeface="Calibri"/>
+              </a:rPr>
+              <a:t>Kichik xabarlar α bilan, katta xabarlar β bilan cheklanadi; shuning uchun ko'plab kichik gradientlarni bitta katta buferga birlashtirish (bucketing) — DDP ning asosiy optimallashtirishi.</a:t>
+            </a:r>
+          </a:p>
+        </p:txBody>
+      </p:sp>
+    </p:spTree>
+  </p:cSld>
+  <p:clrMapOvr>
+    <a:masterClrMapping/>
+  </p:clrMapOvr>
+  <p:transition spd="med">
+    <p:fade/>
+  </p:transition>
+  <p:timing>
+    <p:tnLst>
+      <p:par>
+        <p:cTn id="1" dur="indefinite" restart="never" nodeType="tmRoot">
+          <p:childTnLst>
+            <p:seq concurrent="1" nextAc="seek">
+              <p:cTn id="2" dur="indefinite" nodeType="mainSeq">
+                <p:childTnLst>
+                  <p:par>
+                    <p:cTn id="31" fill="hold">
+                      <p:stCondLst>
+                        <p:cond delay="indefinite"/>
+                        <p:cond evt="onBegin" delay="0">
+                          <p:tn val="2"/>
+                        </p:cond>
+                      </p:stCondLst>
+                      <p:childTnLst>
+                        <p:par>
+                          <p:cTn id="3" fill="hold">
+                            <p:stCondLst>
+                              <p:cond delay="0"/>
+                            </p:stCondLst>
+                            <p:childTnLst>
+                              <p:par>
+                                <p:cTn id="4" presetID="10" presetClass="entr" presetSubtype="0" fill="hold" grpId="0" nodeType="withEffect">
+                                  <p:stCondLst>
+                                    <p:cond delay="0"/>
+                                  </p:stCondLst>
+                                  <p:childTnLst>
+                                    <p:set>
+                                      <p:cBhvr>
+                                        <p:cTn id="5" dur="1" fill="hold">
+                                          <p:stCondLst>
+                                            <p:cond delay="0"/>
+                                          </p:stCondLst>
+                                        </p:cTn>
+                                        <p:tgtEl>
+                                          <p:spTgt spid="6"/>
+                                        </p:tgtEl>
+                                        <p:attrNameLst>
+                                          <p:attrName>style.visibility</p:attrName>
+                                        </p:attrNameLst>
+                                      </p:cBhvr>
+                                      <p:to>
+                                        <p:strVal val="visible"/>
+                                      </p:to>
+                                    </p:set>
+                                    <p:animEffect transition="in" filter="fade">
+                                      <p:cBhvr>
+                                        <p:cTn id="6" dur="550"/>
+                                        <p:tgtEl>
+                                          <p:spTgt spid="6"/>
+                                        </p:tgtEl>
+                                      </p:cBhvr>
+                                    </p:animEffect>
+                                  </p:childTnLst>
+                                </p:cTn>
+                              </p:par>
+                            </p:childTnLst>
+                          </p:cTn>
+                        </p:par>
+                        <p:par>
+                          <p:cTn id="7" fill="hold">
+                            <p:stCondLst>
+                              <p:cond delay="220"/>
+                            </p:stCondLst>
+                            <p:childTnLst>
+                              <p:par>
+                                <p:cTn id="8" presetID="42" presetClass="entr" presetSubtype="0" fill="hold" grpId="0" nodeType="afterEffect">
+                                  <p:stCondLst>
+                                    <p:cond delay="0"/>
+                                  </p:stCondLst>
+                                  <p:childTnLst>
+                                    <p:set>
+                                      <p:cBhvr>
+                                        <p:cTn id="9" dur="1" fill="hold">
+                                          <p:stCondLst>
+                                            <p:cond delay="0"/>
+                                          </p:stCondLst>
+                                        </p:cTn>
+                                        <p:tgtEl>
+                                          <p:spTgt spid="10"/>
+                                        </p:tgtEl>
+                                        <p:attrNameLst>
+                                          <p:attrName>style.visibility</p:attrName>
+                                        </p:attrNameLst>
+                                      </p:cBhvr>
+                                      <p:to>
+                                        <p:strVal val="visible"/>
+                                      </p:to>
+                                    </p:set>
+                                    <p:animEffect transition="in" filter="fade">
+                                      <p:cBhvr>
+                                        <p:cTn id="10" dur="550"/>
+                                        <p:tgtEl>
+                                          <p:spTgt spid="10"/>
+                                        </p:tgtEl>
+                                      </p:cBhvr>
+                                    </p:animEffect>
+                                    <p:anim calcmode="lin" valueType="num">
+                                      <p:cBhvr additive="base">
+                                        <p:cTn id="11" dur="550" fill="hold"/>
+                                        <p:tgtEl>
+                                          <p:spTgt spid="10"/>
+                                        </p:tgtEl>
+                                        <p:attrNameLst>
+                                          <p:attrName>ppt_x</p:attrName>
+                                        </p:attrNameLst>
+                                      </p:cBhvr>
+                                      <p:tavLst>
+                                        <p:tav tm="0">
+                                          <p:val>
+                                            <p:strVal val="#ppt_x"/>
+                                          </p:val>
+                                        </p:tav>
+                                        <p:tav tm="100000">
+                                          <p:val>
+                                            <p:strVal val="#ppt_x"/>
+                                          </p:val>
+                                        </p:tav>
+                                      </p:tavLst>
+                                    </p:anim>
+                                    <p:anim calcmode="lin" valueType="num">
+                                      <p:cBhvr additive="base">
+                                        <p:cTn id="12" dur="550" fill="hold"/>
+                                        <p:tgtEl>
+                                          <p:spTgt spid="10"/>
+                                        </p:tgtEl>
+                                        <p:attrNameLst>
+                                          <p:attrName>ppt_y</p:attrName>
+                                        </p:attrNameLst>
+                                      </p:cBhvr>
+                                      <p:tavLst>
+                                        <p:tav tm="0">
+                                          <p:val>
+                                            <p:strVal val="#ppt_y+.08"/>
+                                          </p:val>
+                                        </p:tav>
+                                        <p:tav tm="100000">
+                                          <p:val>
+                                            <p:strVal val="#ppt_y"/>
+                                          </p:val>
+                                        </p:tav>
+                                      </p:tavLst>
+                                    </p:anim>
+                                  </p:childTnLst>
+                                </p:cTn>
+                              </p:par>
+                            </p:childTnLst>
+                          </p:cTn>
+                        </p:par>
+                        <p:par>
+                          <p:cTn id="13" fill="hold">
+                            <p:stCondLst>
+                              <p:cond delay="220"/>
+                            </p:stCondLst>
+                            <p:childTnLst>
+                              <p:par>
+                                <p:cTn id="14" presetID="42" presetClass="entr" presetSubtype="0" fill="hold" grpId="0" nodeType="afterEffect">
+                                  <p:stCondLst>
+                                    <p:cond delay="0"/>
+                                  </p:stCondLst>
+                                  <p:childTnLst>
+                                    <p:set>
+                                      <p:cBhvr>
+                                        <p:cTn id="15" dur="1" fill="hold">
+                                          <p:stCondLst>
+                                            <p:cond delay="0"/>
+                                          </p:stCondLst>
+                                        </p:cTn>
+                                        <p:tgtEl>
+                                          <p:spTgt spid="11"/>
+                                        </p:tgtEl>
+                                        <p:attrNameLst>
+                                          <p:attrName>style.visibility</p:attrName>
+                                        </p:attrNameLst>
+                                      </p:cBhvr>
+                                      <p:to>
+                                        <p:strVal val="visible"/>
+                                      </p:to>
+                                    </p:set>
+                                    <p:animEffect transition="in" filter="fade">
+                                      <p:cBhvr>
+                                        <p:cTn id="16" dur="550"/>
+                                        <p:tgtEl>
+                                          <p:spTgt spid="11"/>
+                                        </p:tgtEl>
+                                      </p:cBhvr>
+                                    </p:animEffect>
+                                    <p:anim calcmode="lin" valueType="num">
+                                      <p:cBhvr additive="base">
+                                        <p:cTn id="17" dur="550" fill="hold"/>
+                                        <p:tgtEl>
+                                          <p:spTgt spid="11"/>
+                                        </p:tgtEl>
+                                        <p:attrNameLst>
+                                          <p:attrName>ppt_x</p:attrName>
+                                        </p:attrNameLst>
+                                      </p:cBhvr>
+                                      <p:tavLst>
+                                        <p:tav tm="0">
+                                          <p:val>
+                                            <p:strVal val="#ppt_x"/>
+                                          </p:val>
+                                        </p:tav>
+                                        <p:tav tm="100000">
+                                          <p:val>
+                                            <p:strVal val="#ppt_x"/>
+                                          </p:val>
+                                        </p:tav>
+                                      </p:tavLst>
+                                    </p:anim>
+                                    <p:anim calcmode="lin" valueType="num">
+                                      <p:cBhvr additive="base">
+                                        <p:cTn id="18" dur="550" fill="hold"/>
+                                        <p:tgtEl>
+                                          <p:spTgt spid="11"/>
+                                        </p:tgtEl>
+                                        <p:attrNameLst>
+                                          <p:attrName>ppt_y</p:attrName>
+                                        </p:attrNameLst>
+                                      </p:cBhvr>
+                                      <p:tavLst>
+                                        <p:tav tm="0">
+                                          <p:val>
+                                            <p:strVal val="#ppt_y+.08"/>
+                                          </p:val>
+                                        </p:tav>
+                                        <p:tav tm="100000">
+                                          <p:val>
+                                            <p:strVal val="#ppt_y"/>
+                                          </p:val>
+                                        </p:tav>
+                                      </p:tavLst>
+                                    </p:anim>
+                                  </p:childTnLst>
+                                </p:cTn>
+                              </p:par>
+                            </p:childTnLst>
+                          </p:cTn>
+                        </p:par>
+                        <p:par>
+                          <p:cTn id="19" fill="hold">
+                            <p:stCondLst>
+                              <p:cond delay="220"/>
+                            </p:stCondLst>
+                            <p:childTnLst>
+                              <p:par>
+                                <p:cTn id="20" presetID="53" presetClass="entr" presetSubtype="16" fill="hold" grpId="0" nodeType="afterEffect">
+                                  <p:stCondLst>
+                                    <p:cond delay="0"/>
+                                  </p:stCondLst>
+                                  <p:childTnLst>
+                                    <p:set>
+                                      <p:cBhvr>
+                                        <p:cTn id="21" dur="1" fill="hold">
+                                          <p:stCondLst>
+                                            <p:cond delay="0"/>
+                                          </p:stCondLst>
+                                        </p:cTn>
+                                        <p:tgtEl>
+                                          <p:spTgt spid="12"/>
+                                        </p:tgtEl>
+                                        <p:attrNameLst>
+                                          <p:attrName>style.visibility</p:attrName>
+                                        </p:attrNameLst>
+                                      </p:cBhvr>
+                                      <p:to>
+                                        <p:strVal val="visible"/>
+                                      </p:to>
+                                    </p:set>
+                                    <p:animEffect transition="in" filter="fade">
+                                      <p:cBhvr>
+                                        <p:cTn id="22" dur="550"/>
+                                        <p:tgtEl>
+                                          <p:spTgt spid="12"/>
+                                        </p:tgtEl>
+                                      </p:cBhvr>
+                                    </p:animEffect>
+                                    <p:anim calcmode="lin" valueType="num">
+                                      <p:cBhvr additive="base">
+                                        <p:cTn id="23" dur="550" fill="hold"/>
+                                        <p:tgtEl>
+                                          <p:spTgt spid="12"/>
+                                        </p:tgtEl>
+                                        <p:attrNameLst>
+                                          <p:attrName>ppt_w</p:attrName>
+                                        </p:attrNameLst>
+                                      </p:cBhvr>
+                                      <p:tavLst>
+                                        <p:tav tm="0">
+                                          <p:val>
+                                            <p:strVal val="0"/>
+                                          </p:val>
+                                        </p:tav>
+                                        <p:tav tm="100000">
+                                          <p:val>
+                                            <p:strVal val="#ppt_w"/>
+                                          </p:val>
+                                        </p:tav>
+                                      </p:tavLst>
+                                    </p:anim>
+                                    <p:anim calcmode="lin" valueType="num">
+                                      <p:cBhvr additive="base">
+                                        <p:cTn id="24" dur="550" fill="hold"/>
+                                        <p:tgtEl>
+                                          <p:spTgt spid="12"/>
+                                        </p:tgtEl>
+                                        <p:attrNameLst>
+                                          <p:attrName>ppt_h</p:attrName>
+                                        </p:attrNameLst>
+                                      </p:cBhvr>
+                                      <p:tavLst>
+                                        <p:tav tm="0">
+                                          <p:val>
+                                            <p:strVal val="0"/>
+                                          </p:val>
+                                        </p:tav>
+                                        <p:tav tm="100000">
+                                          <p:val>
+                                            <p:strVal val="#ppt_h"/>
+                                          </p:val>
+                                        </p:tav>
+                                      </p:tavLst>
+                                    </p:anim>
+                                  </p:childTnLst>
+                                </p:cTn>
+                              </p:par>
+                            </p:childTnLst>
+                          </p:cTn>
+                        </p:par>
+                        <p:par>
+                          <p:cTn id="25" fill="hold">
+                            <p:stCondLst>
+                              <p:cond delay="220"/>
+                            </p:stCondLst>
+                            <p:childTnLst>
+                              <p:par>
+                                <p:cTn id="26" presetID="42" presetClass="entr" presetSubtype="0" fill="hold" grpId="0" nodeType="afterEffect">
+                                  <p:stCondLst>
+                                    <p:cond delay="0"/>
+                                  </p:stCondLst>
+                                  <p:childTnLst>
+                                    <p:set>
+                                      <p:cBhvr>
+                                        <p:cTn id="27" dur="1" fill="hold">
+                                          <p:stCondLst>
+                                            <p:cond delay="0"/>
+                                          </p:stCondLst>
+                                        </p:cTn>
+                                        <p:tgtEl>
+                                          <p:spTgt spid="13"/>
+                                        </p:tgtEl>
+                                        <p:attrNameLst>
+                                          <p:attrName>style.visibility</p:attrName>
+                                        </p:attrNameLst>
+                                      </p:cBhvr>
+                                      <p:to>
+                                        <p:strVal val="visible"/>
+                                      </p:to>
+                                    </p:set>
+                                    <p:animEffect transition="in" filter="fade">
+                                      <p:cBhvr>
+                                        <p:cTn id="28" dur="550"/>
+                                        <p:tgtEl>
+                                          <p:spTgt spid="13"/>
+                                        </p:tgtEl>
+                                      </p:cBhvr>
+                                    </p:animEffect>
+                                    <p:anim calcmode="lin" valueType="num">
+                                      <p:cBhvr additive="base">
+                                        <p:cTn id="29" dur="550" fill="hold"/>
+                                        <p:tgtEl>
+                                          <p:spTgt spid="13"/>
+                                        </p:tgtEl>
+                                        <p:attrNameLst>
+                                          <p:attrName>ppt_x</p:attrName>
+                                        </p:attrNameLst>
+                                      </p:cBhvr>
+                                      <p:tavLst>
+                                        <p:tav tm="0">
+                                          <p:val>
+                                            <p:strVal val="#ppt_x"/>
+                                          </p:val>
+                                        </p:tav>
+                                        <p:tav tm="100000">
+                                          <p:val>
+                                            <p:strVal val="#ppt_x"/>
+                                          </p:val>
+                                        </p:tav>
+                                      </p:tavLst>
+                                    </p:anim>
+                                    <p:anim calcmode="lin" valueType="num">
+                                      <p:cBhvr additive="base">
+                                        <p:cTn id="30" dur="550" fill="hold"/>
+                                        <p:tgtEl>
+                                          <p:spTgt spid="13"/>
+                                        </p:tgtEl>
+                                        <p:attrNameLst>
+                                          <p:attrName>ppt_y</p:attrName>
+                                        </p:attrNameLst>
+                                      </p:cBhvr>
+                                      <p:tavLst>
+                                        <p:tav tm="0">
+                                          <p:val>
+                                            <p:strVal val="#ppt_y+.08"/>
+                                          </p:val>
+                                        </p:tav>
+                                        <p:tav tm="100000">
+                                          <p:val>
+                                            <p:strVal val="#ppt_y"/>
+                                          </p:val>
+                                        </p:tav>
+                                      </p:tavLst>
+                                    </p:anim>
+                                  </p:childTnLst>
+                                </p:cTn>
+                              </p:par>
+                            </p:childTnLst>
+                          </p:cTn>
+                        </p:par>
+                      </p:childTnLst>
+                    </p:cTn>
+                  </p:par>
+                </p:childTnLst>
+              </p:cTn>
+              <p:prevCondLst>
+                <p:cond evt="onPrev" delay="0">
+                  <p:tgtEl>
+                    <p:sldTgt/>
+                  </p:tgtEl>
+                </p:cond>
+              </p:prevCondLst>
+              <p:nextCondLst>
+                <p:cond evt="onNext" delay="0">
+                  <p:tgtEl>
+                    <p:sldTgt/>
+                  </p:tgtEl>
+                </p:cond>
+              </p:nextCondLst>
+            </p:seq>
+          </p:childTnLst>
+        </p:cTn>
+      </p:par>
+    </p:tnLst>
+    <p:bldLst>
+      <p:bldP spid="6" grpId="0" animBg="1"/>
+      <p:bldP spid="10" grpId="0" animBg="1"/>
+      <p:bldP spid="11" grpId="0" animBg="1"/>
+      <p:bldP spid="12" grpId="0" animBg="1"/>
+      <p:bldP spid="13" grpId="0" animBg="1"/>
+    </p:bldLst>
+  </p:timing>
+</p:sld>
+</file>
+
+<file path=ppt/slides/slide6.xml><?xml version="1.0" encoding="utf-8"?>
 <p:sld xmlns:a="http://schemas.openxmlformats.org/drawingml/2006/main" xmlns:p="http://schemas.openxmlformats.org/presentationml/2006/main" xmlns:r="http://schemas.openxmlformats.org/officeDocument/2006/relationships">
   <p:cSld>
     <p:spTree>
@@ -30514,7 +32753,7 @@
 </p:sld>
 </file>
 
-<file path=ppt/slides/slide6.xml><?xml version="1.0" encoding="utf-8"?>
+<file path=ppt/slides/slide7.xml><?xml version="1.0" encoding="utf-8"?>
 <p:sld xmlns:a="http://schemas.openxmlformats.org/drawingml/2006/main" xmlns:p="http://schemas.openxmlformats.org/presentationml/2006/main" xmlns:r="http://schemas.openxmlformats.org/officeDocument/2006/relationships">
   <p:cSld>
     <p:spTree>
@@ -30843,7 +33082,7 @@
                 </a:solidFill>
                 <a:latin typeface="Calibri"/>
               </a:rPr>
-              <a:t>6</a:t>
+              <a:t>7</a:t>
             </a:r>
           </a:p>
         </p:txBody>
@@ -30856,12 +33095,12 @@
         </p:nvSpPr>
         <p:spPr>
           <a:xfrm>
-            <a:off x="550000" y="2076666"/>
-            <a:ext cx="11100000" cy="1250000"/>
+            <a:off x="550000" y="2132700"/>
+            <a:ext cx="11100000" cy="1587300"/>
           </a:xfrm>
           <a:prstGeom prst="roundRect">
             <a:avLst>
-              <a:gd name="adj" fmla="val 18000"/>
+              <a:gd name="adj" fmla="val 8000"/>
             </a:avLst>
           </a:prstGeom>
           <a:solidFill>
@@ -30902,8 +33141,8 @@
         </p:nvSpPr>
         <p:spPr>
           <a:xfrm>
-            <a:off x="550000" y="2076666"/>
-            <a:ext cx="70000" cy="1250000"/>
+            <a:off x="550000" y="2132700"/>
+            <a:ext cx="70000" cy="1587300"/>
           </a:xfrm>
           <a:prstGeom prst="rect">
             <a:avLst/>
@@ -30946,8 +33185,8 @@
         </p:nvSpPr>
         <p:spPr>
           <a:xfrm>
-            <a:off x="800000" y="2471666"/>
-            <a:ext cx="460000" cy="460000"/>
+            <a:off x="780000" y="2716350"/>
+            <a:ext cx="420000" cy="420000"/>
           </a:xfrm>
           <a:prstGeom prst="ellipse">
             <a:avLst/>
@@ -30980,7 +33219,7 @@
           <a:p>
             <a:pPr algn="ctr"/>
             <a:r>
-              <a:rPr sz="1600" b="1">
+              <a:rPr sz="1400" b="1">
                 <a:solidFill>
                   <a:srgbClr val="FFFFFF"/>
                 </a:solidFill>
@@ -30999,8 +33238,8 @@
         </p:nvSpPr>
         <p:spPr>
           <a:xfrm>
-            <a:off x="1450000" y="2076666"/>
-            <a:ext cx="10050000" cy="1250000"/>
+            <a:off x="1380000" y="2172700"/>
+            <a:ext cx="10150000" cy="1507300"/>
           </a:xfrm>
           <a:prstGeom prst="rect">
             <a:avLst/>
@@ -31008,20 +33247,35 @@
           <a:noFill/>
         </p:spPr>
         <p:txBody>
-          <a:bodyPr wrap="square" anchor="ctr" lIns="50800" rIns="50800">
+          <a:bodyPr wrap="square" anchor="ctr">
             <a:spAutoFit/>
           </a:bodyPr>
           <a:lstStyle/>
           <a:p>
-            <a:pPr algn="l"/>
             <a:r>
-              <a:rPr sz="1600" b="0">
+              <a:rPr sz="1600" b="1">
                 <a:solidFill>
-                  <a:srgbClr val="1B2430"/>
+                  <a:srgbClr val="1F3A5F"/>
                 </a:solidFill>
                 <a:latin typeface="Calibri"/>
               </a:rPr>
-              <a:t>CUDA (Compute Unified Device Architecture) — NVIDIA GPU larini umumiy maqsadli hisoblash uchun dasturlash platformasi. Kirk va Hwu [5] bayon qilgan modelda dasturchi yadro (kernel) — minglab oqim parallel bajaradigan funksiya — yozadi.</a:t>
+              <a:t>CUDA (Compute Unified Device Architecture) — NVIDIA GPU larini umumiy maqsadli hisoblash uchun dasturlash platformasi.</a:t>
+            </a:r>
+          </a:p>
+          <a:p>
+            <a:pPr>
+              <a:spcBef>
+                <a:spcPts val="400"/>
+              </a:spcBef>
+            </a:pPr>
+            <a:r>
+              <a:rPr sz="1500">
+                <a:solidFill>
+                  <a:srgbClr val="334055"/>
+                </a:solidFill>
+                <a:latin typeface="Calibri"/>
+              </a:rPr>
+              <a:t>Kirk va Hwu [5] bayon qilgan modelda dasturchi yadro (kernel) — minglab oqim parallel bajaradigan funksiya — yozadi. Oqimlar uch darajali iyerarxiyaga uyushtiriladi: oqim (thread) → blok (block, 1024 tagacha oqim, bitta SM da bajariladi, umumiy xotira orqali almashadi) → to'r (grid, bloklar to'plami).</a:t>
             </a:r>
           </a:p>
         </p:txBody>
@@ -31034,12 +33288,12 @@
         </p:nvSpPr>
         <p:spPr>
           <a:xfrm>
-            <a:off x="550000" y="3446666"/>
-            <a:ext cx="11100000" cy="1250000"/>
+            <a:off x="550000" y="3830000"/>
+            <a:ext cx="11100000" cy="1587300"/>
           </a:xfrm>
           <a:prstGeom prst="roundRect">
             <a:avLst>
-              <a:gd name="adj" fmla="val 18000"/>
+              <a:gd name="adj" fmla="val 8000"/>
             </a:avLst>
           </a:prstGeom>
           <a:solidFill>
@@ -31080,8 +33334,8 @@
         </p:nvSpPr>
         <p:spPr>
           <a:xfrm>
-            <a:off x="550000" y="3446666"/>
-            <a:ext cx="70000" cy="1250000"/>
+            <a:off x="550000" y="3830000"/>
+            <a:ext cx="70000" cy="1587300"/>
           </a:xfrm>
           <a:prstGeom prst="rect">
             <a:avLst/>
@@ -31124,8 +33378,8 @@
         </p:nvSpPr>
         <p:spPr>
           <a:xfrm>
-            <a:off x="800000" y="3841666"/>
-            <a:ext cx="460000" cy="460000"/>
+            <a:off x="780000" y="4413650"/>
+            <a:ext cx="420000" cy="420000"/>
           </a:xfrm>
           <a:prstGeom prst="ellipse">
             <a:avLst/>
@@ -31158,7 +33412,7 @@
           <a:p>
             <a:pPr algn="ctr"/>
             <a:r>
-              <a:rPr sz="1600" b="1">
+              <a:rPr sz="1400" b="1">
                 <a:solidFill>
                   <a:srgbClr val="FFFFFF"/>
                 </a:solidFill>
@@ -31177,8 +33431,8 @@
         </p:nvSpPr>
         <p:spPr>
           <a:xfrm>
-            <a:off x="1450000" y="3446666"/>
-            <a:ext cx="10050000" cy="1250000"/>
+            <a:off x="1380000" y="3870000"/>
+            <a:ext cx="10150000" cy="1507300"/>
           </a:xfrm>
           <a:prstGeom prst="rect">
             <a:avLst/>
@@ -31186,14 +33440,13 @@
           <a:noFill/>
         </p:spPr>
         <p:txBody>
-          <a:bodyPr wrap="square" anchor="ctr" lIns="50800" rIns="50800">
+          <a:bodyPr wrap="square" anchor="ctr">
             <a:spAutoFit/>
           </a:bodyPr>
           <a:lstStyle/>
           <a:p>
-            <a:pPr algn="l"/>
             <a:r>
-              <a:rPr sz="1600" b="0">
+              <a:rPr sz="1500" b="0">
                 <a:solidFill>
                   <a:srgbClr val="1B2430"/>
                 </a:solidFill>
@@ -32032,7 +34285,7 @@
 </p:sld>
 </file>
 
-<file path=ppt/slides/slide7.xml><?xml version="1.0" encoding="utf-8"?>
+<file path=ppt/slides/slide8.xml><?xml version="1.0" encoding="utf-8"?>
 <p:sld xmlns:a="http://schemas.openxmlformats.org/drawingml/2006/main" xmlns:p="http://schemas.openxmlformats.org/presentationml/2006/main" xmlns:r="http://schemas.openxmlformats.org/officeDocument/2006/relationships">
   <p:cSld>
     <p:spTree>
@@ -32361,7 +34614,7 @@
                 </a:solidFill>
                 <a:latin typeface="Calibri"/>
               </a:rPr>
-              <a:t>7</a:t>
+              <a:t>8</a:t>
             </a:r>
           </a:p>
         </p:txBody>
@@ -33015,7 +35268,7 @@
 </p:sld>
 </file>
 
-<file path=ppt/slides/slide8.xml><?xml version="1.0" encoding="utf-8"?>
+<file path=ppt/slides/slide9.xml><?xml version="1.0" encoding="utf-8"?>
 <p:sld xmlns:a="http://schemas.openxmlformats.org/drawingml/2006/main" xmlns:p="http://schemas.openxmlformats.org/presentationml/2006/main" xmlns:r="http://schemas.openxmlformats.org/officeDocument/2006/relationships">
   <p:cSld>
     <p:spTree>
@@ -33922,1524 +36175,6 @@
       <p:bldP spid="8" grpId="0" animBg="1"/>
       <p:bldP spid="9" grpId="0" animBg="1"/>
       <p:bldP spid="10" grpId="0" animBg="1"/>
-    </p:bldLst>
-  </p:timing>
-</p:sld>
-</file>
-
-<file path=ppt/slides/slide9.xml><?xml version="1.0" encoding="utf-8"?>
-<p:sld xmlns:a="http://schemas.openxmlformats.org/drawingml/2006/main" xmlns:p="http://schemas.openxmlformats.org/presentationml/2006/main" xmlns:r="http://schemas.openxmlformats.org/officeDocument/2006/relationships">
-  <p:cSld>
-    <p:spTree>
-      <p:nvGrpSpPr>
-        <p:cNvPr id="1" name=""/>
-        <p:cNvGrpSpPr/>
-        <p:nvPr/>
-      </p:nvGrpSpPr>
-      <p:grpSpPr/>
-      <p:sp>
-        <p:nvSpPr>
-          <p:cNvPr id="2" name="Rectangle 1"/>
-          <p:cNvSpPr/>
-          <p:nvPr/>
-        </p:nvSpPr>
-        <p:spPr>
-          <a:xfrm>
-            <a:off x="0" y="0"/>
-            <a:ext cx="12192000" cy="1000000"/>
-          </a:xfrm>
-          <a:prstGeom prst="rect">
-            <a:avLst/>
-          </a:prstGeom>
-          <a:gradFill rotWithShape="1">
-            <a:gsLst>
-              <a:gs pos="0">
-                <a:srgbClr val="1F3A5F"/>
-              </a:gs>
-              <a:gs pos="100000">
-                <a:srgbClr val="2D5C8F"/>
-              </a:gs>
-            </a:gsLst>
-            <a:lin scaled="0" ang="0"/>
-          </a:gradFill>
-          <a:ln>
-            <a:noFill/>
-          </a:ln>
-          <a:effectLst/>
-        </p:spPr>
-        <p:style>
-          <a:lnRef idx="1">
-            <a:schemeClr val="accent1"/>
-          </a:lnRef>
-          <a:fillRef idx="3">
-            <a:schemeClr val="accent1"/>
-          </a:fillRef>
-          <a:effectRef idx="2">
-            <a:schemeClr val="accent1"/>
-          </a:effectRef>
-          <a:fontRef idx="minor">
-            <a:schemeClr val="lt1"/>
-          </a:fontRef>
-        </p:style>
-        <p:txBody>
-          <a:bodyPr rtlCol="0" anchor="ctr"/>
-          <a:lstStyle/>
-          <a:p>
-            <a:pPr algn="ctr"/>
-          </a:p>
-        </p:txBody>
-      </p:sp>
-      <p:sp>
-        <p:nvSpPr>
-          <p:cNvPr id="3" name="Oval 2"/>
-          <p:cNvSpPr/>
-          <p:nvPr/>
-        </p:nvSpPr>
-        <p:spPr>
-          <a:xfrm>
-            <a:off x="11050000" y="-350000"/>
-            <a:ext cx="900000" cy="900000"/>
-          </a:xfrm>
-          <a:prstGeom prst="ellipse">
-            <a:avLst/>
-          </a:prstGeom>
-          <a:solidFill>
-            <a:srgbClr val="3B6EA5"/>
-          </a:solidFill>
-          <a:ln>
-            <a:noFill/>
-          </a:ln>
-          <a:effectLst/>
-        </p:spPr>
-        <p:style>
-          <a:lnRef idx="1">
-            <a:schemeClr val="accent1"/>
-          </a:lnRef>
-          <a:fillRef idx="3">
-            <a:schemeClr val="accent1"/>
-          </a:fillRef>
-          <a:effectRef idx="2">
-            <a:schemeClr val="accent1"/>
-          </a:effectRef>
-          <a:fontRef idx="minor">
-            <a:schemeClr val="lt1"/>
-          </a:fontRef>
-        </p:style>
-        <p:txBody>
-          <a:bodyPr rtlCol="0" anchor="ctr"/>
-          <a:lstStyle/>
-          <a:p>
-            <a:pPr algn="ctr"/>
-          </a:p>
-        </p:txBody>
-      </p:sp>
-      <p:sp>
-        <p:nvSpPr>
-          <p:cNvPr id="4" name="Oval 3"/>
-          <p:cNvSpPr/>
-          <p:nvPr/>
-        </p:nvSpPr>
-        <p:spPr>
-          <a:xfrm>
-            <a:off x="11550000" y="450000"/>
-            <a:ext cx="420000" cy="420000"/>
-          </a:xfrm>
-          <a:prstGeom prst="ellipse">
-            <a:avLst/>
-          </a:prstGeom>
-          <a:solidFill>
-            <a:srgbClr val="0F8B8D"/>
-          </a:solidFill>
-          <a:ln>
-            <a:noFill/>
-          </a:ln>
-          <a:effectLst/>
-        </p:spPr>
-        <p:style>
-          <a:lnRef idx="1">
-            <a:schemeClr val="accent1"/>
-          </a:lnRef>
-          <a:fillRef idx="3">
-            <a:schemeClr val="accent1"/>
-          </a:fillRef>
-          <a:effectRef idx="2">
-            <a:schemeClr val="accent1"/>
-          </a:effectRef>
-          <a:fontRef idx="minor">
-            <a:schemeClr val="lt1"/>
-          </a:fontRef>
-        </p:style>
-        <p:txBody>
-          <a:bodyPr rtlCol="0" anchor="ctr"/>
-          <a:lstStyle/>
-          <a:p>
-            <a:pPr algn="ctr"/>
-          </a:p>
-        </p:txBody>
-      </p:sp>
-      <p:sp>
-        <p:nvSpPr>
-          <p:cNvPr id="5" name="TextBox 4"/>
-          <p:cNvSpPr txBox="1"/>
-          <p:nvPr/>
-        </p:nvSpPr>
-        <p:spPr>
-          <a:xfrm>
-            <a:off x="500000" y="110000"/>
-            <a:ext cx="10300000" cy="300000"/>
-          </a:xfrm>
-          <a:prstGeom prst="rect">
-            <a:avLst/>
-          </a:prstGeom>
-          <a:noFill/>
-        </p:spPr>
-        <p:txBody>
-          <a:bodyPr wrap="square" anchor="t" lIns="50800" rIns="50800">
-            <a:spAutoFit/>
-          </a:bodyPr>
-          <a:lstStyle/>
-          <a:p>
-            <a:pPr algn="l"/>
-            <a:r>
-              <a:rPr sz="1200" b="1">
-                <a:solidFill>
-                  <a:srgbClr val="A9C4E6"/>
-                </a:solidFill>
-                <a:latin typeface="Calibri"/>
-              </a:rPr>
-              <a:t>3-REJA</a:t>
-            </a:r>
-          </a:p>
-        </p:txBody>
-      </p:sp>
-      <p:sp>
-        <p:nvSpPr>
-          <p:cNvPr id="6" name="TextBox 5"/>
-          <p:cNvSpPr txBox="1"/>
-          <p:nvPr/>
-        </p:nvSpPr>
-        <p:spPr>
-          <a:xfrm>
-            <a:off x="500000" y="330000"/>
-            <a:ext cx="10400000" cy="650000"/>
-          </a:xfrm>
-          <a:prstGeom prst="rect">
-            <a:avLst/>
-          </a:prstGeom>
-          <a:noFill/>
-        </p:spPr>
-        <p:txBody>
-          <a:bodyPr wrap="square" anchor="ctr" lIns="50800" rIns="50800">
-            <a:spAutoFit/>
-          </a:bodyPr>
-          <a:lstStyle/>
-          <a:p>
-            <a:pPr algn="l"/>
-            <a:r>
-              <a:rPr sz="2600" b="1">
-                <a:solidFill>
-                  <a:srgbClr val="FFFFFF"/>
-                </a:solidFill>
-                <a:latin typeface="Calibri"/>
-              </a:rPr>
-              <a:t>OpenMP: umumiy xotirali parallellik</a:t>
-            </a:r>
-          </a:p>
-        </p:txBody>
-      </p:sp>
-      <p:sp>
-        <p:nvSpPr>
-          <p:cNvPr id="7" name="Rectangle 6"/>
-          <p:cNvSpPr/>
-          <p:nvPr/>
-        </p:nvSpPr>
-        <p:spPr>
-          <a:xfrm>
-            <a:off x="0" y="1000000"/>
-            <a:ext cx="12192000" cy="45000"/>
-          </a:xfrm>
-          <a:prstGeom prst="rect">
-            <a:avLst/>
-          </a:prstGeom>
-          <a:solidFill>
-            <a:srgbClr val="0F8B8D"/>
-          </a:solidFill>
-          <a:ln>
-            <a:noFill/>
-          </a:ln>
-          <a:effectLst/>
-        </p:spPr>
-        <p:style>
-          <a:lnRef idx="1">
-            <a:schemeClr val="accent1"/>
-          </a:lnRef>
-          <a:fillRef idx="3">
-            <a:schemeClr val="accent1"/>
-          </a:fillRef>
-          <a:effectRef idx="2">
-            <a:schemeClr val="accent1"/>
-          </a:effectRef>
-          <a:fontRef idx="minor">
-            <a:schemeClr val="lt1"/>
-          </a:fontRef>
-        </p:style>
-        <p:txBody>
-          <a:bodyPr rtlCol="0" anchor="ctr"/>
-          <a:lstStyle/>
-          <a:p>
-            <a:pPr algn="ctr"/>
-          </a:p>
-        </p:txBody>
-      </p:sp>
-      <p:sp>
-        <p:nvSpPr>
-          <p:cNvPr id="8" name="TextBox 7"/>
-          <p:cNvSpPr txBox="1"/>
-          <p:nvPr/>
-        </p:nvSpPr>
-        <p:spPr>
-          <a:xfrm>
-            <a:off x="500000" y="6420000"/>
-            <a:ext cx="9500000" cy="300000"/>
-          </a:xfrm>
-          <a:prstGeom prst="rect">
-            <a:avLst/>
-          </a:prstGeom>
-          <a:noFill/>
-        </p:spPr>
-        <p:txBody>
-          <a:bodyPr wrap="square" anchor="t" lIns="50800" rIns="50800">
-            <a:spAutoFit/>
-          </a:bodyPr>
-          <a:lstStyle/>
-          <a:p>
-            <a:pPr algn="l"/>
-            <a:r>
-              <a:rPr sz="1000" b="0">
-                <a:solidFill>
-                  <a:srgbClr val="5B6878"/>
-                </a:solidFill>
-                <a:latin typeface="Calibri"/>
-              </a:rPr>
-              <a:t>M3 · Sun'iy intellekt tizimlarida parallel va taqsimlangan hisoblash texnologiyalari</a:t>
-            </a:r>
-          </a:p>
-        </p:txBody>
-      </p:sp>
-      <p:sp>
-        <p:nvSpPr>
-          <p:cNvPr id="9" name="TextBox 8"/>
-          <p:cNvSpPr txBox="1"/>
-          <p:nvPr/>
-        </p:nvSpPr>
-        <p:spPr>
-          <a:xfrm>
-            <a:off x="10600000" y="6420000"/>
-            <a:ext cx="1100000" cy="300000"/>
-          </a:xfrm>
-          <a:prstGeom prst="rect">
-            <a:avLst/>
-          </a:prstGeom>
-          <a:noFill/>
-        </p:spPr>
-        <p:txBody>
-          <a:bodyPr wrap="square" anchor="t" lIns="50800" rIns="50800">
-            <a:spAutoFit/>
-          </a:bodyPr>
-          <a:lstStyle/>
-          <a:p>
-            <a:pPr algn="r"/>
-            <a:r>
-              <a:rPr sz="1000" b="0">
-                <a:solidFill>
-                  <a:srgbClr val="5B6878"/>
-                </a:solidFill>
-                <a:latin typeface="Calibri"/>
-              </a:rPr>
-              <a:t>9</a:t>
-            </a:r>
-          </a:p>
-        </p:txBody>
-      </p:sp>
-      <p:sp>
-        <p:nvSpPr>
-          <p:cNvPr id="10" name="Rounded Rectangle 9"/>
-          <p:cNvSpPr/>
-          <p:nvPr/>
-        </p:nvSpPr>
-        <p:spPr>
-          <a:xfrm>
-            <a:off x="550000" y="2076666"/>
-            <a:ext cx="11100000" cy="1250000"/>
-          </a:xfrm>
-          <a:prstGeom prst="roundRect">
-            <a:avLst>
-              <a:gd name="adj" fmla="val 18000"/>
-            </a:avLst>
-          </a:prstGeom>
-          <a:solidFill>
-            <a:srgbClr val="F5F8FC"/>
-          </a:solidFill>
-          <a:ln>
-            <a:noFill/>
-          </a:ln>
-          <a:effectLst/>
-        </p:spPr>
-        <p:style>
-          <a:lnRef idx="1">
-            <a:schemeClr val="accent1"/>
-          </a:lnRef>
-          <a:fillRef idx="3">
-            <a:schemeClr val="accent1"/>
-          </a:fillRef>
-          <a:effectRef idx="2">
-            <a:schemeClr val="accent1"/>
-          </a:effectRef>
-          <a:fontRef idx="minor">
-            <a:schemeClr val="lt1"/>
-          </a:fontRef>
-        </p:style>
-        <p:txBody>
-          <a:bodyPr rtlCol="0" anchor="ctr"/>
-          <a:lstStyle/>
-          <a:p>
-            <a:pPr algn="ctr"/>
-          </a:p>
-        </p:txBody>
-      </p:sp>
-      <p:sp>
-        <p:nvSpPr>
-          <p:cNvPr id="11" name="Rectangle 10"/>
-          <p:cNvSpPr/>
-          <p:nvPr/>
-        </p:nvSpPr>
-        <p:spPr>
-          <a:xfrm>
-            <a:off x="550000" y="2076666"/>
-            <a:ext cx="70000" cy="1250000"/>
-          </a:xfrm>
-          <a:prstGeom prst="rect">
-            <a:avLst/>
-          </a:prstGeom>
-          <a:solidFill>
-            <a:srgbClr val="2D5C8F"/>
-          </a:solidFill>
-          <a:ln>
-            <a:noFill/>
-          </a:ln>
-          <a:effectLst/>
-        </p:spPr>
-        <p:style>
-          <a:lnRef idx="1">
-            <a:schemeClr val="accent1"/>
-          </a:lnRef>
-          <a:fillRef idx="3">
-            <a:schemeClr val="accent1"/>
-          </a:fillRef>
-          <a:effectRef idx="2">
-            <a:schemeClr val="accent1"/>
-          </a:effectRef>
-          <a:fontRef idx="minor">
-            <a:schemeClr val="lt1"/>
-          </a:fontRef>
-        </p:style>
-        <p:txBody>
-          <a:bodyPr rtlCol="0" anchor="ctr"/>
-          <a:lstStyle/>
-          <a:p>
-            <a:pPr algn="ctr"/>
-          </a:p>
-        </p:txBody>
-      </p:sp>
-      <p:sp>
-        <p:nvSpPr>
-          <p:cNvPr id="12" name="Oval 11"/>
-          <p:cNvSpPr/>
-          <p:nvPr/>
-        </p:nvSpPr>
-        <p:spPr>
-          <a:xfrm>
-            <a:off x="800000" y="2471666"/>
-            <a:ext cx="460000" cy="460000"/>
-          </a:xfrm>
-          <a:prstGeom prst="ellipse">
-            <a:avLst/>
-          </a:prstGeom>
-          <a:solidFill>
-            <a:srgbClr val="2D5C8F"/>
-          </a:solidFill>
-          <a:ln>
-            <a:noFill/>
-          </a:ln>
-          <a:effectLst/>
-        </p:spPr>
-        <p:style>
-          <a:lnRef idx="1">
-            <a:schemeClr val="accent1"/>
-          </a:lnRef>
-          <a:fillRef idx="3">
-            <a:schemeClr val="accent1"/>
-          </a:fillRef>
-          <a:effectRef idx="2">
-            <a:schemeClr val="accent1"/>
-          </a:effectRef>
-          <a:fontRef idx="minor">
-            <a:schemeClr val="lt1"/>
-          </a:fontRef>
-        </p:style>
-        <p:txBody>
-          <a:bodyPr rtlCol="0" anchor="ctr" lIns="0" rIns="0"/>
-          <a:lstStyle/>
-          <a:p>
-            <a:pPr algn="ctr"/>
-            <a:r>
-              <a:rPr sz="1600" b="1">
-                <a:solidFill>
-                  <a:srgbClr val="FFFFFF"/>
-                </a:solidFill>
-                <a:latin typeface="Calibri"/>
-              </a:rPr>
-              <a:t>1</a:t>
-            </a:r>
-          </a:p>
-        </p:txBody>
-      </p:sp>
-      <p:sp>
-        <p:nvSpPr>
-          <p:cNvPr id="13" name="TextBox 12"/>
-          <p:cNvSpPr txBox="1"/>
-          <p:nvPr/>
-        </p:nvSpPr>
-        <p:spPr>
-          <a:xfrm>
-            <a:off x="1450000" y="2076666"/>
-            <a:ext cx="10050000" cy="1250000"/>
-          </a:xfrm>
-          <a:prstGeom prst="rect">
-            <a:avLst/>
-          </a:prstGeom>
-          <a:noFill/>
-        </p:spPr>
-        <p:txBody>
-          <a:bodyPr wrap="square" anchor="ctr" lIns="50800" rIns="50800">
-            <a:spAutoFit/>
-          </a:bodyPr>
-          <a:lstStyle/>
-          <a:p>
-            <a:pPr algn="l"/>
-            <a:r>
-              <a:rPr sz="1600" b="0">
-                <a:solidFill>
-                  <a:srgbClr val="1B2430"/>
-                </a:solidFill>
-                <a:latin typeface="Calibri"/>
-              </a:rPr>
-              <a:t>OpenMP — C, C++ va Fortran uchun kompilyator direktivalari to'plami bo'lib, umumiy xotirali ko'p yadroli tizimda (bitta server) oqimlar darajasidagi parallellikni beradi.</a:t>
-            </a:r>
-          </a:p>
-        </p:txBody>
-      </p:sp>
-      <p:sp>
-        <p:nvSpPr>
-          <p:cNvPr id="14" name="Rounded Rectangle 13"/>
-          <p:cNvSpPr/>
-          <p:nvPr/>
-        </p:nvSpPr>
-        <p:spPr>
-          <a:xfrm>
-            <a:off x="550000" y="3446666"/>
-            <a:ext cx="11100000" cy="1250000"/>
-          </a:xfrm>
-          <a:prstGeom prst="roundRect">
-            <a:avLst>
-              <a:gd name="adj" fmla="val 18000"/>
-            </a:avLst>
-          </a:prstGeom>
-          <a:solidFill>
-            <a:srgbClr val="F5F8FC"/>
-          </a:solidFill>
-          <a:ln>
-            <a:noFill/>
-          </a:ln>
-          <a:effectLst/>
-        </p:spPr>
-        <p:style>
-          <a:lnRef idx="1">
-            <a:schemeClr val="accent1"/>
-          </a:lnRef>
-          <a:fillRef idx="3">
-            <a:schemeClr val="accent1"/>
-          </a:fillRef>
-          <a:effectRef idx="2">
-            <a:schemeClr val="accent1"/>
-          </a:effectRef>
-          <a:fontRef idx="minor">
-            <a:schemeClr val="lt1"/>
-          </a:fontRef>
-        </p:style>
-        <p:txBody>
-          <a:bodyPr rtlCol="0" anchor="ctr"/>
-          <a:lstStyle/>
-          <a:p>
-            <a:pPr algn="ctr"/>
-          </a:p>
-        </p:txBody>
-      </p:sp>
-      <p:sp>
-        <p:nvSpPr>
-          <p:cNvPr id="15" name="Rectangle 14"/>
-          <p:cNvSpPr/>
-          <p:nvPr/>
-        </p:nvSpPr>
-        <p:spPr>
-          <a:xfrm>
-            <a:off x="550000" y="3446666"/>
-            <a:ext cx="70000" cy="1250000"/>
-          </a:xfrm>
-          <a:prstGeom prst="rect">
-            <a:avLst/>
-          </a:prstGeom>
-          <a:solidFill>
-            <a:srgbClr val="0F8B8D"/>
-          </a:solidFill>
-          <a:ln>
-            <a:noFill/>
-          </a:ln>
-          <a:effectLst/>
-        </p:spPr>
-        <p:style>
-          <a:lnRef idx="1">
-            <a:schemeClr val="accent1"/>
-          </a:lnRef>
-          <a:fillRef idx="3">
-            <a:schemeClr val="accent1"/>
-          </a:fillRef>
-          <a:effectRef idx="2">
-            <a:schemeClr val="accent1"/>
-          </a:effectRef>
-          <a:fontRef idx="minor">
-            <a:schemeClr val="lt1"/>
-          </a:fontRef>
-        </p:style>
-        <p:txBody>
-          <a:bodyPr rtlCol="0" anchor="ctr"/>
-          <a:lstStyle/>
-          <a:p>
-            <a:pPr algn="ctr"/>
-          </a:p>
-        </p:txBody>
-      </p:sp>
-      <p:sp>
-        <p:nvSpPr>
-          <p:cNvPr id="16" name="Oval 15"/>
-          <p:cNvSpPr/>
-          <p:nvPr/>
-        </p:nvSpPr>
-        <p:spPr>
-          <a:xfrm>
-            <a:off x="800000" y="3841666"/>
-            <a:ext cx="460000" cy="460000"/>
-          </a:xfrm>
-          <a:prstGeom prst="ellipse">
-            <a:avLst/>
-          </a:prstGeom>
-          <a:solidFill>
-            <a:srgbClr val="0F8B8D"/>
-          </a:solidFill>
-          <a:ln>
-            <a:noFill/>
-          </a:ln>
-          <a:effectLst/>
-        </p:spPr>
-        <p:style>
-          <a:lnRef idx="1">
-            <a:schemeClr val="accent1"/>
-          </a:lnRef>
-          <a:fillRef idx="3">
-            <a:schemeClr val="accent1"/>
-          </a:fillRef>
-          <a:effectRef idx="2">
-            <a:schemeClr val="accent1"/>
-          </a:effectRef>
-          <a:fontRef idx="minor">
-            <a:schemeClr val="lt1"/>
-          </a:fontRef>
-        </p:style>
-        <p:txBody>
-          <a:bodyPr rtlCol="0" anchor="ctr" lIns="0" rIns="0"/>
-          <a:lstStyle/>
-          <a:p>
-            <a:pPr algn="ctr"/>
-            <a:r>
-              <a:rPr sz="1600" b="1">
-                <a:solidFill>
-                  <a:srgbClr val="FFFFFF"/>
-                </a:solidFill>
-                <a:latin typeface="Calibri"/>
-              </a:rPr>
-              <a:t>2</a:t>
-            </a:r>
-          </a:p>
-        </p:txBody>
-      </p:sp>
-      <p:sp>
-        <p:nvSpPr>
-          <p:cNvPr id="17" name="TextBox 16"/>
-          <p:cNvSpPr txBox="1"/>
-          <p:nvPr/>
-        </p:nvSpPr>
-        <p:spPr>
-          <a:xfrm>
-            <a:off x="1450000" y="3446666"/>
-            <a:ext cx="10050000" cy="1250000"/>
-          </a:xfrm>
-          <a:prstGeom prst="rect">
-            <a:avLst/>
-          </a:prstGeom>
-          <a:noFill/>
-        </p:spPr>
-        <p:txBody>
-          <a:bodyPr wrap="square" anchor="ctr" lIns="50800" rIns="50800">
-            <a:spAutoFit/>
-          </a:bodyPr>
-          <a:lstStyle/>
-          <a:p>
-            <a:pPr algn="l"/>
-            <a:r>
-              <a:rPr sz="1600" b="0">
-                <a:solidFill>
-                  <a:srgbClr val="1B2430"/>
-                </a:solidFill>
-                <a:latin typeface="Calibri"/>
-              </a:rPr>
-              <a:t>OpenMP ning asosiy tushunchalari: parallel hudud (fork-join modeli), ish taqsimoti (for, sections, task), ma'lumot muhiti (shared, private, reduction) va sinxronizatsiya (critical, atomic, barrier). OpenMP 4.0 dan boshlab target direktivalari orqali GPU ga…</a:t>
-            </a:r>
-          </a:p>
-        </p:txBody>
-      </p:sp>
-    </p:spTree>
-  </p:cSld>
-  <p:clrMapOvr>
-    <a:masterClrMapping/>
-  </p:clrMapOvr>
-  <p:transition spd="med">
-    <p:fade/>
-  </p:transition>
-  <p:timing>
-    <p:tnLst>
-      <p:par>
-        <p:cTn id="1" dur="indefinite" restart="never" nodeType="tmRoot">
-          <p:childTnLst>
-            <p:seq concurrent="1" nextAc="seek">
-              <p:cTn id="2" dur="indefinite" nodeType="mainSeq">
-                <p:childTnLst>
-                  <p:par>
-                    <p:cTn id="55" fill="hold">
-                      <p:stCondLst>
-                        <p:cond delay="indefinite"/>
-                        <p:cond evt="onBegin" delay="0">
-                          <p:tn val="2"/>
-                        </p:cond>
-                      </p:stCondLst>
-                      <p:childTnLst>
-                        <p:par>
-                          <p:cTn id="3" fill="hold">
-                            <p:stCondLst>
-                              <p:cond delay="0"/>
-                            </p:stCondLst>
-                            <p:childTnLst>
-                              <p:par>
-                                <p:cTn id="4" presetID="10" presetClass="entr" presetSubtype="0" fill="hold" grpId="0" nodeType="withEffect">
-                                  <p:stCondLst>
-                                    <p:cond delay="0"/>
-                                  </p:stCondLst>
-                                  <p:childTnLst>
-                                    <p:set>
-                                      <p:cBhvr>
-                                        <p:cTn id="5" dur="1" fill="hold">
-                                          <p:stCondLst>
-                                            <p:cond delay="0"/>
-                                          </p:stCondLst>
-                                        </p:cTn>
-                                        <p:tgtEl>
-                                          <p:spTgt spid="6"/>
-                                        </p:tgtEl>
-                                        <p:attrNameLst>
-                                          <p:attrName>style.visibility</p:attrName>
-                                        </p:attrNameLst>
-                                      </p:cBhvr>
-                                      <p:to>
-                                        <p:strVal val="visible"/>
-                                      </p:to>
-                                    </p:set>
-                                    <p:animEffect transition="in" filter="fade">
-                                      <p:cBhvr>
-                                        <p:cTn id="6" dur="550"/>
-                                        <p:tgtEl>
-                                          <p:spTgt spid="6"/>
-                                        </p:tgtEl>
-                                      </p:cBhvr>
-                                    </p:animEffect>
-                                  </p:childTnLst>
-                                </p:cTn>
-                              </p:par>
-                            </p:childTnLst>
-                          </p:cTn>
-                        </p:par>
-                        <p:par>
-                          <p:cTn id="7" fill="hold">
-                            <p:stCondLst>
-                              <p:cond delay="220"/>
-                            </p:stCondLst>
-                            <p:childTnLst>
-                              <p:par>
-                                <p:cTn id="8" presetID="42" presetClass="entr" presetSubtype="0" fill="hold" grpId="0" nodeType="afterEffect">
-                                  <p:stCondLst>
-                                    <p:cond delay="0"/>
-                                  </p:stCondLst>
-                                  <p:childTnLst>
-                                    <p:set>
-                                      <p:cBhvr>
-                                        <p:cTn id="9" dur="1" fill="hold">
-                                          <p:stCondLst>
-                                            <p:cond delay="0"/>
-                                          </p:stCondLst>
-                                        </p:cTn>
-                                        <p:tgtEl>
-                                          <p:spTgt spid="10"/>
-                                        </p:tgtEl>
-                                        <p:attrNameLst>
-                                          <p:attrName>style.visibility</p:attrName>
-                                        </p:attrNameLst>
-                                      </p:cBhvr>
-                                      <p:to>
-                                        <p:strVal val="visible"/>
-                                      </p:to>
-                                    </p:set>
-                                    <p:animEffect transition="in" filter="fade">
-                                      <p:cBhvr>
-                                        <p:cTn id="10" dur="550"/>
-                                        <p:tgtEl>
-                                          <p:spTgt spid="10"/>
-                                        </p:tgtEl>
-                                      </p:cBhvr>
-                                    </p:animEffect>
-                                    <p:anim calcmode="lin" valueType="num">
-                                      <p:cBhvr additive="base">
-                                        <p:cTn id="11" dur="550" fill="hold"/>
-                                        <p:tgtEl>
-                                          <p:spTgt spid="10"/>
-                                        </p:tgtEl>
-                                        <p:attrNameLst>
-                                          <p:attrName>ppt_x</p:attrName>
-                                        </p:attrNameLst>
-                                      </p:cBhvr>
-                                      <p:tavLst>
-                                        <p:tav tm="0">
-                                          <p:val>
-                                            <p:strVal val="#ppt_x"/>
-                                          </p:val>
-                                        </p:tav>
-                                        <p:tav tm="100000">
-                                          <p:val>
-                                            <p:strVal val="#ppt_x"/>
-                                          </p:val>
-                                        </p:tav>
-                                      </p:tavLst>
-                                    </p:anim>
-                                    <p:anim calcmode="lin" valueType="num">
-                                      <p:cBhvr additive="base">
-                                        <p:cTn id="12" dur="550" fill="hold"/>
-                                        <p:tgtEl>
-                                          <p:spTgt spid="10"/>
-                                        </p:tgtEl>
-                                        <p:attrNameLst>
-                                          <p:attrName>ppt_y</p:attrName>
-                                        </p:attrNameLst>
-                                      </p:cBhvr>
-                                      <p:tavLst>
-                                        <p:tav tm="0">
-                                          <p:val>
-                                            <p:strVal val="#ppt_y+.08"/>
-                                          </p:val>
-                                        </p:tav>
-                                        <p:tav tm="100000">
-                                          <p:val>
-                                            <p:strVal val="#ppt_y"/>
-                                          </p:val>
-                                        </p:tav>
-                                      </p:tavLst>
-                                    </p:anim>
-                                  </p:childTnLst>
-                                </p:cTn>
-                              </p:par>
-                            </p:childTnLst>
-                          </p:cTn>
-                        </p:par>
-                        <p:par>
-                          <p:cTn id="13" fill="hold">
-                            <p:stCondLst>
-                              <p:cond delay="220"/>
-                            </p:stCondLst>
-                            <p:childTnLst>
-                              <p:par>
-                                <p:cTn id="14" presetID="42" presetClass="entr" presetSubtype="0" fill="hold" grpId="0" nodeType="afterEffect">
-                                  <p:stCondLst>
-                                    <p:cond delay="0"/>
-                                  </p:stCondLst>
-                                  <p:childTnLst>
-                                    <p:set>
-                                      <p:cBhvr>
-                                        <p:cTn id="15" dur="1" fill="hold">
-                                          <p:stCondLst>
-                                            <p:cond delay="0"/>
-                                          </p:stCondLst>
-                                        </p:cTn>
-                                        <p:tgtEl>
-                                          <p:spTgt spid="11"/>
-                                        </p:tgtEl>
-                                        <p:attrNameLst>
-                                          <p:attrName>style.visibility</p:attrName>
-                                        </p:attrNameLst>
-                                      </p:cBhvr>
-                                      <p:to>
-                                        <p:strVal val="visible"/>
-                                      </p:to>
-                                    </p:set>
-                                    <p:animEffect transition="in" filter="fade">
-                                      <p:cBhvr>
-                                        <p:cTn id="16" dur="550"/>
-                                        <p:tgtEl>
-                                          <p:spTgt spid="11"/>
-                                        </p:tgtEl>
-                                      </p:cBhvr>
-                                    </p:animEffect>
-                                    <p:anim calcmode="lin" valueType="num">
-                                      <p:cBhvr additive="base">
-                                        <p:cTn id="17" dur="550" fill="hold"/>
-                                        <p:tgtEl>
-                                          <p:spTgt spid="11"/>
-                                        </p:tgtEl>
-                                        <p:attrNameLst>
-                                          <p:attrName>ppt_x</p:attrName>
-                                        </p:attrNameLst>
-                                      </p:cBhvr>
-                                      <p:tavLst>
-                                        <p:tav tm="0">
-                                          <p:val>
-                                            <p:strVal val="#ppt_x"/>
-                                          </p:val>
-                                        </p:tav>
-                                        <p:tav tm="100000">
-                                          <p:val>
-                                            <p:strVal val="#ppt_x"/>
-                                          </p:val>
-                                        </p:tav>
-                                      </p:tavLst>
-                                    </p:anim>
-                                    <p:anim calcmode="lin" valueType="num">
-                                      <p:cBhvr additive="base">
-                                        <p:cTn id="18" dur="550" fill="hold"/>
-                                        <p:tgtEl>
-                                          <p:spTgt spid="11"/>
-                                        </p:tgtEl>
-                                        <p:attrNameLst>
-                                          <p:attrName>ppt_y</p:attrName>
-                                        </p:attrNameLst>
-                                      </p:cBhvr>
-                                      <p:tavLst>
-                                        <p:tav tm="0">
-                                          <p:val>
-                                            <p:strVal val="#ppt_y+.08"/>
-                                          </p:val>
-                                        </p:tav>
-                                        <p:tav tm="100000">
-                                          <p:val>
-                                            <p:strVal val="#ppt_y"/>
-                                          </p:val>
-                                        </p:tav>
-                                      </p:tavLst>
-                                    </p:anim>
-                                  </p:childTnLst>
-                                </p:cTn>
-                              </p:par>
-                            </p:childTnLst>
-                          </p:cTn>
-                        </p:par>
-                        <p:par>
-                          <p:cTn id="19" fill="hold">
-                            <p:stCondLst>
-                              <p:cond delay="220"/>
-                            </p:stCondLst>
-                            <p:childTnLst>
-                              <p:par>
-                                <p:cTn id="20" presetID="53" presetClass="entr" presetSubtype="16" fill="hold" grpId="0" nodeType="afterEffect">
-                                  <p:stCondLst>
-                                    <p:cond delay="0"/>
-                                  </p:stCondLst>
-                                  <p:childTnLst>
-                                    <p:set>
-                                      <p:cBhvr>
-                                        <p:cTn id="21" dur="1" fill="hold">
-                                          <p:stCondLst>
-                                            <p:cond delay="0"/>
-                                          </p:stCondLst>
-                                        </p:cTn>
-                                        <p:tgtEl>
-                                          <p:spTgt spid="12"/>
-                                        </p:tgtEl>
-                                        <p:attrNameLst>
-                                          <p:attrName>style.visibility</p:attrName>
-                                        </p:attrNameLst>
-                                      </p:cBhvr>
-                                      <p:to>
-                                        <p:strVal val="visible"/>
-                                      </p:to>
-                                    </p:set>
-                                    <p:animEffect transition="in" filter="fade">
-                                      <p:cBhvr>
-                                        <p:cTn id="22" dur="550"/>
-                                        <p:tgtEl>
-                                          <p:spTgt spid="12"/>
-                                        </p:tgtEl>
-                                      </p:cBhvr>
-                                    </p:animEffect>
-                                    <p:anim calcmode="lin" valueType="num">
-                                      <p:cBhvr additive="base">
-                                        <p:cTn id="23" dur="550" fill="hold"/>
-                                        <p:tgtEl>
-                                          <p:spTgt spid="12"/>
-                                        </p:tgtEl>
-                                        <p:attrNameLst>
-                                          <p:attrName>ppt_w</p:attrName>
-                                        </p:attrNameLst>
-                                      </p:cBhvr>
-                                      <p:tavLst>
-                                        <p:tav tm="0">
-                                          <p:val>
-                                            <p:strVal val="0"/>
-                                          </p:val>
-                                        </p:tav>
-                                        <p:tav tm="100000">
-                                          <p:val>
-                                            <p:strVal val="#ppt_w"/>
-                                          </p:val>
-                                        </p:tav>
-                                      </p:tavLst>
-                                    </p:anim>
-                                    <p:anim calcmode="lin" valueType="num">
-                                      <p:cBhvr additive="base">
-                                        <p:cTn id="24" dur="550" fill="hold"/>
-                                        <p:tgtEl>
-                                          <p:spTgt spid="12"/>
-                                        </p:tgtEl>
-                                        <p:attrNameLst>
-                                          <p:attrName>ppt_h</p:attrName>
-                                        </p:attrNameLst>
-                                      </p:cBhvr>
-                                      <p:tavLst>
-                                        <p:tav tm="0">
-                                          <p:val>
-                                            <p:strVal val="0"/>
-                                          </p:val>
-                                        </p:tav>
-                                        <p:tav tm="100000">
-                                          <p:val>
-                                            <p:strVal val="#ppt_h"/>
-                                          </p:val>
-                                        </p:tav>
-                                      </p:tavLst>
-                                    </p:anim>
-                                  </p:childTnLst>
-                                </p:cTn>
-                              </p:par>
-                            </p:childTnLst>
-                          </p:cTn>
-                        </p:par>
-                        <p:par>
-                          <p:cTn id="25" fill="hold">
-                            <p:stCondLst>
-                              <p:cond delay="220"/>
-                            </p:stCondLst>
-                            <p:childTnLst>
-                              <p:par>
-                                <p:cTn id="26" presetID="42" presetClass="entr" presetSubtype="0" fill="hold" grpId="0" nodeType="afterEffect">
-                                  <p:stCondLst>
-                                    <p:cond delay="0"/>
-                                  </p:stCondLst>
-                                  <p:childTnLst>
-                                    <p:set>
-                                      <p:cBhvr>
-                                        <p:cTn id="27" dur="1" fill="hold">
-                                          <p:stCondLst>
-                                            <p:cond delay="0"/>
-                                          </p:stCondLst>
-                                        </p:cTn>
-                                        <p:tgtEl>
-                                          <p:spTgt spid="13"/>
-                                        </p:tgtEl>
-                                        <p:attrNameLst>
-                                          <p:attrName>style.visibility</p:attrName>
-                                        </p:attrNameLst>
-                                      </p:cBhvr>
-                                      <p:to>
-                                        <p:strVal val="visible"/>
-                                      </p:to>
-                                    </p:set>
-                                    <p:animEffect transition="in" filter="fade">
-                                      <p:cBhvr>
-                                        <p:cTn id="28" dur="550"/>
-                                        <p:tgtEl>
-                                          <p:spTgt spid="13"/>
-                                        </p:tgtEl>
-                                      </p:cBhvr>
-                                    </p:animEffect>
-                                    <p:anim calcmode="lin" valueType="num">
-                                      <p:cBhvr additive="base">
-                                        <p:cTn id="29" dur="550" fill="hold"/>
-                                        <p:tgtEl>
-                                          <p:spTgt spid="13"/>
-                                        </p:tgtEl>
-                                        <p:attrNameLst>
-                                          <p:attrName>ppt_x</p:attrName>
-                                        </p:attrNameLst>
-                                      </p:cBhvr>
-                                      <p:tavLst>
-                                        <p:tav tm="0">
-                                          <p:val>
-                                            <p:strVal val="#ppt_x"/>
-                                          </p:val>
-                                        </p:tav>
-                                        <p:tav tm="100000">
-                                          <p:val>
-                                            <p:strVal val="#ppt_x"/>
-                                          </p:val>
-                                        </p:tav>
-                                      </p:tavLst>
-                                    </p:anim>
-                                    <p:anim calcmode="lin" valueType="num">
-                                      <p:cBhvr additive="base">
-                                        <p:cTn id="30" dur="550" fill="hold"/>
-                                        <p:tgtEl>
-                                          <p:spTgt spid="13"/>
-                                        </p:tgtEl>
-                                        <p:attrNameLst>
-                                          <p:attrName>ppt_y</p:attrName>
-                                        </p:attrNameLst>
-                                      </p:cBhvr>
-                                      <p:tavLst>
-                                        <p:tav tm="0">
-                                          <p:val>
-                                            <p:strVal val="#ppt_y+.08"/>
-                                          </p:val>
-                                        </p:tav>
-                                        <p:tav tm="100000">
-                                          <p:val>
-                                            <p:strVal val="#ppt_y"/>
-                                          </p:val>
-                                        </p:tav>
-                                      </p:tavLst>
-                                    </p:anim>
-                                  </p:childTnLst>
-                                </p:cTn>
-                              </p:par>
-                            </p:childTnLst>
-                          </p:cTn>
-                        </p:par>
-                        <p:par>
-                          <p:cTn id="31" fill="hold">
-                            <p:stCondLst>
-                              <p:cond delay="440"/>
-                            </p:stCondLst>
-                            <p:childTnLst>
-                              <p:par>
-                                <p:cTn id="32" presetID="42" presetClass="entr" presetSubtype="0" fill="hold" grpId="0" nodeType="afterEffect">
-                                  <p:stCondLst>
-                                    <p:cond delay="0"/>
-                                  </p:stCondLst>
-                                  <p:childTnLst>
-                                    <p:set>
-                                      <p:cBhvr>
-                                        <p:cTn id="33" dur="1" fill="hold">
-                                          <p:stCondLst>
-                                            <p:cond delay="0"/>
-                                          </p:stCondLst>
-                                        </p:cTn>
-                                        <p:tgtEl>
-                                          <p:spTgt spid="14"/>
-                                        </p:tgtEl>
-                                        <p:attrNameLst>
-                                          <p:attrName>style.visibility</p:attrName>
-                                        </p:attrNameLst>
-                                      </p:cBhvr>
-                                      <p:to>
-                                        <p:strVal val="visible"/>
-                                      </p:to>
-                                    </p:set>
-                                    <p:animEffect transition="in" filter="fade">
-                                      <p:cBhvr>
-                                        <p:cTn id="34" dur="550"/>
-                                        <p:tgtEl>
-                                          <p:spTgt spid="14"/>
-                                        </p:tgtEl>
-                                      </p:cBhvr>
-                                    </p:animEffect>
-                                    <p:anim calcmode="lin" valueType="num">
-                                      <p:cBhvr additive="base">
-                                        <p:cTn id="35" dur="550" fill="hold"/>
-                                        <p:tgtEl>
-                                          <p:spTgt spid="14"/>
-                                        </p:tgtEl>
-                                        <p:attrNameLst>
-                                          <p:attrName>ppt_x</p:attrName>
-                                        </p:attrNameLst>
-                                      </p:cBhvr>
-                                      <p:tavLst>
-                                        <p:tav tm="0">
-                                          <p:val>
-                                            <p:strVal val="#ppt_x"/>
-                                          </p:val>
-                                        </p:tav>
-                                        <p:tav tm="100000">
-                                          <p:val>
-                                            <p:strVal val="#ppt_x"/>
-                                          </p:val>
-                                        </p:tav>
-                                      </p:tavLst>
-                                    </p:anim>
-                                    <p:anim calcmode="lin" valueType="num">
-                                      <p:cBhvr additive="base">
-                                        <p:cTn id="36" dur="550" fill="hold"/>
-                                        <p:tgtEl>
-                                          <p:spTgt spid="14"/>
-                                        </p:tgtEl>
-                                        <p:attrNameLst>
-                                          <p:attrName>ppt_y</p:attrName>
-                                        </p:attrNameLst>
-                                      </p:cBhvr>
-                                      <p:tavLst>
-                                        <p:tav tm="0">
-                                          <p:val>
-                                            <p:strVal val="#ppt_y+.08"/>
-                                          </p:val>
-                                        </p:tav>
-                                        <p:tav tm="100000">
-                                          <p:val>
-                                            <p:strVal val="#ppt_y"/>
-                                          </p:val>
-                                        </p:tav>
-                                      </p:tavLst>
-                                    </p:anim>
-                                  </p:childTnLst>
-                                </p:cTn>
-                              </p:par>
-                            </p:childTnLst>
-                          </p:cTn>
-                        </p:par>
-                        <p:par>
-                          <p:cTn id="37" fill="hold">
-                            <p:stCondLst>
-                              <p:cond delay="440"/>
-                            </p:stCondLst>
-                            <p:childTnLst>
-                              <p:par>
-                                <p:cTn id="38" presetID="42" presetClass="entr" presetSubtype="0" fill="hold" grpId="0" nodeType="afterEffect">
-                                  <p:stCondLst>
-                                    <p:cond delay="0"/>
-                                  </p:stCondLst>
-                                  <p:childTnLst>
-                                    <p:set>
-                                      <p:cBhvr>
-                                        <p:cTn id="39" dur="1" fill="hold">
-                                          <p:stCondLst>
-                                            <p:cond delay="0"/>
-                                          </p:stCondLst>
-                                        </p:cTn>
-                                        <p:tgtEl>
-                                          <p:spTgt spid="15"/>
-                                        </p:tgtEl>
-                                        <p:attrNameLst>
-                                          <p:attrName>style.visibility</p:attrName>
-                                        </p:attrNameLst>
-                                      </p:cBhvr>
-                                      <p:to>
-                                        <p:strVal val="visible"/>
-                                      </p:to>
-                                    </p:set>
-                                    <p:animEffect transition="in" filter="fade">
-                                      <p:cBhvr>
-                                        <p:cTn id="40" dur="550"/>
-                                        <p:tgtEl>
-                                          <p:spTgt spid="15"/>
-                                        </p:tgtEl>
-                                      </p:cBhvr>
-                                    </p:animEffect>
-                                    <p:anim calcmode="lin" valueType="num">
-                                      <p:cBhvr additive="base">
-                                        <p:cTn id="41" dur="550" fill="hold"/>
-                                        <p:tgtEl>
-                                          <p:spTgt spid="15"/>
-                                        </p:tgtEl>
-                                        <p:attrNameLst>
-                                          <p:attrName>ppt_x</p:attrName>
-                                        </p:attrNameLst>
-                                      </p:cBhvr>
-                                      <p:tavLst>
-                                        <p:tav tm="0">
-                                          <p:val>
-                                            <p:strVal val="#ppt_x"/>
-                                          </p:val>
-                                        </p:tav>
-                                        <p:tav tm="100000">
-                                          <p:val>
-                                            <p:strVal val="#ppt_x"/>
-                                          </p:val>
-                                        </p:tav>
-                                      </p:tavLst>
-                                    </p:anim>
-                                    <p:anim calcmode="lin" valueType="num">
-                                      <p:cBhvr additive="base">
-                                        <p:cTn id="42" dur="550" fill="hold"/>
-                                        <p:tgtEl>
-                                          <p:spTgt spid="15"/>
-                                        </p:tgtEl>
-                                        <p:attrNameLst>
-                                          <p:attrName>ppt_y</p:attrName>
-                                        </p:attrNameLst>
-                                      </p:cBhvr>
-                                      <p:tavLst>
-                                        <p:tav tm="0">
-                                          <p:val>
-                                            <p:strVal val="#ppt_y+.08"/>
-                                          </p:val>
-                                        </p:tav>
-                                        <p:tav tm="100000">
-                                          <p:val>
-                                            <p:strVal val="#ppt_y"/>
-                                          </p:val>
-                                        </p:tav>
-                                      </p:tavLst>
-                                    </p:anim>
-                                  </p:childTnLst>
-                                </p:cTn>
-                              </p:par>
-                            </p:childTnLst>
-                          </p:cTn>
-                        </p:par>
-                        <p:par>
-                          <p:cTn id="43" fill="hold">
-                            <p:stCondLst>
-                              <p:cond delay="440"/>
-                            </p:stCondLst>
-                            <p:childTnLst>
-                              <p:par>
-                                <p:cTn id="44" presetID="53" presetClass="entr" presetSubtype="16" fill="hold" grpId="0" nodeType="afterEffect">
-                                  <p:stCondLst>
-                                    <p:cond delay="0"/>
-                                  </p:stCondLst>
-                                  <p:childTnLst>
-                                    <p:set>
-                                      <p:cBhvr>
-                                        <p:cTn id="45" dur="1" fill="hold">
-                                          <p:stCondLst>
-                                            <p:cond delay="0"/>
-                                          </p:stCondLst>
-                                        </p:cTn>
-                                        <p:tgtEl>
-                                          <p:spTgt spid="16"/>
-                                        </p:tgtEl>
-                                        <p:attrNameLst>
-                                          <p:attrName>style.visibility</p:attrName>
-                                        </p:attrNameLst>
-                                      </p:cBhvr>
-                                      <p:to>
-                                        <p:strVal val="visible"/>
-                                      </p:to>
-                                    </p:set>
-                                    <p:animEffect transition="in" filter="fade">
-                                      <p:cBhvr>
-                                        <p:cTn id="46" dur="550"/>
-                                        <p:tgtEl>
-                                          <p:spTgt spid="16"/>
-                                        </p:tgtEl>
-                                      </p:cBhvr>
-                                    </p:animEffect>
-                                    <p:anim calcmode="lin" valueType="num">
-                                      <p:cBhvr additive="base">
-                                        <p:cTn id="47" dur="550" fill="hold"/>
-                                        <p:tgtEl>
-                                          <p:spTgt spid="16"/>
-                                        </p:tgtEl>
-                                        <p:attrNameLst>
-                                          <p:attrName>ppt_w</p:attrName>
-                                        </p:attrNameLst>
-                                      </p:cBhvr>
-                                      <p:tavLst>
-                                        <p:tav tm="0">
-                                          <p:val>
-                                            <p:strVal val="0"/>
-                                          </p:val>
-                                        </p:tav>
-                                        <p:tav tm="100000">
-                                          <p:val>
-                                            <p:strVal val="#ppt_w"/>
-                                          </p:val>
-                                        </p:tav>
-                                      </p:tavLst>
-                                    </p:anim>
-                                    <p:anim calcmode="lin" valueType="num">
-                                      <p:cBhvr additive="base">
-                                        <p:cTn id="48" dur="550" fill="hold"/>
-                                        <p:tgtEl>
-                                          <p:spTgt spid="16"/>
-                                        </p:tgtEl>
-                                        <p:attrNameLst>
-                                          <p:attrName>ppt_h</p:attrName>
-                                        </p:attrNameLst>
-                                      </p:cBhvr>
-                                      <p:tavLst>
-                                        <p:tav tm="0">
-                                          <p:val>
-                                            <p:strVal val="0"/>
-                                          </p:val>
-                                        </p:tav>
-                                        <p:tav tm="100000">
-                                          <p:val>
-                                            <p:strVal val="#ppt_h"/>
-                                          </p:val>
-                                        </p:tav>
-                                      </p:tavLst>
-                                    </p:anim>
-                                  </p:childTnLst>
-                                </p:cTn>
-                              </p:par>
-                            </p:childTnLst>
-                          </p:cTn>
-                        </p:par>
-                        <p:par>
-                          <p:cTn id="49" fill="hold">
-                            <p:stCondLst>
-                              <p:cond delay="440"/>
-                            </p:stCondLst>
-                            <p:childTnLst>
-                              <p:par>
-                                <p:cTn id="50" presetID="42" presetClass="entr" presetSubtype="0" fill="hold" grpId="0" nodeType="afterEffect">
-                                  <p:stCondLst>
-                                    <p:cond delay="0"/>
-                                  </p:stCondLst>
-                                  <p:childTnLst>
-                                    <p:set>
-                                      <p:cBhvr>
-                                        <p:cTn id="51" dur="1" fill="hold">
-                                          <p:stCondLst>
-                                            <p:cond delay="0"/>
-                                          </p:stCondLst>
-                                        </p:cTn>
-                                        <p:tgtEl>
-                                          <p:spTgt spid="17"/>
-                                        </p:tgtEl>
-                                        <p:attrNameLst>
-                                          <p:attrName>style.visibility</p:attrName>
-                                        </p:attrNameLst>
-                                      </p:cBhvr>
-                                      <p:to>
-                                        <p:strVal val="visible"/>
-                                      </p:to>
-                                    </p:set>
-                                    <p:animEffect transition="in" filter="fade">
-                                      <p:cBhvr>
-                                        <p:cTn id="52" dur="550"/>
-                                        <p:tgtEl>
-                                          <p:spTgt spid="17"/>
-                                        </p:tgtEl>
-                                      </p:cBhvr>
-                                    </p:animEffect>
-                                    <p:anim calcmode="lin" valueType="num">
-                                      <p:cBhvr additive="base">
-                                        <p:cTn id="53" dur="550" fill="hold"/>
-                                        <p:tgtEl>
-                                          <p:spTgt spid="17"/>
-                                        </p:tgtEl>
-                                        <p:attrNameLst>
-                                          <p:attrName>ppt_x</p:attrName>
-                                        </p:attrNameLst>
-                                      </p:cBhvr>
-                                      <p:tavLst>
-                                        <p:tav tm="0">
-                                          <p:val>
-                                            <p:strVal val="#ppt_x"/>
-                                          </p:val>
-                                        </p:tav>
-                                        <p:tav tm="100000">
-                                          <p:val>
-                                            <p:strVal val="#ppt_x"/>
-                                          </p:val>
-                                        </p:tav>
-                                      </p:tavLst>
-                                    </p:anim>
-                                    <p:anim calcmode="lin" valueType="num">
-                                      <p:cBhvr additive="base">
-                                        <p:cTn id="54" dur="550" fill="hold"/>
-                                        <p:tgtEl>
-                                          <p:spTgt spid="17"/>
-                                        </p:tgtEl>
-                                        <p:attrNameLst>
-                                          <p:attrName>ppt_y</p:attrName>
-                                        </p:attrNameLst>
-                                      </p:cBhvr>
-                                      <p:tavLst>
-                                        <p:tav tm="0">
-                                          <p:val>
-                                            <p:strVal val="#ppt_y+.08"/>
-                                          </p:val>
-                                        </p:tav>
-                                        <p:tav tm="100000">
-                                          <p:val>
-                                            <p:strVal val="#ppt_y"/>
-                                          </p:val>
-                                        </p:tav>
-                                      </p:tavLst>
-                                    </p:anim>
-                                  </p:childTnLst>
-                                </p:cTn>
-                              </p:par>
-                            </p:childTnLst>
-                          </p:cTn>
-                        </p:par>
-                      </p:childTnLst>
-                    </p:cTn>
-                  </p:par>
-                </p:childTnLst>
-              </p:cTn>
-              <p:prevCondLst>
-                <p:cond evt="onPrev" delay="0">
-                  <p:tgtEl>
-                    <p:sldTgt/>
-                  </p:tgtEl>
-                </p:cond>
-              </p:prevCondLst>
-              <p:nextCondLst>
-                <p:cond evt="onNext" delay="0">
-                  <p:tgtEl>
-                    <p:sldTgt/>
-                  </p:tgtEl>
-                </p:cond>
-              </p:nextCondLst>
-            </p:seq>
-          </p:childTnLst>
-        </p:cTn>
-      </p:par>
-    </p:tnLst>
-    <p:bldLst>
-      <p:bldP spid="6" grpId="0" animBg="1"/>
-      <p:bldP spid="10" grpId="0" animBg="1"/>
-      <p:bldP spid="11" grpId="0" animBg="1"/>
-      <p:bldP spid="12" grpId="0" animBg="1"/>
-      <p:bldP spid="13" grpId="0" animBg="1"/>
-      <p:bldP spid="14" grpId="0" animBg="1"/>
-      <p:bldP spid="15" grpId="0" animBg="1"/>
-      <p:bldP spid="16" grpId="0" animBg="1"/>
-      <p:bldP spid="17" grpId="0" animBg="1"/>
     </p:bldLst>
   </p:timing>
 </p:sld>
